--- a/docs/SIMCOMP.pptx
+++ b/docs/SIMCOMP.pptx
@@ -1,9 +1,15 @@
 
 <file path=ppt/presentation.xml><?xml version="1.0" encoding="utf-8"?>
-<p:presentation xmlns:a="http://schemas.openxmlformats.org/drawingml/2006/main" xmlns:r="http://schemas.openxmlformats.org/officeDocument/2006/relationships" xmlns:p="http://schemas.openxmlformats.org/presentationml/2006/main" saveSubsetFonts="1" autoCompressPictures="0">
+<p:presentation xmlns:a="http://schemas.openxmlformats.org/drawingml/2006/main" xmlns:r="http://schemas.openxmlformats.org/officeDocument/2006/relationships" xmlns:p="http://schemas.openxmlformats.org/presentationml/2006/main" showSpecialPlsOnTitleSld="0" saveSubsetFonts="1" autoCompressPictures="0">
   <p:sldMasterIdLst>
     <p:sldMasterId id="2147483648" r:id="rId1"/>
   </p:sldMasterIdLst>
+  <p:notesMasterIdLst>
+    <p:notesMasterId r:id="rId12"/>
+  </p:notesMasterIdLst>
+  <p:handoutMasterIdLst>
+    <p:handoutMasterId r:id="rId13"/>
+  </p:handoutMasterIdLst>
   <p:sldIdLst>
     <p:sldId id="256" r:id="rId2"/>
     <p:sldId id="257" r:id="rId3"/>
@@ -16,9 +22,6 @@
     <p:sldId id="264" r:id="rId10"/>
     <p:sldId id="265" r:id="rId11"/>
   </p:sldIdLst>
-  <p:notesMasterIdLst>
-    <p:notesMasterId r:id="rId12"/>
-  </p:notesMasterIdLst>
   <p:sldSz cx="12192000" cy="6858000"/>
   <p:notesSz cx="6858000" cy="12192000"/>
   <p:defaultTextStyle>
@@ -113,7 +116,202 @@
       </a:defRPr>
     </a:lvl9pPr>
   </p:defaultTextStyle>
+  <p:extLst>
+    <p:ext uri="{EFAFB233-063F-42B5-8137-9DF3F51BA10A}">
+      <p15:sldGuideLst xmlns:p15="http://schemas.microsoft.com/office/powerpoint/2012/main"/>
+    </p:ext>
+  </p:extLst>
 </p:presentation>
+</file>
+
+<file path=ppt/handoutMasters/handoutMaster1.xml><?xml version="1.0" encoding="utf-8"?>
+<p:handoutMaster xmlns:a="http://schemas.openxmlformats.org/drawingml/2006/main" xmlns:r="http://schemas.openxmlformats.org/officeDocument/2006/relationships" xmlns:p="http://schemas.openxmlformats.org/presentationml/2006/main">
+  <p:cSld>
+    <p:bg>
+      <p:bgRef idx="1001">
+        <a:schemeClr val="bg1"/>
+      </p:bgRef>
+    </p:bg>
+    <p:spTree>
+      <p:nvGrpSpPr>
+        <p:cNvPr id="1" name=""/>
+        <p:cNvGrpSpPr/>
+        <p:nvPr/>
+      </p:nvGrpSpPr>
+      <p:grpSpPr>
+        <a:xfrm>
+          <a:off x="0" y="0"/>
+          <a:ext cx="0" cy="0"/>
+          <a:chOff x="0" y="0"/>
+          <a:chExt cx="0" cy="0"/>
+        </a:xfrm>
+      </p:grpSpPr>
+      <p:sp>
+        <p:nvSpPr>
+          <p:cNvPr id="2" name="Marcador de encabezado 1">
+            <a:extLst>
+              <a:ext uri="{FF2B5EF4-FFF2-40B4-BE49-F238E27FC236}">
+                <a16:creationId xmlns:a16="http://schemas.microsoft.com/office/drawing/2014/main" id="{C2A177CD-78F5-F290-3F7F-85E22A7AA6B4}"/>
+              </a:ext>
+            </a:extLst>
+          </p:cNvPr>
+          <p:cNvSpPr>
+            <a:spLocks noGrp="1"/>
+          </p:cNvSpPr>
+          <p:nvPr>
+            <p:ph type="hdr" sz="quarter"/>
+          </p:nvPr>
+        </p:nvSpPr>
+        <p:spPr>
+          <a:xfrm>
+            <a:off x="0" y="0"/>
+            <a:ext cx="2971800" cy="611188"/>
+          </a:xfrm>
+          <a:prstGeom prst="rect">
+            <a:avLst/>
+          </a:prstGeom>
+        </p:spPr>
+        <p:txBody>
+          <a:bodyPr vert="horz" lIns="91440" tIns="45720" rIns="91440" bIns="45720" rtlCol="0"/>
+          <a:lstStyle>
+            <a:lvl1pPr algn="l">
+              <a:defRPr sz="1200"/>
+            </a:lvl1pPr>
+          </a:lstStyle>
+          <a:p>
+            <a:endParaRPr lang="es-MX"/>
+          </a:p>
+        </p:txBody>
+      </p:sp>
+      <p:sp>
+        <p:nvSpPr>
+          <p:cNvPr id="3" name="Marcador de fecha 2">
+            <a:extLst>
+              <a:ext uri="{FF2B5EF4-FFF2-40B4-BE49-F238E27FC236}">
+                <a16:creationId xmlns:a16="http://schemas.microsoft.com/office/drawing/2014/main" id="{F72F4016-603F-A170-4C67-E38B2999D6AC}"/>
+              </a:ext>
+            </a:extLst>
+          </p:cNvPr>
+          <p:cNvSpPr>
+            <a:spLocks noGrp="1"/>
+          </p:cNvSpPr>
+          <p:nvPr>
+            <p:ph type="dt" sz="quarter" idx="1"/>
+          </p:nvPr>
+        </p:nvSpPr>
+        <p:spPr>
+          <a:xfrm>
+            <a:off x="3884613" y="0"/>
+            <a:ext cx="2971800" cy="611188"/>
+          </a:xfrm>
+          <a:prstGeom prst="rect">
+            <a:avLst/>
+          </a:prstGeom>
+        </p:spPr>
+        <p:txBody>
+          <a:bodyPr vert="horz" lIns="91440" tIns="45720" rIns="91440" bIns="45720" rtlCol="0"/>
+          <a:lstStyle>
+            <a:lvl1pPr algn="r">
+              <a:defRPr sz="1200"/>
+            </a:lvl1pPr>
+          </a:lstStyle>
+          <a:p>
+            <a:fld id="{746E1C0B-6169-49F2-BB92-567555A48C02}" type="datetimeFigureOut">
+              <a:rPr lang="es-MX" smtClean="0"/>
+              <a:t>05/04/2026</a:t>
+            </a:fld>
+            <a:endParaRPr lang="es-MX"/>
+          </a:p>
+        </p:txBody>
+      </p:sp>
+      <p:sp>
+        <p:nvSpPr>
+          <p:cNvPr id="4" name="Marcador de pie de página 3">
+            <a:extLst>
+              <a:ext uri="{FF2B5EF4-FFF2-40B4-BE49-F238E27FC236}">
+                <a16:creationId xmlns:a16="http://schemas.microsoft.com/office/drawing/2014/main" id="{B5A0662B-1003-47CF-771F-790A6F313C82}"/>
+              </a:ext>
+            </a:extLst>
+          </p:cNvPr>
+          <p:cNvSpPr>
+            <a:spLocks noGrp="1"/>
+          </p:cNvSpPr>
+          <p:nvPr>
+            <p:ph type="ftr" sz="quarter" idx="2"/>
+          </p:nvPr>
+        </p:nvSpPr>
+        <p:spPr>
+          <a:xfrm>
+            <a:off x="0" y="11580813"/>
+            <a:ext cx="2971800" cy="611187"/>
+          </a:xfrm>
+          <a:prstGeom prst="rect">
+            <a:avLst/>
+          </a:prstGeom>
+        </p:spPr>
+        <p:txBody>
+          <a:bodyPr vert="horz" lIns="91440" tIns="45720" rIns="91440" bIns="45720" rtlCol="0" anchor="b"/>
+          <a:lstStyle>
+            <a:lvl1pPr algn="l">
+              <a:defRPr sz="1200"/>
+            </a:lvl1pPr>
+          </a:lstStyle>
+          <a:p>
+            <a:endParaRPr lang="es-MX"/>
+          </a:p>
+        </p:txBody>
+      </p:sp>
+      <p:sp>
+        <p:nvSpPr>
+          <p:cNvPr id="5" name="Marcador de número de diapositiva 4">
+            <a:extLst>
+              <a:ext uri="{FF2B5EF4-FFF2-40B4-BE49-F238E27FC236}">
+                <a16:creationId xmlns:a16="http://schemas.microsoft.com/office/drawing/2014/main" id="{548F6C9E-5352-8385-C49C-11761856AE1C}"/>
+              </a:ext>
+            </a:extLst>
+          </p:cNvPr>
+          <p:cNvSpPr>
+            <a:spLocks noGrp="1"/>
+          </p:cNvSpPr>
+          <p:nvPr>
+            <p:ph type="sldNum" sz="quarter" idx="3"/>
+          </p:nvPr>
+        </p:nvSpPr>
+        <p:spPr>
+          <a:xfrm>
+            <a:off x="3884613" y="11580813"/>
+            <a:ext cx="2971800" cy="611187"/>
+          </a:xfrm>
+          <a:prstGeom prst="rect">
+            <a:avLst/>
+          </a:prstGeom>
+        </p:spPr>
+        <p:txBody>
+          <a:bodyPr vert="horz" lIns="91440" tIns="45720" rIns="91440" bIns="45720" rtlCol="0" anchor="b"/>
+          <a:lstStyle>
+            <a:lvl1pPr algn="r">
+              <a:defRPr sz="1200"/>
+            </a:lvl1pPr>
+          </a:lstStyle>
+          <a:p>
+            <a:fld id="{9CBB361F-541E-4C94-B419-26869A6A8AF5}" type="slidenum">
+              <a:rPr lang="es-MX" smtClean="0"/>
+              <a:t>‹Nº›</a:t>
+            </a:fld>
+            <a:endParaRPr lang="es-MX"/>
+          </a:p>
+        </p:txBody>
+      </p:sp>
+    </p:spTree>
+    <p:extLst>
+      <p:ext uri="{BB962C8B-B14F-4D97-AF65-F5344CB8AC3E}">
+        <p14:creationId xmlns:p14="http://schemas.microsoft.com/office/powerpoint/2010/main" val="1790398179"/>
+      </p:ext>
+    </p:extLst>
+  </p:cSld>
+  <p:clrMap bg1="lt1" tx1="dk1" bg2="lt2" tx2="dk2" accent1="accent1" accent2="accent2" accent3="accent3" accent4="accent4" accent5="accent5" accent6="accent6" hlink="hlink" folHlink="folHlink"/>
+  <p:hf sldNum="0" hdr="0" ftr="0" dt="0"/>
+</p:handoutMaster>
 </file>
 
 <file path=ppt/notesMasters/notesMaster1.xml><?xml version="1.0" encoding="utf-8"?>
@@ -138,238 +336,15 @@
           <a:chExt cx="0" cy="0"/>
         </a:xfrm>
       </p:grpSpPr>
-      <p:sp>
-        <p:nvSpPr>
-          <p:cNvPr id="2" name="Header Placeholder 1"/>
-          <p:cNvSpPr>
-            <a:spLocks noGrp="1"/>
-          </p:cNvSpPr>
-          <p:nvPr>
-            <p:ph type="hdr" sz="quarter"/>
-          </p:nvPr>
-        </p:nvSpPr>
-        <p:spPr>
-          <a:xfrm>
-            <a:off x="0" y="0"/>
-            <a:ext cx="2971800" cy="458788"/>
-          </a:xfrm>
-          <a:prstGeom prst="rect">
-            <a:avLst/>
-          </a:prstGeom>
-        </p:spPr>
-        <p:txBody>
-          <a:bodyPr vert="horz" lIns="91440" tIns="45720" rIns="91440" bIns="45720" rtlCol="0"/>
-          <a:lstStyle>
-            <a:lvl1pPr algn="l">
-              <a:defRPr sz="1200"/>
-            </a:lvl1pPr>
-          </a:lstStyle>
-          <a:p>
-            <a:endParaRPr lang="en-US"/>
-          </a:p>
-        </p:txBody>
-      </p:sp>
-      <p:sp>
-        <p:nvSpPr>
-          <p:cNvPr id="3" name="Date Placeholder 2"/>
-          <p:cNvSpPr>
-            <a:spLocks noGrp="1"/>
-          </p:cNvSpPr>
-          <p:nvPr>
-            <p:ph type="dt" idx="1"/>
-          </p:nvPr>
-        </p:nvSpPr>
-        <p:spPr>
-          <a:xfrm>
-            <a:off x="3884613" y="0"/>
-            <a:ext cx="2971800" cy="458788"/>
-          </a:xfrm>
-          <a:prstGeom prst="rect">
-            <a:avLst/>
-          </a:prstGeom>
-        </p:spPr>
-        <p:txBody>
-          <a:bodyPr vert="horz" lIns="91440" tIns="45720" rIns="91440" bIns="45720" rtlCol="0"/>
-          <a:lstStyle>
-            <a:lvl1pPr algn="r">
-              <a:defRPr sz="1200"/>
-            </a:lvl1pPr>
-          </a:lstStyle>
-          <a:p>
-            <a:fld id="{5282F153-3F37-0F45-9E97-73ACFA13230C}" type="datetimeFigureOut">
-              <a:rPr lang="en-US"/>
-              <a:t>7/23/19</a:t>
-            </a:fld>
-            <a:endParaRPr lang="en-US"/>
-          </a:p>
-        </p:txBody>
-      </p:sp>
-      <p:sp>
-        <p:nvSpPr>
-          <p:cNvPr id="4" name="Slide Image Placeholder 3"/>
-          <p:cNvSpPr>
-            <a:spLocks noGrp="1" noRot="1" noChangeAspect="1"/>
-          </p:cNvSpPr>
-          <p:nvPr>
-            <p:ph type="sldImg" idx="2"/>
-          </p:nvPr>
-        </p:nvSpPr>
-        <p:spPr>
-          <a:xfrm>
-            <a:off x="685800" y="1143000"/>
-            <a:ext cx="5486400" cy="3086100"/>
-          </a:xfrm>
-          <a:prstGeom prst="rect">
-            <a:avLst/>
-          </a:prstGeom>
-          <a:noFill/>
-          <a:ln w="12700">
-            <a:solidFill>
-              <a:prstClr val="black"/>
-            </a:solidFill>
-          </a:ln>
-        </p:spPr>
-        <p:txBody>
-          <a:bodyPr vert="horz" lIns="91440" tIns="45720" rIns="91440" bIns="45720" rtlCol="0" anchor="ctr"/>
-          <a:lstStyle/>
-          <a:p>
-            <a:endParaRPr lang="en-US"/>
-          </a:p>
-        </p:txBody>
-      </p:sp>
-      <p:sp>
-        <p:nvSpPr>
-          <p:cNvPr id="5" name="Notes Placeholder 4"/>
-          <p:cNvSpPr>
-            <a:spLocks noGrp="1"/>
-          </p:cNvSpPr>
-          <p:nvPr>
-            <p:ph type="body" sz="quarter" idx="3"/>
-          </p:nvPr>
-        </p:nvSpPr>
-        <p:spPr>
-          <a:xfrm>
-            <a:off x="685800" y="4400550"/>
-            <a:ext cx="5486400" cy="3600450"/>
-          </a:xfrm>
-          <a:prstGeom prst="rect">
-            <a:avLst/>
-          </a:prstGeom>
-        </p:spPr>
-        <p:txBody>
-          <a:bodyPr vert="horz" lIns="91440" tIns="45720" rIns="91440" bIns="45720" rtlCol="0"/>
-          <a:lstStyle/>
-          <a:p>
-            <a:pPr lvl="0"/>
-            <a:r>
-              <a:rPr lang="en-US"/>
-              <a:t>Click to edit Master text styles</a:t>
-            </a:r>
-          </a:p>
-          <a:p>
-            <a:pPr lvl="1"/>
-            <a:r>
-              <a:rPr lang="en-US"/>
-              <a:t>Second level</a:t>
-            </a:r>
-          </a:p>
-          <a:p>
-            <a:pPr lvl="2"/>
-            <a:r>
-              <a:rPr lang="en-US"/>
-              <a:t>Third level</a:t>
-            </a:r>
-          </a:p>
-          <a:p>
-            <a:pPr lvl="3"/>
-            <a:r>
-              <a:rPr lang="en-US"/>
-              <a:t>Fourth level</a:t>
-            </a:r>
-          </a:p>
-          <a:p>
-            <a:pPr lvl="4"/>
-            <a:r>
-              <a:rPr lang="en-US"/>
-              <a:t>Fifth level</a:t>
-            </a:r>
-          </a:p>
-        </p:txBody>
-      </p:sp>
-      <p:sp>
-        <p:nvSpPr>
-          <p:cNvPr id="6" name="Footer Placeholder 5"/>
-          <p:cNvSpPr>
-            <a:spLocks noGrp="1"/>
-          </p:cNvSpPr>
-          <p:nvPr>
-            <p:ph type="ftr" sz="quarter" idx="4"/>
-          </p:nvPr>
-        </p:nvSpPr>
-        <p:spPr>
-          <a:xfrm>
-            <a:off x="0" y="8685213"/>
-            <a:ext cx="2971800" cy="458787"/>
-          </a:xfrm>
-          <a:prstGeom prst="rect">
-            <a:avLst/>
-          </a:prstGeom>
-        </p:spPr>
-        <p:txBody>
-          <a:bodyPr vert="horz" lIns="91440" tIns="45720" rIns="91440" bIns="45720" rtlCol="0" anchor="b"/>
-          <a:lstStyle>
-            <a:lvl1pPr algn="l">
-              <a:defRPr sz="1200"/>
-            </a:lvl1pPr>
-          </a:lstStyle>
-          <a:p>
-            <a:endParaRPr lang="en-US"/>
-          </a:p>
-        </p:txBody>
-      </p:sp>
-      <p:sp>
-        <p:nvSpPr>
-          <p:cNvPr id="7" name="Slide Number Placeholder 6"/>
-          <p:cNvSpPr>
-            <a:spLocks noGrp="1"/>
-          </p:cNvSpPr>
-          <p:nvPr>
-            <p:ph type="sldNum" sz="quarter" idx="5"/>
-          </p:nvPr>
-        </p:nvSpPr>
-        <p:spPr>
-          <a:xfrm>
-            <a:off x="3884613" y="8685213"/>
-            <a:ext cx="2971800" cy="458787"/>
-          </a:xfrm>
-          <a:prstGeom prst="rect">
-            <a:avLst/>
-          </a:prstGeom>
-        </p:spPr>
-        <p:txBody>
-          <a:bodyPr vert="horz" lIns="91440" tIns="45720" rIns="91440" bIns="45720" rtlCol="0" anchor="b"/>
-          <a:lstStyle>
-            <a:lvl1pPr algn="r">
-              <a:defRPr sz="1200"/>
-            </a:lvl1pPr>
-          </a:lstStyle>
-          <a:p>
-            <a:fld id="{CE5E9CC1-C706-0F49-92D6-E571CC5EEA8F}" type="slidenum">
-              <a:rPr lang="en-US"/>
-              <a:t>‹#›</a:t>
-            </a:fld>
-            <a:endParaRPr lang="en-US"/>
-          </a:p>
-        </p:txBody>
-      </p:sp>
     </p:spTree>
     <p:extLst>
       <p:ext uri="{BB962C8B-B14F-4D97-AF65-F5344CB8AC3E}">
-        <p14:creationId xmlns:p14="http://schemas.microsoft.com/office/powerpoint/2010/main" val="1024086991"/>
+        <p14:creationId xmlns:p14="http://schemas.microsoft.com/office/powerpoint/2010/main" val="3768906993"/>
       </p:ext>
     </p:extLst>
   </p:cSld>
   <p:clrMap bg1="lt1" tx1="dk1" bg2="lt2" tx2="dk2" accent1="accent1" accent2="accent2" accent3="accent3" accent4="accent4" accent5="accent5" accent6="accent6" hlink="hlink" folHlink="folHlink"/>
+  <p:hf sldNum="0" hdr="0" ftr="0" dt="0"/>
   <p:notesStyle>
     <a:lvl1pPr marL="0" algn="l" defTabSz="914400" rtl="0" eaLnBrk="1" latinLnBrk="0" hangingPunct="1">
       <a:defRPr sz="1200" kern="1200">
@@ -509,34 +484,7 @@
           <a:bodyPr/>
           <a:lstStyle/>
           <a:p>
-            <a:r>
-              <a:rPr lang="en-US" dirty="0"/>
-              <a:t/>
-            </a:r>
             <a:endParaRPr lang="en-US" dirty="0"/>
-          </a:p>
-        </p:txBody>
-      </p:sp>
-      <p:sp>
-        <p:nvSpPr>
-          <p:cNvPr id="4" name="Slide Number Placeholder 3"/>
-          <p:cNvSpPr>
-            <a:spLocks noGrp="1"/>
-          </p:cNvSpPr>
-          <p:nvPr>
-            <p:ph type="sldNum" sz="quarter" idx="10"/>
-          </p:nvPr>
-        </p:nvSpPr>
-        <p:spPr/>
-        <p:txBody>
-          <a:bodyPr/>
-          <a:lstStyle/>
-          <a:p>
-            <a:fld id="{F7021451-1387-4CA6-816F-3879F97B5CBC}" type="slidenum">
-              <a:rPr lang="en-US"/>
-              <a:t>1</a:t>
-            </a:fld>
-            <a:endParaRPr lang="en-US"/>
           </a:p>
         </p:txBody>
       </p:sp>
@@ -597,34 +545,7 @@
           <a:bodyPr/>
           <a:lstStyle/>
           <a:p>
-            <a:r>
-              <a:rPr lang="en-US" dirty="0"/>
-              <a:t/>
-            </a:r>
             <a:endParaRPr lang="en-US" dirty="0"/>
-          </a:p>
-        </p:txBody>
-      </p:sp>
-      <p:sp>
-        <p:nvSpPr>
-          <p:cNvPr id="4" name="Slide Number Placeholder 3"/>
-          <p:cNvSpPr>
-            <a:spLocks noGrp="1"/>
-          </p:cNvSpPr>
-          <p:nvPr>
-            <p:ph type="sldNum" sz="quarter" idx="10"/>
-          </p:nvPr>
-        </p:nvSpPr>
-        <p:spPr/>
-        <p:txBody>
-          <a:bodyPr/>
-          <a:lstStyle/>
-          <a:p>
-            <a:fld id="{F7021451-1387-4CA6-816F-3879F97B5CBC}" type="slidenum">
-              <a:rPr lang="en-US"/>
-              <a:t>10</a:t>
-            </a:fld>
-            <a:endParaRPr lang="en-US"/>
           </a:p>
         </p:txBody>
       </p:sp>
@@ -685,34 +606,7 @@
           <a:bodyPr/>
           <a:lstStyle/>
           <a:p>
-            <a:r>
-              <a:rPr lang="en-US" dirty="0"/>
-              <a:t/>
-            </a:r>
             <a:endParaRPr lang="en-US" dirty="0"/>
-          </a:p>
-        </p:txBody>
-      </p:sp>
-      <p:sp>
-        <p:nvSpPr>
-          <p:cNvPr id="4" name="Slide Number Placeholder 3"/>
-          <p:cNvSpPr>
-            <a:spLocks noGrp="1"/>
-          </p:cNvSpPr>
-          <p:nvPr>
-            <p:ph type="sldNum" sz="quarter" idx="10"/>
-          </p:nvPr>
-        </p:nvSpPr>
-        <p:spPr/>
-        <p:txBody>
-          <a:bodyPr/>
-          <a:lstStyle/>
-          <a:p>
-            <a:fld id="{F7021451-1387-4CA6-816F-3879F97B5CBC}" type="slidenum">
-              <a:rPr lang="en-US"/>
-              <a:t>2</a:t>
-            </a:fld>
-            <a:endParaRPr lang="en-US"/>
           </a:p>
         </p:txBody>
       </p:sp>
@@ -773,34 +667,7 @@
           <a:bodyPr/>
           <a:lstStyle/>
           <a:p>
-            <a:r>
-              <a:rPr lang="en-US" dirty="0"/>
-              <a:t/>
-            </a:r>
             <a:endParaRPr lang="en-US" dirty="0"/>
-          </a:p>
-        </p:txBody>
-      </p:sp>
-      <p:sp>
-        <p:nvSpPr>
-          <p:cNvPr id="4" name="Slide Number Placeholder 3"/>
-          <p:cNvSpPr>
-            <a:spLocks noGrp="1"/>
-          </p:cNvSpPr>
-          <p:nvPr>
-            <p:ph type="sldNum" sz="quarter" idx="10"/>
-          </p:nvPr>
-        </p:nvSpPr>
-        <p:spPr/>
-        <p:txBody>
-          <a:bodyPr/>
-          <a:lstStyle/>
-          <a:p>
-            <a:fld id="{F7021451-1387-4CA6-816F-3879F97B5CBC}" type="slidenum">
-              <a:rPr lang="en-US"/>
-              <a:t>3</a:t>
-            </a:fld>
-            <a:endParaRPr lang="en-US"/>
           </a:p>
         </p:txBody>
       </p:sp>
@@ -861,34 +728,7 @@
           <a:bodyPr/>
           <a:lstStyle/>
           <a:p>
-            <a:r>
-              <a:rPr lang="en-US" dirty="0"/>
-              <a:t/>
-            </a:r>
             <a:endParaRPr lang="en-US" dirty="0"/>
-          </a:p>
-        </p:txBody>
-      </p:sp>
-      <p:sp>
-        <p:nvSpPr>
-          <p:cNvPr id="4" name="Slide Number Placeholder 3"/>
-          <p:cNvSpPr>
-            <a:spLocks noGrp="1"/>
-          </p:cNvSpPr>
-          <p:nvPr>
-            <p:ph type="sldNum" sz="quarter" idx="10"/>
-          </p:nvPr>
-        </p:nvSpPr>
-        <p:spPr/>
-        <p:txBody>
-          <a:bodyPr/>
-          <a:lstStyle/>
-          <a:p>
-            <a:fld id="{F7021451-1387-4CA6-816F-3879F97B5CBC}" type="slidenum">
-              <a:rPr lang="en-US"/>
-              <a:t>4</a:t>
-            </a:fld>
-            <a:endParaRPr lang="en-US"/>
           </a:p>
         </p:txBody>
       </p:sp>
@@ -949,34 +789,7 @@
           <a:bodyPr/>
           <a:lstStyle/>
           <a:p>
-            <a:r>
-              <a:rPr lang="en-US" dirty="0"/>
-              <a:t/>
-            </a:r>
             <a:endParaRPr lang="en-US" dirty="0"/>
-          </a:p>
-        </p:txBody>
-      </p:sp>
-      <p:sp>
-        <p:nvSpPr>
-          <p:cNvPr id="4" name="Slide Number Placeholder 3"/>
-          <p:cNvSpPr>
-            <a:spLocks noGrp="1"/>
-          </p:cNvSpPr>
-          <p:nvPr>
-            <p:ph type="sldNum" sz="quarter" idx="10"/>
-          </p:nvPr>
-        </p:nvSpPr>
-        <p:spPr/>
-        <p:txBody>
-          <a:bodyPr/>
-          <a:lstStyle/>
-          <a:p>
-            <a:fld id="{F7021451-1387-4CA6-816F-3879F97B5CBC}" type="slidenum">
-              <a:rPr lang="en-US"/>
-              <a:t>5</a:t>
-            </a:fld>
-            <a:endParaRPr lang="en-US"/>
           </a:p>
         </p:txBody>
       </p:sp>
@@ -1037,34 +850,7 @@
           <a:bodyPr/>
           <a:lstStyle/>
           <a:p>
-            <a:r>
-              <a:rPr lang="en-US" dirty="0"/>
-              <a:t/>
-            </a:r>
             <a:endParaRPr lang="en-US" dirty="0"/>
-          </a:p>
-        </p:txBody>
-      </p:sp>
-      <p:sp>
-        <p:nvSpPr>
-          <p:cNvPr id="4" name="Slide Number Placeholder 3"/>
-          <p:cNvSpPr>
-            <a:spLocks noGrp="1"/>
-          </p:cNvSpPr>
-          <p:nvPr>
-            <p:ph type="sldNum" sz="quarter" idx="10"/>
-          </p:nvPr>
-        </p:nvSpPr>
-        <p:spPr/>
-        <p:txBody>
-          <a:bodyPr/>
-          <a:lstStyle/>
-          <a:p>
-            <a:fld id="{F7021451-1387-4CA6-816F-3879F97B5CBC}" type="slidenum">
-              <a:rPr lang="en-US"/>
-              <a:t>6</a:t>
-            </a:fld>
-            <a:endParaRPr lang="en-US"/>
           </a:p>
         </p:txBody>
       </p:sp>
@@ -1125,34 +911,7 @@
           <a:bodyPr/>
           <a:lstStyle/>
           <a:p>
-            <a:r>
-              <a:rPr lang="en-US" dirty="0"/>
-              <a:t/>
-            </a:r>
             <a:endParaRPr lang="en-US" dirty="0"/>
-          </a:p>
-        </p:txBody>
-      </p:sp>
-      <p:sp>
-        <p:nvSpPr>
-          <p:cNvPr id="4" name="Slide Number Placeholder 3"/>
-          <p:cNvSpPr>
-            <a:spLocks noGrp="1"/>
-          </p:cNvSpPr>
-          <p:nvPr>
-            <p:ph type="sldNum" sz="quarter" idx="10"/>
-          </p:nvPr>
-        </p:nvSpPr>
-        <p:spPr/>
-        <p:txBody>
-          <a:bodyPr/>
-          <a:lstStyle/>
-          <a:p>
-            <a:fld id="{F7021451-1387-4CA6-816F-3879F97B5CBC}" type="slidenum">
-              <a:rPr lang="en-US"/>
-              <a:t>7</a:t>
-            </a:fld>
-            <a:endParaRPr lang="en-US"/>
           </a:p>
         </p:txBody>
       </p:sp>
@@ -1213,34 +972,7 @@
           <a:bodyPr/>
           <a:lstStyle/>
           <a:p>
-            <a:r>
-              <a:rPr lang="en-US" dirty="0"/>
-              <a:t/>
-            </a:r>
             <a:endParaRPr lang="en-US" dirty="0"/>
-          </a:p>
-        </p:txBody>
-      </p:sp>
-      <p:sp>
-        <p:nvSpPr>
-          <p:cNvPr id="4" name="Slide Number Placeholder 3"/>
-          <p:cNvSpPr>
-            <a:spLocks noGrp="1"/>
-          </p:cNvSpPr>
-          <p:nvPr>
-            <p:ph type="sldNum" sz="quarter" idx="10"/>
-          </p:nvPr>
-        </p:nvSpPr>
-        <p:spPr/>
-        <p:txBody>
-          <a:bodyPr/>
-          <a:lstStyle/>
-          <a:p>
-            <a:fld id="{F7021451-1387-4CA6-816F-3879F97B5CBC}" type="slidenum">
-              <a:rPr lang="en-US"/>
-              <a:t>8</a:t>
-            </a:fld>
-            <a:endParaRPr lang="en-US"/>
           </a:p>
         </p:txBody>
       </p:sp>
@@ -1301,34 +1033,7 @@
           <a:bodyPr/>
           <a:lstStyle/>
           <a:p>
-            <a:r>
-              <a:rPr lang="en-US" dirty="0"/>
-              <a:t/>
-            </a:r>
             <a:endParaRPr lang="en-US" dirty="0"/>
-          </a:p>
-        </p:txBody>
-      </p:sp>
-      <p:sp>
-        <p:nvSpPr>
-          <p:cNvPr id="4" name="Slide Number Placeholder 3"/>
-          <p:cNvSpPr>
-            <a:spLocks noGrp="1"/>
-          </p:cNvSpPr>
-          <p:nvPr>
-            <p:ph type="sldNum" sz="quarter" idx="10"/>
-          </p:nvPr>
-        </p:nvSpPr>
-        <p:spPr/>
-        <p:txBody>
-          <a:bodyPr/>
-          <a:lstStyle/>
-          <a:p>
-            <a:fld id="{F7021451-1387-4CA6-816F-3879F97B5CBC}" type="slidenum">
-              <a:rPr lang="en-US"/>
-              <a:t>9</a:t>
-            </a:fld>
-            <a:endParaRPr lang="en-US"/>
           </a:p>
         </p:txBody>
       </p:sp>
@@ -1383,6 +1088,7 @@
         <a:solidFill>
           <a:srgbClr val="0A0F1A"/>
         </a:solidFill>
+        <a:effectLst/>
       </p:bgPr>
     </p:bg>
     <p:spTree>
@@ -1423,6 +1129,13 @@
             <a:prstDash val="solid"/>
           </a:ln>
         </p:spPr>
+        <p:txBody>
+          <a:bodyPr/>
+          <a:lstStyle/>
+          <a:p>
+            <a:endParaRPr lang="es-CO"/>
+          </a:p>
+        </p:txBody>
       </p:sp>
       <p:sp>
         <p:nvSpPr>
@@ -1446,6 +1159,13 @@
             <a:prstDash val="solid"/>
           </a:ln>
         </p:spPr>
+        <p:txBody>
+          <a:bodyPr/>
+          <a:lstStyle/>
+          <a:p>
+            <a:endParaRPr lang="es-CO"/>
+          </a:p>
+        </p:txBody>
       </p:sp>
       <p:sp>
         <p:nvSpPr>
@@ -1468,7 +1188,7 @@
           <a:bodyPr wrap="square" rtlCol="0" anchor="ctr"/>
           <a:lstStyle/>
           <a:p>
-            <a:pPr indent="0" marL="0">
+            <a:pPr marL="0" indent="0">
               <a:buNone/>
             </a:pPr>
             <a:r>
@@ -1507,7 +1227,7 @@
           <a:bodyPr wrap="square" rtlCol="0" anchor="ctr"/>
           <a:lstStyle/>
           <a:p>
-            <a:pPr algn="r" indent="0" marL="0">
+            <a:pPr marL="0" indent="0" algn="r">
               <a:buNone/>
             </a:pPr>
             <a:r>
@@ -1536,6 +1256,11 @@
 <file path=ppt/slideMasters/slideMaster1.xml><?xml version="1.0" encoding="utf-8"?>
 <p:sldMaster xmlns:a="http://schemas.openxmlformats.org/drawingml/2006/main" xmlns:r="http://schemas.openxmlformats.org/officeDocument/2006/relationships" xmlns:p="http://schemas.openxmlformats.org/presentationml/2006/main">
   <p:cSld>
+    <p:bg>
+      <p:bgRef idx="1001">
+        <a:schemeClr val="bg1"/>
+      </p:bgRef>
+    </p:bg>
     <p:spTree>
       <p:nvGrpSpPr>
         <p:cNvPr id="1" name=""/>
@@ -1819,6 +1544,7 @@
         <a:solidFill>
           <a:srgbClr val="0A0F1A"/>
         </a:solidFill>
+        <a:effectLst/>
       </p:bgPr>
     </p:bg>
     <p:spTree>
@@ -1861,71 +1587,11 @@
             <a:prstDash val="solid"/>
           </a:ln>
         </p:spPr>
-      </p:sp>
-      <p:sp>
-        <p:nvSpPr>
-          <p:cNvPr id="3" name="Shape 1"/>
-          <p:cNvSpPr/>
-          <p:nvPr/>
-        </p:nvSpPr>
-        <p:spPr>
-          <a:xfrm>
-            <a:off x="822960" y="868680"/>
-            <a:ext cx="1371600" cy="329184"/>
-          </a:xfrm>
-          <a:prstGeom prst="roundRect">
-            <a:avLst>
-              <a:gd name="adj" fmla="val 22222"/>
-            </a:avLst>
-          </a:prstGeom>
-          <a:solidFill>
-            <a:srgbClr val="F5A623">
-              <a:alpha val="16000"/>
-            </a:srgbClr>
-          </a:solidFill>
-          <a:ln w="12700">
-            <a:solidFill>
-              <a:srgbClr val="F5A623">
-                <a:alpha val="80000"/>
-              </a:srgbClr>
-            </a:solidFill>
-            <a:prstDash val="solid"/>
-          </a:ln>
-        </p:spPr>
-      </p:sp>
-      <p:sp>
-        <p:nvSpPr>
-          <p:cNvPr id="4" name="Text 2"/>
-          <p:cNvSpPr/>
-          <p:nvPr/>
-        </p:nvSpPr>
-        <p:spPr>
-          <a:xfrm>
-            <a:off x="822960" y="932688"/>
-            <a:ext cx="1371600" cy="164592"/>
-          </a:xfrm>
-          <a:prstGeom prst="rect">
-            <a:avLst/>
-          </a:prstGeom>
-          <a:noFill/>
-          <a:ln/>
-        </p:spPr>
-        <p:txBody>
-          <a:bodyPr wrap="square" lIns="0" tIns="0" rIns="0" bIns="0" rtlCol="0" anchor="ctr"/>
-          <a:lstStyle/>
-          <a:p>
-            <a:pPr algn="ctr" indent="0" marL="0">
-              <a:buNone/>
-            </a:pPr>
-            <a:r>
-              <a:rPr lang="en-US" sz="1100" b="1" dirty="0">
-                <a:solidFill>
-                  <a:srgbClr val="F5A623"/>
-                </a:solidFill>
-              </a:rPr>
-              <a:t>PRESENTACIÓN FINAL</a:t>
-            </a:r>
-            <a:endParaRPr lang="en-US" sz="1100" dirty="0"/>
+        <p:txBody>
+          <a:bodyPr/>
+          <a:lstStyle/>
+          <a:p>
+            <a:endParaRPr lang="es-CO"/>
           </a:p>
         </p:txBody>
       </p:sp>
@@ -1950,7 +1616,7 @@
           <a:bodyPr wrap="square" lIns="0" tIns="0" rIns="0" bIns="0" rtlCol="0" anchor="ctr"/>
           <a:lstStyle/>
           <a:p>
-            <a:pPr indent="0" marL="0">
+            <a:pPr marL="0" indent="0">
               <a:buNone/>
             </a:pPr>
             <a:r>
@@ -1989,7 +1655,7 @@
           <a:bodyPr wrap="square" lIns="0" tIns="0" rIns="0" bIns="0" rtlCol="0" anchor="ctr"/>
           <a:lstStyle/>
           <a:p>
-            <a:pPr indent="0" marL="0">
+            <a:pPr marL="0" indent="0">
               <a:buNone/>
             </a:pPr>
             <a:r>
@@ -2006,7 +1672,7 @@
             <a:endParaRPr lang="en-US" sz="2150" dirty="0"/>
           </a:p>
           <a:p>
-            <a:pPr indent="0" marL="0">
+            <a:pPr marL="0" indent="0">
               <a:buNone/>
             </a:pPr>
             <a:r>
@@ -2045,7 +1711,7 @@
           <a:bodyPr wrap="square" lIns="0" tIns="0" rIns="0" bIns="0" rtlCol="0" anchor="ctr"/>
           <a:lstStyle/>
           <a:p>
-            <a:pPr indent="0" marL="0">
+            <a:pPr marL="0" indent="0">
               <a:buNone/>
             </a:pPr>
             <a:r>
@@ -2089,13 +1755,20 @@
             <a:prstDash val="solid"/>
           </a:ln>
           <a:effectLst>
-            <a:outerShdw sx="100000" sy="100000" kx="0" ky="0" algn="bl" rotWithShape="0" blurRad="19050" dist="6350" dir="2700000">
+            <a:outerShdw blurRad="19050" dist="6350" dir="2700000" algn="bl" rotWithShape="0">
               <a:srgbClr val="000000">
                 <a:alpha val="14000"/>
               </a:srgbClr>
             </a:outerShdw>
           </a:effectLst>
         </p:spPr>
+        <p:txBody>
+          <a:bodyPr/>
+          <a:lstStyle/>
+          <a:p>
+            <a:endParaRPr lang="es-CO"/>
+          </a:p>
+        </p:txBody>
       </p:sp>
       <p:sp>
         <p:nvSpPr>
@@ -2118,7 +1791,7 @@
           <a:bodyPr wrap="square" lIns="0" tIns="0" rIns="0" bIns="0" rtlCol="0" anchor="ctr"/>
           <a:lstStyle/>
           <a:p>
-            <a:pPr indent="0" marL="0">
+            <a:pPr marL="0" indent="0">
               <a:buNone/>
             </a:pPr>
             <a:r>
@@ -2144,7 +1817,7 @@
         </p:nvSpPr>
         <p:spPr>
           <a:xfrm>
-            <a:off x="6400800" y="1554480"/>
+            <a:off x="6387084" y="1572768"/>
             <a:ext cx="2029968" cy="749808"/>
           </a:xfrm>
           <a:prstGeom prst="roundRect">
@@ -2162,6 +1835,13 @@
             <a:prstDash val="solid"/>
           </a:ln>
         </p:spPr>
+        <p:txBody>
+          <a:bodyPr/>
+          <a:lstStyle/>
+          <a:p>
+            <a:endParaRPr lang="es-CO"/>
+          </a:p>
+        </p:txBody>
       </p:sp>
       <p:sp>
         <p:nvSpPr>
@@ -2184,7 +1864,7 @@
           <a:bodyPr wrap="square" lIns="0" tIns="0" rIns="0" bIns="0" rtlCol="0" anchor="ctr"/>
           <a:lstStyle/>
           <a:p>
-            <a:pPr indent="0" marL="0">
+            <a:pPr marL="0" indent="0">
               <a:buNone/>
             </a:pPr>
             <a:r>
@@ -2193,10 +1873,8 @@
                   <a:srgbClr val="F5A623"/>
                 </a:solidFill>
                 <a:latin typeface="Aptos Display" pitchFamily="34" charset="0"/>
-                <a:ea typeface="Aptos Display" pitchFamily="34" charset="-122"/>
-                <a:cs typeface="Aptos Display" pitchFamily="34" charset="-120"/>
-              </a:rPr>
-              <a:t>5</a:t>
+              </a:rPr>
+              <a:t>6</a:t>
             </a:r>
             <a:endParaRPr lang="en-US" sz="2400" dirty="0"/>
           </a:p>
@@ -2223,7 +1901,7 @@
           <a:bodyPr wrap="square" lIns="0" tIns="0" rIns="0" bIns="0" rtlCol="0" anchor="ctr"/>
           <a:lstStyle/>
           <a:p>
-            <a:pPr indent="0" marL="0">
+            <a:pPr marL="0" indent="0">
               <a:buNone/>
             </a:pPr>
             <a:r>
@@ -2267,6 +1945,13 @@
             <a:prstDash val="solid"/>
           </a:ln>
         </p:spPr>
+        <p:txBody>
+          <a:bodyPr/>
+          <a:lstStyle/>
+          <a:p>
+            <a:endParaRPr lang="es-CO" dirty="0"/>
+          </a:p>
+        </p:txBody>
       </p:sp>
       <p:sp>
         <p:nvSpPr>
@@ -2289,7 +1974,7 @@
           <a:bodyPr wrap="square" lIns="0" tIns="0" rIns="0" bIns="0" rtlCol="0" anchor="ctr"/>
           <a:lstStyle/>
           <a:p>
-            <a:pPr indent="0" marL="0">
+            <a:pPr marL="0" indent="0">
               <a:buNone/>
             </a:pPr>
             <a:r>
@@ -2328,7 +2013,7 @@
           <a:bodyPr wrap="square" lIns="0" tIns="0" rIns="0" bIns="0" rtlCol="0" anchor="ctr"/>
           <a:lstStyle/>
           <a:p>
-            <a:pPr indent="0" marL="0">
+            <a:pPr marL="0" indent="0">
               <a:buNone/>
             </a:pPr>
             <a:r>
@@ -2372,6 +2057,13 @@
             <a:prstDash val="solid"/>
           </a:ln>
         </p:spPr>
+        <p:txBody>
+          <a:bodyPr/>
+          <a:lstStyle/>
+          <a:p>
+            <a:endParaRPr lang="es-CO"/>
+          </a:p>
+        </p:txBody>
       </p:sp>
       <p:sp>
         <p:nvSpPr>
@@ -2394,7 +2086,7 @@
           <a:bodyPr wrap="square" lIns="0" tIns="0" rIns="0" bIns="0" rtlCol="0" anchor="ctr"/>
           <a:lstStyle/>
           <a:p>
-            <a:pPr indent="0" marL="0">
+            <a:pPr marL="0" indent="0">
               <a:buNone/>
             </a:pPr>
             <a:r>
@@ -2433,7 +2125,7 @@
           <a:bodyPr wrap="square" lIns="0" tIns="0" rIns="0" bIns="0" rtlCol="0" anchor="ctr"/>
           <a:lstStyle/>
           <a:p>
-            <a:pPr indent="0" marL="0">
+            <a:pPr marL="0" indent="0">
               <a:buNone/>
             </a:pPr>
             <a:r>
@@ -2477,6 +2169,13 @@
             <a:prstDash val="solid"/>
           </a:ln>
         </p:spPr>
+        <p:txBody>
+          <a:bodyPr/>
+          <a:lstStyle/>
+          <a:p>
+            <a:endParaRPr lang="es-CO"/>
+          </a:p>
+        </p:txBody>
       </p:sp>
       <p:sp>
         <p:nvSpPr>
@@ -2499,7 +2198,7 @@
           <a:bodyPr wrap="square" lIns="0" tIns="0" rIns="0" bIns="0" rtlCol="0" anchor="ctr"/>
           <a:lstStyle/>
           <a:p>
-            <a:pPr indent="0" marL="0">
+            <a:pPr marL="0" indent="0">
               <a:buNone/>
             </a:pPr>
             <a:r>
@@ -2538,7 +2237,7 @@
           <a:bodyPr wrap="square" lIns="0" tIns="0" rIns="0" bIns="0" rtlCol="0" anchor="ctr"/>
           <a:lstStyle/>
           <a:p>
-            <a:pPr indent="0" marL="0">
+            <a:pPr marL="0" indent="0">
               <a:buNone/>
             </a:pPr>
             <a:r>
@@ -2582,6 +2281,13 @@
             <a:prstDash val="solid"/>
           </a:ln>
         </p:spPr>
+        <p:txBody>
+          <a:bodyPr/>
+          <a:lstStyle/>
+          <a:p>
+            <a:endParaRPr lang="es-CO"/>
+          </a:p>
+        </p:txBody>
       </p:sp>
       <p:sp>
         <p:nvSpPr>
@@ -2604,7 +2310,7 @@
           <a:bodyPr wrap="square" lIns="0" tIns="0" rIns="0" bIns="0" rtlCol="0" anchor="ctr"/>
           <a:lstStyle/>
           <a:p>
-            <a:pPr indent="0" marL="0">
+            <a:pPr marL="0" indent="0">
               <a:buNone/>
             </a:pPr>
             <a:r>
@@ -2640,7 +2346,7 @@
           <a:bodyPr wrap="square" lIns="0" tIns="0" rIns="0" bIns="0" rtlCol="0" anchor="ctr"/>
           <a:lstStyle/>
           <a:p>
-            <a:pPr indent="0" marL="0">
+            <a:pPr marL="0" indent="0">
               <a:buNone/>
             </a:pPr>
             <a:r>
@@ -2653,63 +2359,69 @@
                 <a:cs typeface="Aptos" pitchFamily="34" charset="-120"/>
               </a:rPr>
               <a:t>Deyton Riascos Ortiz — 2246208
-</a:t>
-            </a:r>
-            <a:pPr indent="0" marL="0">
-              <a:buNone/>
-            </a:pPr>
-            <a:r>
-              <a:rPr lang="en-US" sz="1500" dirty="0">
-                <a:solidFill>
-                  <a:srgbClr val="EAF0FF"/>
+Samuel Izquierdo Bonilla — 2246993
+Mauricio Taborda Gongora — 2246998</a:t>
+            </a:r>
+            <a:endParaRPr lang="en-US" sz="1500" dirty="0"/>
+          </a:p>
+        </p:txBody>
+      </p:sp>
+      <p:sp>
+        <p:nvSpPr>
+          <p:cNvPr id="25" name="Text 23"/>
+          <p:cNvSpPr/>
+          <p:nvPr/>
+        </p:nvSpPr>
+        <p:spPr>
+          <a:xfrm>
+            <a:off x="822960" y="4892040"/>
+            <a:ext cx="4389120" cy="640080"/>
+          </a:xfrm>
+          <a:prstGeom prst="rect">
+            <a:avLst/>
+          </a:prstGeom>
+          <a:noFill/>
+          <a:ln/>
+        </p:spPr>
+        <p:txBody>
+          <a:bodyPr wrap="square" lIns="0" tIns="0" rIns="0" bIns="0" rtlCol="0" anchor="ctr"/>
+          <a:lstStyle/>
+          <a:p>
+            <a:pPr marL="0" indent="0">
+              <a:buNone/>
+            </a:pPr>
+            <a:r>
+              <a:rPr lang="en-US" sz="1350" dirty="0">
+                <a:solidFill>
+                  <a:srgbClr val="D8E2F0"/>
                 </a:solidFill>
                 <a:latin typeface="Aptos" pitchFamily="34" charset="0"/>
                 <a:ea typeface="Aptos" pitchFamily="34" charset="-122"/>
                 <a:cs typeface="Aptos" pitchFamily="34" charset="-120"/>
               </a:rPr>
-              <a:t>Samuel Izquierdo Bonilla — 2246993
-</a:t>
-            </a:r>
-            <a:pPr indent="0" marL="0">
-              <a:buNone/>
-            </a:pPr>
-            <a:r>
-              <a:rPr lang="en-US" sz="1500" dirty="0">
-                <a:solidFill>
-                  <a:srgbClr val="EAF0FF"/>
+              <a:t>Universidad Autónoma de Occidente</a:t>
+            </a:r>
+            <a:endParaRPr lang="en-US" sz="1350" dirty="0"/>
+          </a:p>
+          <a:p>
+            <a:pPr marL="0" indent="0">
+              <a:buNone/>
+            </a:pPr>
+            <a:r>
+              <a:rPr lang="en-US" sz="1350" dirty="0">
+                <a:solidFill>
+                  <a:srgbClr val="D8E2F0"/>
                 </a:solidFill>
                 <a:latin typeface="Aptos" pitchFamily="34" charset="0"/>
                 <a:ea typeface="Aptos" pitchFamily="34" charset="-122"/>
                 <a:cs typeface="Aptos" pitchFamily="34" charset="-120"/>
               </a:rPr>
-              <a:t>Mauricio Taborda Gongora — 2246998</a:t>
-            </a:r>
-            <a:endParaRPr lang="en-US" sz="1500" dirty="0"/>
-          </a:p>
-        </p:txBody>
-      </p:sp>
-      <p:sp>
-        <p:nvSpPr>
-          <p:cNvPr id="25" name="Text 23"/>
-          <p:cNvSpPr/>
-          <p:nvPr/>
-        </p:nvSpPr>
-        <p:spPr>
-          <a:xfrm>
-            <a:off x="822960" y="4892040"/>
-            <a:ext cx="4389120" cy="640080"/>
-          </a:xfrm>
-          <a:prstGeom prst="rect">
-            <a:avLst/>
-          </a:prstGeom>
-          <a:noFill/>
-          <a:ln/>
-        </p:spPr>
-        <p:txBody>
-          <a:bodyPr wrap="square" lIns="0" tIns="0" rIns="0" bIns="0" rtlCol="0" anchor="ctr"/>
-          <a:lstStyle/>
-          <a:p>
-            <a:pPr indent="0" marL="0">
+              <a:t>Ingeniería de Datos e Inteligencia Artificial</a:t>
+            </a:r>
+            <a:endParaRPr lang="en-US" sz="1350" dirty="0"/>
+          </a:p>
+          <a:p>
+            <a:pPr marL="0" indent="0">
               <a:buNone/>
             </a:pPr>
             <a:r>
@@ -2721,40 +2433,6 @@
                 <a:ea typeface="Aptos" pitchFamily="34" charset="-122"/>
                 <a:cs typeface="Aptos" pitchFamily="34" charset="-120"/>
               </a:rPr>
-              <a:t>Universidad Autónoma de Occidente</a:t>
-            </a:r>
-            <a:endParaRPr lang="en-US" sz="1350" dirty="0"/>
-          </a:p>
-          <a:p>
-            <a:pPr indent="0" marL="0">
-              <a:buNone/>
-            </a:pPr>
-            <a:r>
-              <a:rPr lang="en-US" sz="1350" dirty="0">
-                <a:solidFill>
-                  <a:srgbClr val="D8E2F0"/>
-                </a:solidFill>
-                <a:latin typeface="Aptos" pitchFamily="34" charset="0"/>
-                <a:ea typeface="Aptos" pitchFamily="34" charset="-122"/>
-                <a:cs typeface="Aptos" pitchFamily="34" charset="-120"/>
-              </a:rPr>
-              <a:t>Ingeniería de Datos e Inteligencia Artificial</a:t>
-            </a:r>
-            <a:endParaRPr lang="en-US" sz="1350" dirty="0"/>
-          </a:p>
-          <a:p>
-            <a:pPr indent="0" marL="0">
-              <a:buNone/>
-            </a:pPr>
-            <a:r>
-              <a:rPr lang="en-US" sz="1350" dirty="0">
-                <a:solidFill>
-                  <a:srgbClr val="D8E2F0"/>
-                </a:solidFill>
-                <a:latin typeface="Aptos" pitchFamily="34" charset="0"/>
-                <a:ea typeface="Aptos" pitchFamily="34" charset="-122"/>
-                <a:cs typeface="Aptos" pitchFamily="34" charset="-120"/>
-              </a:rPr>
               <a:t>Redes e Infraestructuras · 11 de marzo de 2026</a:t>
             </a:r>
             <a:endParaRPr lang="en-US" sz="1350" dirty="0"/>
@@ -2782,7 +2460,7 @@
           <a:bodyPr wrap="square" rtlCol="0" anchor="ctr"/>
           <a:lstStyle/>
           <a:p>
-            <a:pPr algn="r" indent="0" marL="0">
+            <a:pPr marL="0" indent="0" algn="r">
               <a:buNone/>
             </a:pPr>
             <a:r>
@@ -2851,6 +2529,13 @@
             <a:prstDash val="solid"/>
           </a:ln>
         </p:spPr>
+        <p:txBody>
+          <a:bodyPr/>
+          <a:lstStyle/>
+          <a:p>
+            <a:endParaRPr lang="es-CO"/>
+          </a:p>
+        </p:txBody>
       </p:sp>
       <p:sp>
         <p:nvSpPr>
@@ -2873,7 +2558,7 @@
           <a:bodyPr wrap="square" lIns="0" tIns="0" rIns="0" bIns="0" rtlCol="0" anchor="ctr"/>
           <a:lstStyle/>
           <a:p>
-            <a:pPr indent="0" marL="0">
+            <a:pPr marL="0" indent="0">
               <a:buNone/>
             </a:pPr>
             <a:r>
@@ -2912,7 +2597,7 @@
           <a:bodyPr wrap="square" lIns="0" tIns="0" rIns="0" bIns="0" rtlCol="0" anchor="ctr"/>
           <a:lstStyle/>
           <a:p>
-            <a:pPr indent="0" marL="0">
+            <a:pPr marL="0" indent="0">
               <a:buNone/>
             </a:pPr>
             <a:r>
@@ -2951,7 +2636,7 @@
           <a:bodyPr wrap="square" lIns="0" tIns="0" rIns="0" bIns="0" rtlCol="0" anchor="ctr"/>
           <a:lstStyle/>
           <a:p>
-            <a:pPr indent="0" marL="0">
+            <a:pPr marL="0" indent="0">
               <a:buNone/>
             </a:pPr>
             <a:r>
@@ -2995,6 +2680,13 @@
             <a:prstDash val="solid"/>
           </a:ln>
         </p:spPr>
+        <p:txBody>
+          <a:bodyPr/>
+          <a:lstStyle/>
+          <a:p>
+            <a:endParaRPr lang="es-CO" dirty="0"/>
+          </a:p>
+        </p:txBody>
       </p:sp>
       <p:sp>
         <p:nvSpPr>
@@ -3017,7 +2709,7 @@
           <a:bodyPr wrap="square" lIns="0" tIns="0" rIns="0" bIns="0" rtlCol="0" anchor="ctr"/>
           <a:lstStyle/>
           <a:p>
-            <a:pPr algn="ctr" indent="0" marL="0">
+            <a:pPr marL="0" indent="0" algn="ctr">
               <a:buNone/>
             </a:pPr>
             <a:r>
@@ -3026,7 +2718,7 @@
                   <a:srgbClr val="F5A623"/>
                 </a:solidFill>
               </a:rPr>
-              <a:t>5 microservicios backend reales</a:t>
+              <a:t>6 microservicios backend reales</a:t>
             </a:r>
             <a:endParaRPr lang="en-US" sz="1500" dirty="0"/>
           </a:p>
@@ -3058,6 +2750,13 @@
             <a:prstDash val="solid"/>
           </a:ln>
         </p:spPr>
+        <p:txBody>
+          <a:bodyPr/>
+          <a:lstStyle/>
+          <a:p>
+            <a:endParaRPr lang="es-CO"/>
+          </a:p>
+        </p:txBody>
       </p:sp>
       <p:sp>
         <p:nvSpPr>
@@ -3080,7 +2779,7 @@
           <a:bodyPr wrap="square" lIns="0" tIns="0" rIns="0" bIns="0" rtlCol="0" anchor="ctr"/>
           <a:lstStyle/>
           <a:p>
-            <a:pPr algn="ctr" indent="0" marL="0">
+            <a:pPr marL="0" indent="0" algn="ctr">
               <a:buNone/>
             </a:pPr>
             <a:r>
@@ -3089,7 +2788,7 @@
                   <a:srgbClr val="4A9EFF"/>
                 </a:solidFill>
               </a:rPr>
-              <a:t>Puertos correctos: 8001–8005</a:t>
+              <a:t>Puertos correctos: 8001–8006</a:t>
             </a:r>
             <a:endParaRPr lang="en-US" sz="1500" dirty="0"/>
           </a:p>
@@ -3121,6 +2820,13 @@
             <a:prstDash val="solid"/>
           </a:ln>
         </p:spPr>
+        <p:txBody>
+          <a:bodyPr/>
+          <a:lstStyle/>
+          <a:p>
+            <a:endParaRPr lang="es-CO"/>
+          </a:p>
+        </p:txBody>
       </p:sp>
       <p:sp>
         <p:nvSpPr>
@@ -3143,7 +2849,7 @@
           <a:bodyPr wrap="square" lIns="0" tIns="0" rIns="0" bIns="0" rtlCol="0" anchor="ctr"/>
           <a:lstStyle/>
           <a:p>
-            <a:pPr algn="ctr" indent="0" marL="0">
+            <a:pPr marL="0" indent="0" algn="ctr">
               <a:buNone/>
             </a:pPr>
             <a:r>
@@ -3184,6 +2890,13 @@
             <a:prstDash val="solid"/>
           </a:ln>
         </p:spPr>
+        <p:txBody>
+          <a:bodyPr/>
+          <a:lstStyle/>
+          <a:p>
+            <a:endParaRPr lang="es-CO"/>
+          </a:p>
+        </p:txBody>
       </p:sp>
       <p:sp>
         <p:nvSpPr>
@@ -3206,7 +2919,7 @@
           <a:bodyPr wrap="square" lIns="0" tIns="0" rIns="0" bIns="0" rtlCol="0" anchor="ctr"/>
           <a:lstStyle/>
           <a:p>
-            <a:pPr algn="ctr" indent="0" marL="0">
+            <a:pPr marL="0" indent="0" algn="ctr">
               <a:buNone/>
             </a:pPr>
             <a:r>
@@ -3247,13 +2960,20 @@
             <a:prstDash val="solid"/>
           </a:ln>
           <a:effectLst>
-            <a:outerShdw sx="100000" sy="100000" kx="0" ky="0" algn="bl" rotWithShape="0" blurRad="19050" dist="6350" dir="2700000">
+            <a:outerShdw blurRad="19050" dist="6350" dir="2700000" algn="bl" rotWithShape="0">
               <a:srgbClr val="000000">
                 <a:alpha val="14000"/>
               </a:srgbClr>
             </a:outerShdw>
           </a:effectLst>
         </p:spPr>
+        <p:txBody>
+          <a:bodyPr/>
+          <a:lstStyle/>
+          <a:p>
+            <a:endParaRPr lang="es-CO"/>
+          </a:p>
+        </p:txBody>
       </p:sp>
       <p:sp>
         <p:nvSpPr>
@@ -3276,7 +2996,7 @@
           <a:bodyPr wrap="square" lIns="0" tIns="0" rIns="0" bIns="0" rtlCol="0" anchor="ctr"/>
           <a:lstStyle/>
           <a:p>
-            <a:pPr algn="ctr" indent="0" marL="0">
+            <a:pPr marL="0" indent="0" algn="ctr">
               <a:buNone/>
             </a:pPr>
             <a:r>
@@ -3315,7 +3035,7 @@
           <a:bodyPr wrap="square" lIns="0" tIns="0" rIns="0" bIns="0" rtlCol="0" anchor="ctr"/>
           <a:lstStyle/>
           <a:p>
-            <a:pPr algn="ctr" indent="0" marL="0">
+            <a:pPr marL="0" indent="0" algn="ctr">
               <a:buNone/>
             </a:pPr>
             <a:r>
@@ -3354,7 +3074,7 @@
           <a:bodyPr wrap="square" lIns="0" tIns="0" rIns="0" bIns="0" rtlCol="0" anchor="ctr"/>
           <a:lstStyle/>
           <a:p>
-            <a:pPr algn="ctr" indent="0" marL="0">
+            <a:pPr marL="0" indent="0" algn="ctr">
               <a:buNone/>
             </a:pPr>
             <a:r>
@@ -3390,7 +3110,7 @@
           <a:bodyPr wrap="square" rtlCol="0" anchor="ctr"/>
           <a:lstStyle/>
           <a:p>
-            <a:pPr algn="r" indent="0" marL="0">
+            <a:pPr marL="0" indent="0" algn="r">
               <a:buNone/>
             </a:pPr>
             <a:r>
@@ -3454,7 +3174,7 @@
           <a:bodyPr wrap="square" rtlCol="0" anchor="ctr"/>
           <a:lstStyle/>
           <a:p>
-            <a:pPr indent="0" marL="0">
+            <a:pPr marL="0" indent="0">
               <a:buNone/>
             </a:pPr>
             <a:r>
@@ -3466,7 +3186,7 @@
                 <a:ea typeface="Aptos" pitchFamily="34" charset="-122"/>
                 <a:cs typeface="Aptos" pitchFamily="34" charset="-120"/>
               </a:rPr>
-              <a:t>01 · CONTEXTO</a:t>
+              <a:t>CONTEXTO</a:t>
             </a:r>
             <a:endParaRPr lang="en-US" sz="1100" dirty="0"/>
           </a:p>
@@ -3493,7 +3213,7 @@
           <a:bodyPr wrap="square" lIns="0" tIns="0" rIns="0" bIns="0" rtlCol="0" anchor="ctr"/>
           <a:lstStyle/>
           <a:p>
-            <a:pPr indent="0" marL="0">
+            <a:pPr marL="0" indent="0">
               <a:buNone/>
             </a:pPr>
             <a:r>
@@ -3532,7 +3252,7 @@
           <a:bodyPr wrap="square" lIns="0" tIns="0" rIns="0" bIns="0" rtlCol="0" anchor="ctr"/>
           <a:lstStyle/>
           <a:p>
-            <a:pPr indent="0" marL="0">
+            <a:pPr marL="0" indent="0">
               <a:buNone/>
             </a:pPr>
             <a:r>
@@ -3576,13 +3296,20 @@
             <a:prstDash val="solid"/>
           </a:ln>
           <a:effectLst>
-            <a:outerShdw sx="100000" sy="100000" kx="0" ky="0" algn="bl" rotWithShape="0" blurRad="19050" dist="6350" dir="2700000">
+            <a:outerShdw blurRad="19050" dist="6350" dir="2700000" algn="bl" rotWithShape="0">
               <a:srgbClr val="000000">
                 <a:alpha val="14000"/>
               </a:srgbClr>
             </a:outerShdw>
           </a:effectLst>
         </p:spPr>
+        <p:txBody>
+          <a:bodyPr/>
+          <a:lstStyle/>
+          <a:p>
+            <a:endParaRPr lang="es-CO"/>
+          </a:p>
+        </p:txBody>
       </p:sp>
       <p:sp>
         <p:nvSpPr>
@@ -3608,6 +3335,13 @@
             <a:prstDash val="solid"/>
           </a:ln>
         </p:spPr>
+        <p:txBody>
+          <a:bodyPr/>
+          <a:lstStyle/>
+          <a:p>
+            <a:endParaRPr lang="es-CO"/>
+          </a:p>
+        </p:txBody>
       </p:sp>
       <p:sp>
         <p:nvSpPr>
@@ -3630,7 +3364,7 @@
           <a:bodyPr wrap="square" lIns="0" tIns="0" rIns="0" bIns="0" rtlCol="0" anchor="ctr"/>
           <a:lstStyle/>
           <a:p>
-            <a:pPr indent="0" marL="0">
+            <a:pPr marL="0" indent="0">
               <a:buNone/>
             </a:pPr>
             <a:r>
@@ -3669,7 +3403,7 @@
           <a:bodyPr wrap="square" lIns="0" tIns="0" rIns="0" bIns="0" rtlCol="0" anchor="ctr"/>
           <a:lstStyle/>
           <a:p>
-            <a:pPr indent="0" marL="0">
+            <a:pPr marL="0" indent="0">
               <a:buNone/>
             </a:pPr>
             <a:r>
@@ -3708,7 +3442,7 @@
           <a:bodyPr wrap="square" lIns="0" tIns="0" rIns="0" bIns="0" rtlCol="0" anchor="t"/>
           <a:lstStyle/>
           <a:p>
-            <a:pPr indent="0" marL="0">
+            <a:pPr marL="0" indent="0">
               <a:buNone/>
             </a:pPr>
             <a:r>
@@ -3752,13 +3486,20 @@
             <a:prstDash val="solid"/>
           </a:ln>
           <a:effectLst>
-            <a:outerShdw sx="100000" sy="100000" kx="0" ky="0" algn="bl" rotWithShape="0" blurRad="19050" dist="6350" dir="2700000">
+            <a:outerShdw blurRad="19050" dist="6350" dir="2700000" algn="bl" rotWithShape="0">
               <a:srgbClr val="000000">
                 <a:alpha val="14000"/>
               </a:srgbClr>
             </a:outerShdw>
           </a:effectLst>
         </p:spPr>
+        <p:txBody>
+          <a:bodyPr/>
+          <a:lstStyle/>
+          <a:p>
+            <a:endParaRPr lang="es-CO"/>
+          </a:p>
+        </p:txBody>
       </p:sp>
       <p:sp>
         <p:nvSpPr>
@@ -3784,6 +3525,13 @@
             <a:prstDash val="solid"/>
           </a:ln>
         </p:spPr>
+        <p:txBody>
+          <a:bodyPr/>
+          <a:lstStyle/>
+          <a:p>
+            <a:endParaRPr lang="es-CO"/>
+          </a:p>
+        </p:txBody>
       </p:sp>
       <p:sp>
         <p:nvSpPr>
@@ -3806,7 +3554,7 @@
           <a:bodyPr wrap="square" lIns="0" tIns="0" rIns="0" bIns="0" rtlCol="0" anchor="ctr"/>
           <a:lstStyle/>
           <a:p>
-            <a:pPr indent="0" marL="0">
+            <a:pPr marL="0" indent="0">
               <a:buNone/>
             </a:pPr>
             <a:r>
@@ -3845,7 +3593,7 @@
           <a:bodyPr wrap="square" lIns="0" tIns="0" rIns="0" bIns="0" rtlCol="0" anchor="ctr"/>
           <a:lstStyle/>
           <a:p>
-            <a:pPr indent="0" marL="0">
+            <a:pPr marL="0" indent="0">
               <a:buNone/>
             </a:pPr>
             <a:r>
@@ -3884,7 +3632,7 @@
           <a:bodyPr wrap="square" lIns="0" tIns="0" rIns="0" bIns="0" rtlCol="0" anchor="t"/>
           <a:lstStyle/>
           <a:p>
-            <a:pPr indent="0" marL="0">
+            <a:pPr marL="0" indent="0">
               <a:buNone/>
             </a:pPr>
             <a:r>
@@ -3928,13 +3676,20 @@
             <a:prstDash val="solid"/>
           </a:ln>
           <a:effectLst>
-            <a:outerShdw sx="100000" sy="100000" kx="0" ky="0" algn="bl" rotWithShape="0" blurRad="19050" dist="6350" dir="2700000">
+            <a:outerShdw blurRad="19050" dist="6350" dir="2700000" algn="bl" rotWithShape="0">
               <a:srgbClr val="000000">
                 <a:alpha val="14000"/>
               </a:srgbClr>
             </a:outerShdw>
           </a:effectLst>
         </p:spPr>
+        <p:txBody>
+          <a:bodyPr/>
+          <a:lstStyle/>
+          <a:p>
+            <a:endParaRPr lang="es-CO"/>
+          </a:p>
+        </p:txBody>
       </p:sp>
       <p:sp>
         <p:nvSpPr>
@@ -3960,6 +3715,13 @@
             <a:prstDash val="solid"/>
           </a:ln>
         </p:spPr>
+        <p:txBody>
+          <a:bodyPr/>
+          <a:lstStyle/>
+          <a:p>
+            <a:endParaRPr lang="es-CO"/>
+          </a:p>
+        </p:txBody>
       </p:sp>
       <p:sp>
         <p:nvSpPr>
@@ -3982,7 +3744,7 @@
           <a:bodyPr wrap="square" lIns="0" tIns="0" rIns="0" bIns="0" rtlCol="0" anchor="ctr"/>
           <a:lstStyle/>
           <a:p>
-            <a:pPr indent="0" marL="0">
+            <a:pPr marL="0" indent="0">
               <a:buNone/>
             </a:pPr>
             <a:r>
@@ -4021,7 +3783,7 @@
           <a:bodyPr wrap="square" lIns="0" tIns="0" rIns="0" bIns="0" rtlCol="0" anchor="ctr"/>
           <a:lstStyle/>
           <a:p>
-            <a:pPr indent="0" marL="0">
+            <a:pPr marL="0" indent="0">
               <a:buNone/>
             </a:pPr>
             <a:r>
@@ -4060,7 +3822,7 @@
           <a:bodyPr wrap="square" lIns="0" tIns="0" rIns="0" bIns="0" rtlCol="0" anchor="t"/>
           <a:lstStyle/>
           <a:p>
-            <a:pPr indent="0" marL="0">
+            <a:pPr marL="0" indent="0">
               <a:buNone/>
             </a:pPr>
             <a:r>
@@ -4104,6 +3866,13 @@
             <a:prstDash val="solid"/>
           </a:ln>
         </p:spPr>
+        <p:txBody>
+          <a:bodyPr/>
+          <a:lstStyle/>
+          <a:p>
+            <a:endParaRPr lang="es-CO"/>
+          </a:p>
+        </p:txBody>
       </p:sp>
       <p:sp>
         <p:nvSpPr>
@@ -4129,6 +3898,13 @@
             <a:prstDash val="solid"/>
           </a:ln>
         </p:spPr>
+        <p:txBody>
+          <a:bodyPr/>
+          <a:lstStyle/>
+          <a:p>
+            <a:endParaRPr lang="es-CO"/>
+          </a:p>
+        </p:txBody>
       </p:sp>
       <p:sp>
         <p:nvSpPr>
@@ -4151,7 +3927,7 @@
           <a:bodyPr wrap="square" lIns="0" tIns="0" rIns="0" bIns="0" rtlCol="0" anchor="ctr"/>
           <a:lstStyle/>
           <a:p>
-            <a:pPr indent="0" marL="0">
+            <a:pPr marL="0" indent="0">
               <a:buNone/>
             </a:pPr>
             <a:r>
@@ -4193,6 +3969,13 @@
             <a:prstDash val="solid"/>
           </a:ln>
         </p:spPr>
+        <p:txBody>
+          <a:bodyPr/>
+          <a:lstStyle/>
+          <a:p>
+            <a:endParaRPr lang="es-CO"/>
+          </a:p>
+        </p:txBody>
       </p:sp>
       <p:sp>
         <p:nvSpPr>
@@ -4215,7 +3998,7 @@
           <a:bodyPr wrap="square" lIns="0" tIns="0" rIns="0" bIns="0" rtlCol="0" anchor="ctr"/>
           <a:lstStyle/>
           <a:p>
-            <a:pPr indent="0" marL="0">
+            <a:pPr marL="0" indent="0">
               <a:buNone/>
             </a:pPr>
             <a:r>
@@ -4257,6 +4040,13 @@
             <a:prstDash val="solid"/>
           </a:ln>
         </p:spPr>
+        <p:txBody>
+          <a:bodyPr/>
+          <a:lstStyle/>
+          <a:p>
+            <a:endParaRPr lang="es-CO"/>
+          </a:p>
+        </p:txBody>
       </p:sp>
       <p:sp>
         <p:nvSpPr>
@@ -4279,7 +4069,7 @@
           <a:bodyPr wrap="square" lIns="0" tIns="0" rIns="0" bIns="0" rtlCol="0" anchor="ctr"/>
           <a:lstStyle/>
           <a:p>
-            <a:pPr indent="0" marL="0">
+            <a:pPr marL="0" indent="0">
               <a:buNone/>
             </a:pPr>
             <a:r>
@@ -4321,6 +4111,13 @@
             <a:prstDash val="solid"/>
           </a:ln>
         </p:spPr>
+        <p:txBody>
+          <a:bodyPr/>
+          <a:lstStyle/>
+          <a:p>
+            <a:endParaRPr lang="es-CO"/>
+          </a:p>
+        </p:txBody>
       </p:sp>
       <p:sp>
         <p:nvSpPr>
@@ -4343,7 +4140,7 @@
           <a:bodyPr wrap="square" lIns="0" tIns="0" rIns="0" bIns="0" rtlCol="0" anchor="ctr"/>
           <a:lstStyle/>
           <a:p>
-            <a:pPr indent="0" marL="0">
+            <a:pPr marL="0" indent="0">
               <a:buNone/>
             </a:pPr>
             <a:r>
@@ -4382,7 +4179,7 @@
           <a:bodyPr wrap="square" rtlCol="0" anchor="ctr"/>
           <a:lstStyle/>
           <a:p>
-            <a:pPr algn="r" indent="0" marL="0">
+            <a:pPr marL="0" indent="0" algn="r">
               <a:buNone/>
             </a:pPr>
             <a:r>
@@ -4446,7 +4243,7 @@
           <a:bodyPr wrap="square" rtlCol="0" anchor="ctr"/>
           <a:lstStyle/>
           <a:p>
-            <a:pPr indent="0" marL="0">
+            <a:pPr marL="0" indent="0">
               <a:buNone/>
             </a:pPr>
             <a:r>
@@ -4458,7 +4255,7 @@
                 <a:ea typeface="Aptos" pitchFamily="34" charset="-122"/>
                 <a:cs typeface="Aptos" pitchFamily="34" charset="-120"/>
               </a:rPr>
-              <a:t>02 · ARQUITECTURA</a:t>
+              <a:t>ARQUITECTURA</a:t>
             </a:r>
             <a:endParaRPr lang="en-US" sz="1100" dirty="0"/>
           </a:p>
@@ -4485,7 +4282,7 @@
           <a:bodyPr wrap="square" lIns="0" tIns="0" rIns="0" bIns="0" rtlCol="0" anchor="ctr"/>
           <a:lstStyle/>
           <a:p>
-            <a:pPr indent="0" marL="0">
+            <a:pPr marL="0" indent="0">
               <a:buNone/>
             </a:pPr>
             <a:r>
@@ -4524,7 +4321,7 @@
           <a:bodyPr wrap="square" lIns="0" tIns="0" rIns="0" bIns="0" rtlCol="0" anchor="ctr"/>
           <a:lstStyle/>
           <a:p>
-            <a:pPr indent="0" marL="0">
+            <a:pPr marL="0" indent="0">
               <a:buNone/>
             </a:pPr>
             <a:r>
@@ -4568,13 +4365,20 @@
             <a:prstDash val="solid"/>
           </a:ln>
           <a:effectLst>
-            <a:outerShdw sx="100000" sy="100000" kx="0" ky="0" algn="bl" rotWithShape="0" blurRad="19050" dist="6350" dir="2700000">
+            <a:outerShdw blurRad="19050" dist="6350" dir="2700000" algn="bl" rotWithShape="0">
               <a:srgbClr val="000000">
                 <a:alpha val="14000"/>
               </a:srgbClr>
             </a:outerShdw>
           </a:effectLst>
         </p:spPr>
+        <p:txBody>
+          <a:bodyPr/>
+          <a:lstStyle/>
+          <a:p>
+            <a:endParaRPr lang="es-CO"/>
+          </a:p>
+        </p:txBody>
       </p:sp>
       <p:sp>
         <p:nvSpPr>
@@ -4597,7 +4401,7 @@
           <a:bodyPr wrap="square" lIns="0" tIns="0" rIns="0" bIns="0" rtlCol="0" anchor="ctr"/>
           <a:lstStyle/>
           <a:p>
-            <a:pPr algn="ctr" indent="0" marL="0">
+            <a:pPr marL="0" indent="0" algn="ctr">
               <a:buNone/>
             </a:pPr>
             <a:r>
@@ -4614,7 +4418,7 @@
             <a:endParaRPr lang="en-US" sz="2000" dirty="0"/>
           </a:p>
           <a:p>
-            <a:pPr algn="ctr" indent="0" marL="0">
+            <a:pPr marL="0" indent="0" algn="ctr">
               <a:buNone/>
             </a:pPr>
             <a:r>
@@ -4662,6 +4466,13 @@
             <a:prstDash val="solid"/>
           </a:ln>
         </p:spPr>
+        <p:txBody>
+          <a:bodyPr/>
+          <a:lstStyle/>
+          <a:p>
+            <a:endParaRPr lang="es-CO"/>
+          </a:p>
+        </p:txBody>
       </p:sp>
       <p:sp>
         <p:nvSpPr>
@@ -4684,7 +4495,7 @@
           <a:bodyPr wrap="square" lIns="0" tIns="0" rIns="0" bIns="0" rtlCol="0" anchor="ctr"/>
           <a:lstStyle/>
           <a:p>
-            <a:pPr algn="ctr" indent="0" marL="0">
+            <a:pPr marL="0" indent="0" algn="ctr">
               <a:buNone/>
             </a:pPr>
             <a:r>
@@ -4726,6 +4537,13 @@
             <a:tailEnd type="triangle"/>
           </a:ln>
         </p:spPr>
+        <p:txBody>
+          <a:bodyPr/>
+          <a:lstStyle/>
+          <a:p>
+            <a:endParaRPr lang="es-CO"/>
+          </a:p>
+        </p:txBody>
       </p:sp>
       <p:sp>
         <p:nvSpPr>
@@ -4751,6 +4569,13 @@
             <a:tailEnd type="triangle"/>
           </a:ln>
         </p:spPr>
+        <p:txBody>
+          <a:bodyPr/>
+          <a:lstStyle/>
+          <a:p>
+            <a:endParaRPr lang="es-CO"/>
+          </a:p>
+        </p:txBody>
       </p:sp>
       <p:sp>
         <p:nvSpPr>
@@ -4776,6 +4601,13 @@
             <a:tailEnd type="triangle"/>
           </a:ln>
         </p:spPr>
+        <p:txBody>
+          <a:bodyPr/>
+          <a:lstStyle/>
+          <a:p>
+            <a:endParaRPr lang="es-CO"/>
+          </a:p>
+        </p:txBody>
       </p:sp>
       <p:sp>
         <p:nvSpPr>
@@ -4803,13 +4635,20 @@
             <a:prstDash val="solid"/>
           </a:ln>
           <a:effectLst>
-            <a:outerShdw sx="100000" sy="100000" kx="0" ky="0" algn="bl" rotWithShape="0" blurRad="19050" dist="6350" dir="2700000">
+            <a:outerShdw blurRad="19050" dist="6350" dir="2700000" algn="bl" rotWithShape="0">
               <a:srgbClr val="000000">
                 <a:alpha val="14000"/>
               </a:srgbClr>
             </a:outerShdw>
           </a:effectLst>
         </p:spPr>
+        <p:txBody>
+          <a:bodyPr/>
+          <a:lstStyle/>
+          <a:p>
+            <a:endParaRPr lang="es-CO"/>
+          </a:p>
+        </p:txBody>
       </p:sp>
       <p:sp>
         <p:nvSpPr>
@@ -4835,6 +4674,13 @@
             <a:prstDash val="solid"/>
           </a:ln>
         </p:spPr>
+        <p:txBody>
+          <a:bodyPr/>
+          <a:lstStyle/>
+          <a:p>
+            <a:endParaRPr lang="es-CO"/>
+          </a:p>
+        </p:txBody>
       </p:sp>
       <p:sp>
         <p:nvSpPr>
@@ -4857,7 +4703,7 @@
           <a:bodyPr wrap="square" lIns="0" tIns="0" rIns="0" bIns="0" rtlCol="0" anchor="ctr"/>
           <a:lstStyle/>
           <a:p>
-            <a:pPr indent="0" marL="0">
+            <a:pPr marL="0" indent="0">
               <a:buNone/>
             </a:pPr>
             <a:r>
@@ -4896,7 +4742,7 @@
           <a:bodyPr wrap="square" lIns="0" tIns="0" rIns="0" bIns="0" rtlCol="0" anchor="ctr"/>
           <a:lstStyle/>
           <a:p>
-            <a:pPr indent="0" marL="0">
+            <a:pPr marL="0" indent="0">
               <a:buNone/>
             </a:pPr>
             <a:r>
@@ -4935,7 +4781,7 @@
           <a:bodyPr wrap="square" lIns="0" tIns="0" rIns="0" bIns="0" rtlCol="0" anchor="t"/>
           <a:lstStyle/>
           <a:p>
-            <a:pPr indent="0" marL="0">
+            <a:pPr marL="0" indent="0">
               <a:buNone/>
             </a:pPr>
             <a:r>
@@ -4952,7 +4798,7 @@
             <a:endParaRPr lang="en-US" sz="1260" dirty="0"/>
           </a:p>
           <a:p>
-            <a:pPr indent="0" marL="0">
+            <a:pPr marL="0" indent="0">
               <a:buNone/>
             </a:pPr>
             <a:r>
@@ -4969,7 +4815,7 @@
             <a:endParaRPr lang="en-US" sz="1260" dirty="0"/>
           </a:p>
           <a:p>
-            <a:pPr indent="0" marL="0">
+            <a:pPr marL="0" indent="0">
               <a:buNone/>
             </a:pPr>
             <a:r>
@@ -4981,7 +4827,29 @@
                 <a:ea typeface="Aptos" pitchFamily="34" charset="-122"/>
                 <a:cs typeface="Aptos" pitchFamily="34" charset="-120"/>
               </a:rPr>
-              <a:t>Gateway hacia servicios 8001–8005</a:t>
+              <a:t>Gateway hacia </a:t>
+            </a:r>
+            <a:r>
+              <a:rPr lang="en-US" sz="1260" dirty="0" err="1">
+                <a:solidFill>
+                  <a:srgbClr val="A7B0C2"/>
+                </a:solidFill>
+                <a:latin typeface="Aptos" pitchFamily="34" charset="0"/>
+                <a:ea typeface="Aptos" pitchFamily="34" charset="-122"/>
+                <a:cs typeface="Aptos" pitchFamily="34" charset="-120"/>
+              </a:rPr>
+              <a:t>servicios</a:t>
+            </a:r>
+            <a:r>
+              <a:rPr lang="en-US" sz="1260" dirty="0">
+                <a:solidFill>
+                  <a:srgbClr val="A7B0C2"/>
+                </a:solidFill>
+                <a:latin typeface="Aptos" pitchFamily="34" charset="0"/>
+                <a:ea typeface="Aptos" pitchFamily="34" charset="-122"/>
+                <a:cs typeface="Aptos" pitchFamily="34" charset="-120"/>
+              </a:rPr>
+              <a:t> 8001–8006</a:t>
             </a:r>
             <a:endParaRPr lang="en-US" sz="1260" dirty="0"/>
           </a:p>
@@ -5013,13 +4881,20 @@
             <a:prstDash val="solid"/>
           </a:ln>
           <a:effectLst>
-            <a:outerShdw sx="100000" sy="100000" kx="0" ky="0" algn="bl" rotWithShape="0" blurRad="19050" dist="6350" dir="2700000">
+            <a:outerShdw blurRad="19050" dist="6350" dir="2700000" algn="bl" rotWithShape="0">
               <a:srgbClr val="000000">
                 <a:alpha val="14000"/>
               </a:srgbClr>
             </a:outerShdw>
           </a:effectLst>
         </p:spPr>
+        <p:txBody>
+          <a:bodyPr/>
+          <a:lstStyle/>
+          <a:p>
+            <a:endParaRPr lang="es-CO"/>
+          </a:p>
+        </p:txBody>
       </p:sp>
       <p:sp>
         <p:nvSpPr>
@@ -5045,6 +4920,13 @@
             <a:prstDash val="solid"/>
           </a:ln>
         </p:spPr>
+        <p:txBody>
+          <a:bodyPr/>
+          <a:lstStyle/>
+          <a:p>
+            <a:endParaRPr lang="es-CO"/>
+          </a:p>
+        </p:txBody>
       </p:sp>
       <p:sp>
         <p:nvSpPr>
@@ -5067,7 +4949,7 @@
           <a:bodyPr wrap="square" lIns="0" tIns="0" rIns="0" bIns="0" rtlCol="0" anchor="ctr"/>
           <a:lstStyle/>
           <a:p>
-            <a:pPr indent="0" marL="0">
+            <a:pPr marL="0" indent="0">
               <a:buNone/>
             </a:pPr>
             <a:r>
@@ -5106,7 +4988,7 @@
           <a:bodyPr wrap="square" lIns="0" tIns="0" rIns="0" bIns="0" rtlCol="0" anchor="ctr"/>
           <a:lstStyle/>
           <a:p>
-            <a:pPr indent="0" marL="0">
+            <a:pPr marL="0" indent="0">
               <a:buNone/>
             </a:pPr>
             <a:r>
@@ -5145,7 +5027,7 @@
           <a:bodyPr wrap="square" lIns="0" tIns="0" rIns="0" bIns="0" rtlCol="0" anchor="t"/>
           <a:lstStyle/>
           <a:p>
-            <a:pPr indent="0" marL="0">
+            <a:pPr marL="0" indent="0">
               <a:buNone/>
             </a:pPr>
             <a:r>
@@ -5162,7 +5044,7 @@
             <a:endParaRPr lang="en-US" sz="1260" dirty="0"/>
           </a:p>
           <a:p>
-            <a:pPr indent="0" marL="0">
+            <a:pPr marL="0" indent="0">
               <a:buNone/>
             </a:pPr>
             <a:r>
@@ -5174,12 +5056,12 @@
                 <a:ea typeface="Aptos" pitchFamily="34" charset="-122"/>
                 <a:cs typeface="Aptos" pitchFamily="34" charset="-120"/>
               </a:rPr>
-              <a:t>5 microservicios Node.js + PM2</a:t>
+              <a:t>6 microservicios Node.js + PM2</a:t>
             </a:r>
             <a:endParaRPr lang="en-US" sz="1260" dirty="0"/>
           </a:p>
           <a:p>
-            <a:pPr indent="0" marL="0">
+            <a:pPr marL="0" indent="0">
               <a:buNone/>
             </a:pPr>
             <a:r>
@@ -5223,13 +5105,20 @@
             <a:prstDash val="solid"/>
           </a:ln>
           <a:effectLst>
-            <a:outerShdw sx="100000" sy="100000" kx="0" ky="0" algn="bl" rotWithShape="0" blurRad="19050" dist="6350" dir="2700000">
+            <a:outerShdw blurRad="19050" dist="6350" dir="2700000" algn="bl" rotWithShape="0">
               <a:srgbClr val="000000">
                 <a:alpha val="14000"/>
               </a:srgbClr>
             </a:outerShdw>
           </a:effectLst>
         </p:spPr>
+        <p:txBody>
+          <a:bodyPr/>
+          <a:lstStyle/>
+          <a:p>
+            <a:endParaRPr lang="es-CO"/>
+          </a:p>
+        </p:txBody>
       </p:sp>
       <p:sp>
         <p:nvSpPr>
@@ -5255,6 +5144,13 @@
             <a:prstDash val="solid"/>
           </a:ln>
         </p:spPr>
+        <p:txBody>
+          <a:bodyPr/>
+          <a:lstStyle/>
+          <a:p>
+            <a:endParaRPr lang="es-CO"/>
+          </a:p>
+        </p:txBody>
       </p:sp>
       <p:sp>
         <p:nvSpPr>
@@ -5277,7 +5173,7 @@
           <a:bodyPr wrap="square" lIns="0" tIns="0" rIns="0" bIns="0" rtlCol="0" anchor="ctr"/>
           <a:lstStyle/>
           <a:p>
-            <a:pPr indent="0" marL="0">
+            <a:pPr marL="0" indent="0">
               <a:buNone/>
             </a:pPr>
             <a:r>
@@ -5316,7 +5212,7 @@
           <a:bodyPr wrap="square" lIns="0" tIns="0" rIns="0" bIns="0" rtlCol="0" anchor="ctr"/>
           <a:lstStyle/>
           <a:p>
-            <a:pPr indent="0" marL="0">
+            <a:pPr marL="0" indent="0">
               <a:buNone/>
             </a:pPr>
             <a:r>
@@ -5355,7 +5251,7 @@
           <a:bodyPr wrap="square" lIns="0" tIns="0" rIns="0" bIns="0" rtlCol="0" anchor="t"/>
           <a:lstStyle/>
           <a:p>
-            <a:pPr indent="0" marL="0">
+            <a:pPr marL="0" indent="0">
               <a:buNone/>
             </a:pPr>
             <a:r>
@@ -5372,7 +5268,7 @@
             <a:endParaRPr lang="en-US" sz="1260" dirty="0"/>
           </a:p>
           <a:p>
-            <a:pPr indent="0" marL="0">
+            <a:pPr marL="0" indent="0">
               <a:buNone/>
             </a:pPr>
             <a:r>
@@ -5389,7 +5285,7 @@
             <a:endParaRPr lang="en-US" sz="1260" dirty="0"/>
           </a:p>
           <a:p>
-            <a:pPr indent="0" marL="0">
+            <a:pPr marL="0" indent="0">
               <a:buNone/>
             </a:pPr>
             <a:r>
@@ -5433,6 +5329,13 @@
             <a:prstDash val="solid"/>
           </a:ln>
         </p:spPr>
+        <p:txBody>
+          <a:bodyPr/>
+          <a:lstStyle/>
+          <a:p>
+            <a:endParaRPr lang="es-CO"/>
+          </a:p>
+        </p:txBody>
       </p:sp>
       <p:sp>
         <p:nvSpPr>
@@ -5455,7 +5358,7 @@
           <a:bodyPr wrap="square" lIns="0" tIns="0" rIns="0" bIns="0" rtlCol="0" anchor="ctr"/>
           <a:lstStyle/>
           <a:p>
-            <a:pPr indent="0" marL="0">
+            <a:pPr marL="0" indent="0">
               <a:buNone/>
             </a:pPr>
             <a:r>
@@ -5491,7 +5394,7 @@
           <a:bodyPr wrap="square" lIns="0" tIns="0" rIns="0" bIns="0" rtlCol="0" anchor="ctr"/>
           <a:lstStyle/>
           <a:p>
-            <a:pPr algn="l" indent="0" marL="0">
+            <a:pPr marL="0" indent="0" algn="l">
               <a:buNone/>
             </a:pPr>
             <a:r>
@@ -5500,7 +5403,23 @@
                   <a:srgbClr val="D8E2F0"/>
                 </a:solidFill>
               </a:rPr>
-              <a:t>Frontend por Nginx + JWT. Backend en 8001–8005. Clusters PostgreSQL en 5432–5436.</a:t>
+              <a:t>Frontend por Nginx + JWT. Backend </a:t>
+            </a:r>
+            <a:r>
+              <a:rPr lang="en-US" sz="1280" dirty="0" err="1">
+                <a:solidFill>
+                  <a:srgbClr val="D8E2F0"/>
+                </a:solidFill>
+              </a:rPr>
+              <a:t>en</a:t>
+            </a:r>
+            <a:r>
+              <a:rPr lang="en-US" sz="1280" dirty="0">
+                <a:solidFill>
+                  <a:srgbClr val="D8E2F0"/>
+                </a:solidFill>
+              </a:rPr>
+              <a:t> 8001–8006. Clusters PostgreSQL en 5432–5436.</a:t>
             </a:r>
             <a:endParaRPr lang="en-US" sz="1280" dirty="0"/>
           </a:p>
@@ -5527,7 +5446,7 @@
           <a:bodyPr wrap="square" rtlCol="0" anchor="ctr"/>
           <a:lstStyle/>
           <a:p>
-            <a:pPr algn="r" indent="0" marL="0">
+            <a:pPr marL="0" indent="0" algn="r">
               <a:buNone/>
             </a:pPr>
             <a:r>
@@ -5591,7 +5510,7 @@
           <a:bodyPr wrap="square" rtlCol="0" anchor="ctr"/>
           <a:lstStyle/>
           <a:p>
-            <a:pPr indent="0" marL="0">
+            <a:pPr marL="0" indent="0">
               <a:buNone/>
             </a:pPr>
             <a:r>
@@ -5603,7 +5522,7 @@
                 <a:ea typeface="Aptos" pitchFamily="34" charset="-122"/>
                 <a:cs typeface="Aptos" pitchFamily="34" charset="-120"/>
               </a:rPr>
-              <a:t>03 · BACKEND</a:t>
+              <a:t>BACKEND</a:t>
             </a:r>
             <a:endParaRPr lang="en-US" sz="1100" dirty="0"/>
           </a:p>
@@ -5630,7 +5549,7 @@
           <a:bodyPr wrap="square" lIns="0" tIns="0" rIns="0" bIns="0" rtlCol="0" anchor="ctr"/>
           <a:lstStyle/>
           <a:p>
-            <a:pPr indent="0" marL="0">
+            <a:pPr marL="0" indent="0">
               <a:buNone/>
             </a:pPr>
             <a:r>
@@ -5669,7 +5588,7 @@
           <a:bodyPr wrap="square" lIns="0" tIns="0" rIns="0" bIns="0" rtlCol="0" anchor="ctr"/>
           <a:lstStyle/>
           <a:p>
-            <a:pPr indent="0" marL="0">
+            <a:pPr marL="0" indent="0">
               <a:buNone/>
             </a:pPr>
             <a:r>
@@ -5681,7 +5600,7 @@
                 <a:ea typeface="Aptos" pitchFamily="34" charset="-122"/>
                 <a:cs typeface="Aptos" pitchFamily="34" charset="-120"/>
               </a:rPr>
-              <a:t>La corrección principal del proyecto: el backend no usa la serie 300x. Los servicios corren en 8001–8005.</a:t>
+              <a:t>Los servicios corren en 8001–8005.</a:t>
             </a:r>
             <a:endParaRPr lang="en-US" sz="1450" dirty="0"/>
           </a:p>
@@ -5713,13 +5632,20 @@
             <a:prstDash val="solid"/>
           </a:ln>
           <a:effectLst>
-            <a:outerShdw sx="100000" sy="100000" kx="0" ky="0" algn="bl" rotWithShape="0" blurRad="19050" dist="6350" dir="2700000">
+            <a:outerShdw blurRad="19050" dist="6350" dir="2700000" algn="bl" rotWithShape="0">
               <a:srgbClr val="000000">
                 <a:alpha val="14000"/>
               </a:srgbClr>
             </a:outerShdw>
           </a:effectLst>
         </p:spPr>
+        <p:txBody>
+          <a:bodyPr/>
+          <a:lstStyle/>
+          <a:p>
+            <a:endParaRPr lang="es-CO"/>
+          </a:p>
+        </p:txBody>
       </p:sp>
       <p:sp>
         <p:nvSpPr>
@@ -5751,6 +5677,13 @@
             <a:prstDash val="solid"/>
           </a:ln>
         </p:spPr>
+        <p:txBody>
+          <a:bodyPr/>
+          <a:lstStyle/>
+          <a:p>
+            <a:endParaRPr lang="es-CO"/>
+          </a:p>
+        </p:txBody>
       </p:sp>
       <p:sp>
         <p:nvSpPr>
@@ -5773,7 +5706,7 @@
           <a:bodyPr wrap="square" lIns="0" tIns="0" rIns="0" bIns="0" rtlCol="0" anchor="ctr"/>
           <a:lstStyle/>
           <a:p>
-            <a:pPr algn="ctr" indent="0" marL="0">
+            <a:pPr marL="0" indent="0" algn="ctr">
               <a:buNone/>
             </a:pPr>
             <a:r>
@@ -5812,7 +5745,7 @@
           <a:bodyPr wrap="square" lIns="0" tIns="0" rIns="0" bIns="0" rtlCol="0" anchor="ctr"/>
           <a:lstStyle/>
           <a:p>
-            <a:pPr indent="0" marL="0">
+            <a:pPr marL="0" indent="0">
               <a:buNone/>
             </a:pPr>
             <a:r>
@@ -5851,7 +5784,7 @@
           <a:bodyPr wrap="square" lIns="0" tIns="0" rIns="0" bIns="0" rtlCol="0" anchor="t"/>
           <a:lstStyle/>
           <a:p>
-            <a:pPr indent="0" marL="0">
+            <a:pPr marL="0" indent="0">
               <a:buNone/>
             </a:pPr>
             <a:r>
@@ -5895,13 +5828,20 @@
             <a:prstDash val="solid"/>
           </a:ln>
           <a:effectLst>
-            <a:outerShdw sx="100000" sy="100000" kx="0" ky="0" algn="bl" rotWithShape="0" blurRad="19050" dist="6350" dir="2700000">
+            <a:outerShdw blurRad="19050" dist="6350" dir="2700000" algn="bl" rotWithShape="0">
               <a:srgbClr val="000000">
                 <a:alpha val="14000"/>
               </a:srgbClr>
             </a:outerShdw>
           </a:effectLst>
         </p:spPr>
+        <p:txBody>
+          <a:bodyPr/>
+          <a:lstStyle/>
+          <a:p>
+            <a:endParaRPr lang="es-CO"/>
+          </a:p>
+        </p:txBody>
       </p:sp>
       <p:sp>
         <p:nvSpPr>
@@ -5933,6 +5873,13 @@
             <a:prstDash val="solid"/>
           </a:ln>
         </p:spPr>
+        <p:txBody>
+          <a:bodyPr/>
+          <a:lstStyle/>
+          <a:p>
+            <a:endParaRPr lang="es-CO"/>
+          </a:p>
+        </p:txBody>
       </p:sp>
       <p:sp>
         <p:nvSpPr>
@@ -5955,7 +5902,7 @@
           <a:bodyPr wrap="square" lIns="0" tIns="0" rIns="0" bIns="0" rtlCol="0" anchor="ctr"/>
           <a:lstStyle/>
           <a:p>
-            <a:pPr algn="ctr" indent="0" marL="0">
+            <a:pPr marL="0" indent="0" algn="ctr">
               <a:buNone/>
             </a:pPr>
             <a:r>
@@ -5994,7 +5941,7 @@
           <a:bodyPr wrap="square" lIns="0" tIns="0" rIns="0" bIns="0" rtlCol="0" anchor="ctr"/>
           <a:lstStyle/>
           <a:p>
-            <a:pPr indent="0" marL="0">
+            <a:pPr marL="0" indent="0">
               <a:buNone/>
             </a:pPr>
             <a:r>
@@ -6033,7 +5980,7 @@
           <a:bodyPr wrap="square" lIns="0" tIns="0" rIns="0" bIns="0" rtlCol="0" anchor="t"/>
           <a:lstStyle/>
           <a:p>
-            <a:pPr indent="0" marL="0">
+            <a:pPr marL="0" indent="0">
               <a:buNone/>
             </a:pPr>
             <a:r>
@@ -6077,13 +6024,20 @@
             <a:prstDash val="solid"/>
           </a:ln>
           <a:effectLst>
-            <a:outerShdw sx="100000" sy="100000" kx="0" ky="0" algn="bl" rotWithShape="0" blurRad="19050" dist="6350" dir="2700000">
+            <a:outerShdw blurRad="19050" dist="6350" dir="2700000" algn="bl" rotWithShape="0">
               <a:srgbClr val="000000">
                 <a:alpha val="14000"/>
               </a:srgbClr>
             </a:outerShdw>
           </a:effectLst>
         </p:spPr>
+        <p:txBody>
+          <a:bodyPr/>
+          <a:lstStyle/>
+          <a:p>
+            <a:endParaRPr lang="es-CO"/>
+          </a:p>
+        </p:txBody>
       </p:sp>
       <p:sp>
         <p:nvSpPr>
@@ -6115,6 +6069,13 @@
             <a:prstDash val="solid"/>
           </a:ln>
         </p:spPr>
+        <p:txBody>
+          <a:bodyPr/>
+          <a:lstStyle/>
+          <a:p>
+            <a:endParaRPr lang="es-CO"/>
+          </a:p>
+        </p:txBody>
       </p:sp>
       <p:sp>
         <p:nvSpPr>
@@ -6137,7 +6098,7 @@
           <a:bodyPr wrap="square" lIns="0" tIns="0" rIns="0" bIns="0" rtlCol="0" anchor="ctr"/>
           <a:lstStyle/>
           <a:p>
-            <a:pPr algn="ctr" indent="0" marL="0">
+            <a:pPr marL="0" indent="0" algn="ctr">
               <a:buNone/>
             </a:pPr>
             <a:r>
@@ -6176,7 +6137,7 @@
           <a:bodyPr wrap="square" lIns="0" tIns="0" rIns="0" bIns="0" rtlCol="0" anchor="ctr"/>
           <a:lstStyle/>
           <a:p>
-            <a:pPr indent="0" marL="0">
+            <a:pPr marL="0" indent="0">
               <a:buNone/>
             </a:pPr>
             <a:r>
@@ -6215,7 +6176,7 @@
           <a:bodyPr wrap="square" lIns="0" tIns="0" rIns="0" bIns="0" rtlCol="0" anchor="t"/>
           <a:lstStyle/>
           <a:p>
-            <a:pPr indent="0" marL="0">
+            <a:pPr marL="0" indent="0">
               <a:buNone/>
             </a:pPr>
             <a:r>
@@ -6259,13 +6220,20 @@
             <a:prstDash val="solid"/>
           </a:ln>
           <a:effectLst>
-            <a:outerShdw sx="100000" sy="100000" kx="0" ky="0" algn="bl" rotWithShape="0" blurRad="19050" dist="6350" dir="2700000">
+            <a:outerShdw blurRad="19050" dist="6350" dir="2700000" algn="bl" rotWithShape="0">
               <a:srgbClr val="000000">
                 <a:alpha val="14000"/>
               </a:srgbClr>
             </a:outerShdw>
           </a:effectLst>
         </p:spPr>
+        <p:txBody>
+          <a:bodyPr/>
+          <a:lstStyle/>
+          <a:p>
+            <a:endParaRPr lang="es-CO"/>
+          </a:p>
+        </p:txBody>
       </p:sp>
       <p:sp>
         <p:nvSpPr>
@@ -6297,6 +6265,13 @@
             <a:prstDash val="solid"/>
           </a:ln>
         </p:spPr>
+        <p:txBody>
+          <a:bodyPr/>
+          <a:lstStyle/>
+          <a:p>
+            <a:endParaRPr lang="es-CO"/>
+          </a:p>
+        </p:txBody>
       </p:sp>
       <p:sp>
         <p:nvSpPr>
@@ -6319,7 +6294,7 @@
           <a:bodyPr wrap="square" lIns="0" tIns="0" rIns="0" bIns="0" rtlCol="0" anchor="ctr"/>
           <a:lstStyle/>
           <a:p>
-            <a:pPr algn="ctr" indent="0" marL="0">
+            <a:pPr marL="0" indent="0" algn="ctr">
               <a:buNone/>
             </a:pPr>
             <a:r>
@@ -6358,7 +6333,7 @@
           <a:bodyPr wrap="square" lIns="0" tIns="0" rIns="0" bIns="0" rtlCol="0" anchor="ctr"/>
           <a:lstStyle/>
           <a:p>
-            <a:pPr indent="0" marL="0">
+            <a:pPr marL="0" indent="0">
               <a:buNone/>
             </a:pPr>
             <a:r>
@@ -6397,7 +6372,7 @@
           <a:bodyPr wrap="square" lIns="0" tIns="0" rIns="0" bIns="0" rtlCol="0" anchor="t"/>
           <a:lstStyle/>
           <a:p>
-            <a:pPr indent="0" marL="0">
+            <a:pPr marL="0" indent="0">
               <a:buNone/>
             </a:pPr>
             <a:r>
@@ -6423,8 +6398,8 @@
         </p:nvSpPr>
         <p:spPr>
           <a:xfrm>
-            <a:off x="1874520" y="4069080"/>
-            <a:ext cx="8275320" cy="1417320"/>
+            <a:off x="1874519" y="4069080"/>
+            <a:ext cx="3191257" cy="1508760"/>
           </a:xfrm>
           <a:prstGeom prst="roundRect">
             <a:avLst>
@@ -6441,13 +6416,20 @@
             <a:prstDash val="solid"/>
           </a:ln>
           <a:effectLst>
-            <a:outerShdw sx="100000" sy="100000" kx="0" ky="0" algn="bl" rotWithShape="0" blurRad="19050" dist="6350" dir="2700000">
+            <a:outerShdw blurRad="19050" dist="6350" dir="2700000" algn="bl" rotWithShape="0">
               <a:srgbClr val="000000">
                 <a:alpha val="14000"/>
               </a:srgbClr>
             </a:outerShdw>
           </a:effectLst>
         </p:spPr>
+        <p:txBody>
+          <a:bodyPr/>
+          <a:lstStyle/>
+          <a:p>
+            <a:endParaRPr lang="es-CO"/>
+          </a:p>
+        </p:txBody>
       </p:sp>
       <p:sp>
         <p:nvSpPr>
@@ -6479,6 +6461,13 @@
             <a:prstDash val="solid"/>
           </a:ln>
         </p:spPr>
+        <p:txBody>
+          <a:bodyPr/>
+          <a:lstStyle/>
+          <a:p>
+            <a:endParaRPr lang="es-CO"/>
+          </a:p>
+        </p:txBody>
       </p:sp>
       <p:sp>
         <p:nvSpPr>
@@ -6501,7 +6490,7 @@
           <a:bodyPr wrap="square" lIns="0" tIns="0" rIns="0" bIns="0" rtlCol="0" anchor="ctr"/>
           <a:lstStyle/>
           <a:p>
-            <a:pPr algn="ctr" indent="0" marL="0">
+            <a:pPr marL="0" indent="0" algn="ctr">
               <a:buNone/>
             </a:pPr>
             <a:r>
@@ -6527,24 +6516,24 @@
         </p:nvSpPr>
         <p:spPr>
           <a:xfrm>
-            <a:off x="2020824" y="4553712"/>
-            <a:ext cx="7982712" cy="310896"/>
-          </a:xfrm>
-          <a:prstGeom prst="rect">
-            <a:avLst/>
-          </a:prstGeom>
-          <a:noFill/>
-          <a:ln/>
-        </p:spPr>
-        <p:txBody>
-          <a:bodyPr wrap="square" lIns="0" tIns="0" rIns="0" bIns="0" rtlCol="0" anchor="ctr"/>
-          <a:lstStyle/>
-          <a:p>
-            <a:pPr indent="0" marL="0">
-              <a:buNone/>
-            </a:pPr>
-            <a:r>
-              <a:rPr lang="en-US" sz="2000" b="1" dirty="0">
+            <a:off x="2020824" y="4583176"/>
+            <a:ext cx="2124456" cy="281432"/>
+          </a:xfrm>
+          <a:prstGeom prst="rect">
+            <a:avLst/>
+          </a:prstGeom>
+          <a:noFill/>
+          <a:ln/>
+        </p:spPr>
+        <p:txBody>
+          <a:bodyPr wrap="square" lIns="0" tIns="0" rIns="0" bIns="0" rtlCol="0" anchor="ctr"/>
+          <a:lstStyle/>
+          <a:p>
+            <a:pPr marL="0" indent="0">
+              <a:buNone/>
+            </a:pPr>
+            <a:r>
+              <a:rPr lang="en-US" sz="1600" b="1" dirty="0">
                 <a:solidFill>
                   <a:srgbClr val="EAF0FF"/>
                 </a:solidFill>
@@ -6554,7 +6543,7 @@
               </a:rPr>
               <a:t>ms-comparendos</a:t>
             </a:r>
-            <a:endParaRPr lang="en-US" sz="2000" dirty="0"/>
+            <a:endParaRPr lang="en-US" sz="1600" dirty="0"/>
           </a:p>
         </p:txBody>
       </p:sp>
@@ -6567,7 +6556,7 @@
         <p:spPr>
           <a:xfrm>
             <a:off x="2020824" y="4928616"/>
-            <a:ext cx="7982712" cy="457200"/>
+            <a:ext cx="2459736" cy="457200"/>
           </a:xfrm>
           <a:prstGeom prst="rect">
             <a:avLst/>
@@ -6579,7 +6568,7 @@
           <a:bodyPr wrap="square" lIns="0" tIns="0" rIns="0" bIns="0" rtlCol="0" anchor="t"/>
           <a:lstStyle/>
           <a:p>
-            <a:pPr indent="0" marL="0">
+            <a:pPr marL="0" indent="0">
               <a:buNone/>
             </a:pPr>
             <a:r>
@@ -6605,7 +6594,7 @@
         </p:nvSpPr>
         <p:spPr>
           <a:xfrm>
-            <a:off x="2011680" y="5577840"/>
+            <a:off x="2011680" y="5689600"/>
             <a:ext cx="8092440" cy="365760"/>
           </a:xfrm>
           <a:prstGeom prst="rect">
@@ -6618,7 +6607,7 @@
           <a:bodyPr wrap="square" lIns="0" tIns="0" rIns="0" bIns="0" rtlCol="0" anchor="ctr"/>
           <a:lstStyle/>
           <a:p>
-            <a:pPr algn="ctr" indent="0" marL="0">
+            <a:pPr marL="0" indent="0" algn="ctr">
               <a:buNone/>
             </a:pPr>
             <a:r>
@@ -6657,7 +6646,7 @@
           <a:bodyPr wrap="square" rtlCol="0" anchor="ctr"/>
           <a:lstStyle/>
           <a:p>
-            <a:pPr algn="r" indent="0" marL="0">
+            <a:pPr marL="0" indent="0" algn="r">
               <a:buNone/>
             </a:pPr>
             <a:r>
@@ -6672,6 +6661,321 @@
               <a:t>4</a:t>
             </a:r>
             <a:endParaRPr lang="en-US" sz="1000" dirty="0"/>
+          </a:p>
+        </p:txBody>
+      </p:sp>
+      <p:sp>
+        <p:nvSpPr>
+          <p:cNvPr id="35" name="Shape 23">
+            <a:extLst>
+              <a:ext uri="{FF2B5EF4-FFF2-40B4-BE49-F238E27FC236}">
+                <a16:creationId xmlns:a16="http://schemas.microsoft.com/office/drawing/2014/main" id="{1005FAA3-14B5-43AC-C151-55C3A45269CF}"/>
+              </a:ext>
+            </a:extLst>
+          </p:cNvPr>
+          <p:cNvSpPr/>
+          <p:nvPr/>
+        </p:nvSpPr>
+        <p:spPr>
+          <a:xfrm>
+            <a:off x="5530597" y="4110228"/>
+            <a:ext cx="3191257" cy="1508760"/>
+          </a:xfrm>
+          <a:prstGeom prst="roundRect">
+            <a:avLst>
+              <a:gd name="adj" fmla="val 5161"/>
+            </a:avLst>
+          </a:prstGeom>
+          <a:solidFill>
+            <a:srgbClr val="151620"/>
+          </a:solidFill>
+          <a:ln w="12700">
+            <a:solidFill>
+              <a:srgbClr val="2A3346"/>
+            </a:solidFill>
+            <a:prstDash val="solid"/>
+          </a:ln>
+          <a:effectLst>
+            <a:outerShdw blurRad="19050" dist="6350" dir="2700000" algn="bl" rotWithShape="0">
+              <a:srgbClr val="000000">
+                <a:alpha val="14000"/>
+              </a:srgbClr>
+            </a:outerShdw>
+          </a:effectLst>
+        </p:spPr>
+        <p:txBody>
+          <a:bodyPr/>
+          <a:lstStyle/>
+          <a:p>
+            <a:endParaRPr lang="es-CO"/>
+          </a:p>
+        </p:txBody>
+      </p:sp>
+      <p:sp>
+        <p:nvSpPr>
+          <p:cNvPr id="40" name="Shape 24">
+            <a:extLst>
+              <a:ext uri="{FF2B5EF4-FFF2-40B4-BE49-F238E27FC236}">
+                <a16:creationId xmlns:a16="http://schemas.microsoft.com/office/drawing/2014/main" id="{2EC44AD3-1C4C-AD10-77DB-6499D9CB0B02}"/>
+              </a:ext>
+            </a:extLst>
+          </p:cNvPr>
+          <p:cNvSpPr/>
+          <p:nvPr/>
+        </p:nvSpPr>
+        <p:spPr>
+          <a:xfrm>
+            <a:off x="5693664" y="4253992"/>
+            <a:ext cx="658368" cy="256032"/>
+          </a:xfrm>
+          <a:prstGeom prst="roundRect">
+            <a:avLst>
+              <a:gd name="adj" fmla="val 28571"/>
+            </a:avLst>
+          </a:prstGeom>
+          <a:solidFill>
+            <a:schemeClr val="bg1">
+              <a:lumMod val="75000"/>
+              <a:alpha val="16000"/>
+            </a:schemeClr>
+          </a:solidFill>
+          <a:ln w="12700">
+            <a:solidFill>
+              <a:schemeClr val="bg1">
+                <a:lumMod val="50000"/>
+                <a:alpha val="80000"/>
+              </a:schemeClr>
+            </a:solidFill>
+            <a:prstDash val="solid"/>
+          </a:ln>
+        </p:spPr>
+        <p:txBody>
+          <a:bodyPr/>
+          <a:lstStyle/>
+          <a:p>
+            <a:endParaRPr lang="es-CO" dirty="0"/>
+          </a:p>
+        </p:txBody>
+      </p:sp>
+      <p:sp>
+        <p:nvSpPr>
+          <p:cNvPr id="41" name="Text 25">
+            <a:extLst>
+              <a:ext uri="{FF2B5EF4-FFF2-40B4-BE49-F238E27FC236}">
+                <a16:creationId xmlns:a16="http://schemas.microsoft.com/office/drawing/2014/main" id="{8DD0A1CE-0E06-6CD3-BECD-FAFE73080ECD}"/>
+              </a:ext>
+            </a:extLst>
+          </p:cNvPr>
+          <p:cNvSpPr/>
+          <p:nvPr/>
+        </p:nvSpPr>
+        <p:spPr>
+          <a:xfrm>
+            <a:off x="5693664" y="4267708"/>
+            <a:ext cx="658368" cy="201168"/>
+          </a:xfrm>
+          <a:prstGeom prst="rect">
+            <a:avLst/>
+          </a:prstGeom>
+          <a:noFill/>
+          <a:ln/>
+        </p:spPr>
+        <p:txBody>
+          <a:bodyPr wrap="square" lIns="0" tIns="0" rIns="0" bIns="0" rtlCol="0" anchor="ctr"/>
+          <a:lstStyle/>
+          <a:p>
+            <a:pPr marL="0" indent="0" algn="ctr">
+              <a:buNone/>
+            </a:pPr>
+            <a:r>
+              <a:rPr lang="en-US" sz="1000" b="1" dirty="0">
+                <a:solidFill>
+                  <a:schemeClr val="bg1">
+                    <a:lumMod val="50000"/>
+                  </a:schemeClr>
+                </a:solidFill>
+                <a:latin typeface="Aptos" pitchFamily="34" charset="0"/>
+                <a:ea typeface="Aptos" pitchFamily="34" charset="-122"/>
+                <a:cs typeface="Aptos" pitchFamily="34" charset="-120"/>
+              </a:rPr>
+              <a:t>8006</a:t>
+            </a:r>
+            <a:endParaRPr lang="en-US" sz="1000" dirty="0">
+              <a:solidFill>
+                <a:schemeClr val="bg1">
+                  <a:lumMod val="50000"/>
+                </a:schemeClr>
+              </a:solidFill>
+            </a:endParaRPr>
+          </a:p>
+        </p:txBody>
+      </p:sp>
+      <p:sp>
+        <p:nvSpPr>
+          <p:cNvPr id="42" name="Text 26">
+            <a:extLst>
+              <a:ext uri="{FF2B5EF4-FFF2-40B4-BE49-F238E27FC236}">
+                <a16:creationId xmlns:a16="http://schemas.microsoft.com/office/drawing/2014/main" id="{2BE9066C-E194-D922-127A-F3286BE8592D}"/>
+              </a:ext>
+            </a:extLst>
+          </p:cNvPr>
+          <p:cNvSpPr/>
+          <p:nvPr/>
+        </p:nvSpPr>
+        <p:spPr>
+          <a:xfrm>
+            <a:off x="5693664" y="4621784"/>
+            <a:ext cx="2124456" cy="281432"/>
+          </a:xfrm>
+          <a:prstGeom prst="rect">
+            <a:avLst/>
+          </a:prstGeom>
+          <a:noFill/>
+          <a:ln/>
+        </p:spPr>
+        <p:txBody>
+          <a:bodyPr wrap="square" lIns="0" tIns="0" rIns="0" bIns="0" rtlCol="0" anchor="ctr"/>
+          <a:lstStyle/>
+          <a:p>
+            <a:pPr marL="0" indent="0">
+              <a:buNone/>
+            </a:pPr>
+            <a:r>
+              <a:rPr lang="en-US" sz="1600" b="1" dirty="0" err="1">
+                <a:solidFill>
+                  <a:srgbClr val="EAF0FF"/>
+                </a:solidFill>
+                <a:latin typeface="Aptos Display" pitchFamily="34" charset="0"/>
+                <a:ea typeface="Aptos Display" pitchFamily="34" charset="-122"/>
+                <a:cs typeface="Aptos Display" pitchFamily="34" charset="-120"/>
+              </a:rPr>
+              <a:t>ms-reportes</a:t>
+            </a:r>
+            <a:endParaRPr lang="en-US" sz="1600" dirty="0"/>
+          </a:p>
+        </p:txBody>
+      </p:sp>
+      <p:sp>
+        <p:nvSpPr>
+          <p:cNvPr id="43" name="Text 27">
+            <a:extLst>
+              <a:ext uri="{FF2B5EF4-FFF2-40B4-BE49-F238E27FC236}">
+                <a16:creationId xmlns:a16="http://schemas.microsoft.com/office/drawing/2014/main" id="{2A35C64D-25CD-FBFF-5A42-696368B890A2}"/>
+              </a:ext>
+            </a:extLst>
+          </p:cNvPr>
+          <p:cNvSpPr/>
+          <p:nvPr/>
+        </p:nvSpPr>
+        <p:spPr>
+          <a:xfrm>
+            <a:off x="5693664" y="4967224"/>
+            <a:ext cx="2459736" cy="457200"/>
+          </a:xfrm>
+          <a:prstGeom prst="rect">
+            <a:avLst/>
+          </a:prstGeom>
+          <a:noFill/>
+          <a:ln/>
+        </p:spPr>
+        <p:txBody>
+          <a:bodyPr wrap="square" lIns="0" tIns="0" rIns="0" bIns="0" rtlCol="0" anchor="t"/>
+          <a:lstStyle/>
+          <a:p>
+            <a:pPr marL="0" indent="0">
+              <a:buNone/>
+            </a:pPr>
+            <a:r>
+              <a:rPr lang="en-US" sz="1400" dirty="0" err="1">
+                <a:solidFill>
+                  <a:srgbClr val="A7B0C2"/>
+                </a:solidFill>
+                <a:latin typeface="Aptos" pitchFamily="34" charset="0"/>
+              </a:rPr>
+              <a:t>Exportación</a:t>
+            </a:r>
+            <a:r>
+              <a:rPr lang="en-US" sz="1400" dirty="0">
+                <a:solidFill>
+                  <a:srgbClr val="A7B0C2"/>
+                </a:solidFill>
+                <a:latin typeface="Aptos" pitchFamily="34" charset="0"/>
+              </a:rPr>
+              <a:t> e </a:t>
+            </a:r>
+            <a:r>
+              <a:rPr lang="en-US" sz="1400" dirty="0" err="1">
+                <a:solidFill>
+                  <a:srgbClr val="A7B0C2"/>
+                </a:solidFill>
+                <a:latin typeface="Aptos" pitchFamily="34" charset="0"/>
+              </a:rPr>
+              <a:t>importacion</a:t>
+            </a:r>
+            <a:r>
+              <a:rPr lang="en-US" sz="1400" dirty="0">
+                <a:solidFill>
+                  <a:srgbClr val="A7B0C2"/>
+                </a:solidFill>
+                <a:latin typeface="Aptos" pitchFamily="34" charset="0"/>
+              </a:rPr>
+              <a:t> de </a:t>
+            </a:r>
+            <a:r>
+              <a:rPr lang="en-US" sz="1400" dirty="0" err="1">
+                <a:solidFill>
+                  <a:srgbClr val="A7B0C2"/>
+                </a:solidFill>
+                <a:latin typeface="Aptos" pitchFamily="34" charset="0"/>
+              </a:rPr>
+              <a:t>reportes</a:t>
+            </a:r>
+            <a:r>
+              <a:rPr lang="en-US" sz="1400" dirty="0">
+                <a:solidFill>
+                  <a:srgbClr val="A7B0C2"/>
+                </a:solidFill>
+                <a:latin typeface="Aptos" pitchFamily="34" charset="0"/>
+              </a:rPr>
+              <a:t> </a:t>
+            </a:r>
+            <a:r>
+              <a:rPr lang="en-US" sz="1400" dirty="0" err="1">
+                <a:solidFill>
+                  <a:srgbClr val="A7B0C2"/>
+                </a:solidFill>
+                <a:latin typeface="Aptos" pitchFamily="34" charset="0"/>
+              </a:rPr>
+              <a:t>en</a:t>
+            </a:r>
+            <a:r>
+              <a:rPr lang="en-US" sz="1400" dirty="0">
+                <a:solidFill>
+                  <a:srgbClr val="A7B0C2"/>
+                </a:solidFill>
+                <a:latin typeface="Aptos" pitchFamily="34" charset="0"/>
+              </a:rPr>
+              <a:t> </a:t>
+            </a:r>
+            <a:r>
+              <a:rPr lang="en-US" sz="1400" dirty="0" err="1">
+                <a:solidFill>
+                  <a:srgbClr val="A7B0C2"/>
+                </a:solidFill>
+                <a:latin typeface="Aptos" pitchFamily="34" charset="0"/>
+              </a:rPr>
+              <a:t>formatos</a:t>
+            </a:r>
+            <a:r>
+              <a:rPr lang="en-US" sz="1400" dirty="0">
+                <a:solidFill>
+                  <a:srgbClr val="A7B0C2"/>
+                </a:solidFill>
+                <a:latin typeface="Aptos" pitchFamily="34" charset="0"/>
+              </a:rPr>
+              <a:t> xlsx, csv y pdf.</a:t>
+            </a:r>
+            <a:endParaRPr lang="en-US" sz="1400" dirty="0"/>
           </a:p>
         </p:txBody>
       </p:sp>
@@ -6721,7 +7025,7 @@
           <a:bodyPr wrap="square" rtlCol="0" anchor="ctr"/>
           <a:lstStyle/>
           <a:p>
-            <a:pPr indent="0" marL="0">
+            <a:pPr marL="0" indent="0">
               <a:buNone/>
             </a:pPr>
             <a:r>
@@ -6733,7 +7037,7 @@
                 <a:ea typeface="Aptos" pitchFamily="34" charset="-122"/>
                 <a:cs typeface="Aptos" pitchFamily="34" charset="-120"/>
               </a:rPr>
-              <a:t>04 · DATOS</a:t>
+              <a:t>DATOS</a:t>
             </a:r>
             <a:endParaRPr lang="en-US" sz="1100" dirty="0"/>
           </a:p>
@@ -6760,7 +7064,7 @@
           <a:bodyPr wrap="square" lIns="0" tIns="0" rIns="0" bIns="0" rtlCol="0" anchor="ctr"/>
           <a:lstStyle/>
           <a:p>
-            <a:pPr indent="0" marL="0">
+            <a:pPr marL="0" indent="0">
               <a:buNone/>
             </a:pPr>
             <a:r>
@@ -6799,7 +7103,7 @@
           <a:bodyPr wrap="square" lIns="0" tIns="0" rIns="0" bIns="0" rtlCol="0" anchor="ctr"/>
           <a:lstStyle/>
           <a:p>
-            <a:pPr indent="0" marL="0">
+            <a:pPr marL="0" indent="0">
               <a:buNone/>
             </a:pPr>
             <a:r>
@@ -6843,6 +7147,13 @@
             <a:prstDash val="solid"/>
           </a:ln>
         </p:spPr>
+        <p:txBody>
+          <a:bodyPr/>
+          <a:lstStyle/>
+          <a:p>
+            <a:endParaRPr lang="es-CO"/>
+          </a:p>
+        </p:txBody>
       </p:sp>
       <p:sp>
         <p:nvSpPr>
@@ -6865,7 +7176,7 @@
           <a:bodyPr wrap="square" lIns="0" tIns="0" rIns="0" bIns="0" rtlCol="0" anchor="ctr"/>
           <a:lstStyle/>
           <a:p>
-            <a:pPr indent="0" marL="0">
+            <a:pPr marL="0" indent="0">
               <a:buNone/>
             </a:pPr>
             <a:r>
@@ -6901,7 +7212,7 @@
           <a:bodyPr wrap="square" lIns="0" tIns="0" rIns="0" bIns="0" rtlCol="0" anchor="ctr"/>
           <a:lstStyle/>
           <a:p>
-            <a:pPr indent="0" marL="0">
+            <a:pPr marL="0" indent="0">
               <a:buNone/>
             </a:pPr>
             <a:r>
@@ -6937,7 +7248,7 @@
           <a:bodyPr wrap="square" lIns="0" tIns="0" rIns="0" bIns="0" rtlCol="0" anchor="ctr"/>
           <a:lstStyle/>
           <a:p>
-            <a:pPr indent="0" marL="0">
+            <a:pPr marL="0" indent="0">
               <a:buNone/>
             </a:pPr>
             <a:r>
@@ -6973,7 +7284,7 @@
           <a:bodyPr wrap="square" lIns="0" tIns="0" rIns="0" bIns="0" rtlCol="0" anchor="ctr"/>
           <a:lstStyle/>
           <a:p>
-            <a:pPr indent="0" marL="0">
+            <a:pPr marL="0" indent="0">
               <a:buNone/>
             </a:pPr>
             <a:r>
@@ -7009,7 +7320,7 @@
           <a:bodyPr wrap="square" lIns="0" tIns="0" rIns="0" bIns="0" rtlCol="0" anchor="ctr"/>
           <a:lstStyle/>
           <a:p>
-            <a:pPr indent="0" marL="0">
+            <a:pPr marL="0" indent="0">
               <a:buNone/>
             </a:pPr>
             <a:r>
@@ -7046,6 +7357,13 @@
             <a:prstDash val="solid"/>
           </a:ln>
         </p:spPr>
+        <p:txBody>
+          <a:bodyPr/>
+          <a:lstStyle/>
+          <a:p>
+            <a:endParaRPr lang="es-CO"/>
+          </a:p>
+        </p:txBody>
       </p:sp>
       <p:sp>
         <p:nvSpPr>
@@ -7068,7 +7386,7 @@
           <a:bodyPr wrap="square" lIns="0" tIns="0" rIns="0" bIns="0" rtlCol="0" anchor="ctr"/>
           <a:lstStyle/>
           <a:p>
-            <a:pPr indent="0" marL="0">
+            <a:pPr marL="0" indent="0">
               <a:buNone/>
             </a:pPr>
             <a:r>
@@ -7104,7 +7422,7 @@
           <a:bodyPr wrap="square" lIns="0" tIns="0" rIns="0" bIns="0" rtlCol="0" anchor="ctr"/>
           <a:lstStyle/>
           <a:p>
-            <a:pPr indent="0" marL="0">
+            <a:pPr marL="0" indent="0">
               <a:buNone/>
             </a:pPr>
             <a:r>
@@ -7140,7 +7458,7 @@
           <a:bodyPr wrap="square" lIns="0" tIns="0" rIns="0" bIns="0" rtlCol="0" anchor="ctr"/>
           <a:lstStyle/>
           <a:p>
-            <a:pPr indent="0" marL="0">
+            <a:pPr marL="0" indent="0">
               <a:buNone/>
             </a:pPr>
             <a:r>
@@ -7176,7 +7494,7 @@
           <a:bodyPr wrap="square" lIns="0" tIns="0" rIns="0" bIns="0" rtlCol="0" anchor="ctr"/>
           <a:lstStyle/>
           <a:p>
-            <a:pPr indent="0" marL="0">
+            <a:pPr marL="0" indent="0">
               <a:buNone/>
             </a:pPr>
             <a:r>
@@ -7212,7 +7530,7 @@
           <a:bodyPr wrap="square" lIns="0" tIns="0" rIns="0" bIns="0" rtlCol="0" anchor="ctr"/>
           <a:lstStyle/>
           <a:p>
-            <a:pPr indent="0" marL="0">
+            <a:pPr marL="0" indent="0">
               <a:buNone/>
             </a:pPr>
             <a:r>
@@ -7249,6 +7567,13 @@
             <a:prstDash val="solid"/>
           </a:ln>
         </p:spPr>
+        <p:txBody>
+          <a:bodyPr/>
+          <a:lstStyle/>
+          <a:p>
+            <a:endParaRPr lang="es-CO"/>
+          </a:p>
+        </p:txBody>
       </p:sp>
       <p:sp>
         <p:nvSpPr>
@@ -7271,7 +7596,7 @@
           <a:bodyPr wrap="square" lIns="0" tIns="0" rIns="0" bIns="0" rtlCol="0" anchor="ctr"/>
           <a:lstStyle/>
           <a:p>
-            <a:pPr indent="0" marL="0">
+            <a:pPr marL="0" indent="0">
               <a:buNone/>
             </a:pPr>
             <a:r>
@@ -7307,7 +7632,7 @@
           <a:bodyPr wrap="square" lIns="0" tIns="0" rIns="0" bIns="0" rtlCol="0" anchor="ctr"/>
           <a:lstStyle/>
           <a:p>
-            <a:pPr indent="0" marL="0">
+            <a:pPr marL="0" indent="0">
               <a:buNone/>
             </a:pPr>
             <a:r>
@@ -7343,7 +7668,7 @@
           <a:bodyPr wrap="square" lIns="0" tIns="0" rIns="0" bIns="0" rtlCol="0" anchor="ctr"/>
           <a:lstStyle/>
           <a:p>
-            <a:pPr indent="0" marL="0">
+            <a:pPr marL="0" indent="0">
               <a:buNone/>
             </a:pPr>
             <a:r>
@@ -7379,7 +7704,7 @@
           <a:bodyPr wrap="square" lIns="0" tIns="0" rIns="0" bIns="0" rtlCol="0" anchor="ctr"/>
           <a:lstStyle/>
           <a:p>
-            <a:pPr indent="0" marL="0">
+            <a:pPr marL="0" indent="0">
               <a:buNone/>
             </a:pPr>
             <a:r>
@@ -7415,7 +7740,7 @@
           <a:bodyPr wrap="square" lIns="0" tIns="0" rIns="0" bIns="0" rtlCol="0" anchor="ctr"/>
           <a:lstStyle/>
           <a:p>
-            <a:pPr indent="0" marL="0">
+            <a:pPr marL="0" indent="0">
               <a:buNone/>
             </a:pPr>
             <a:r>
@@ -7452,6 +7777,13 @@
             <a:prstDash val="solid"/>
           </a:ln>
         </p:spPr>
+        <p:txBody>
+          <a:bodyPr/>
+          <a:lstStyle/>
+          <a:p>
+            <a:endParaRPr lang="es-CO"/>
+          </a:p>
+        </p:txBody>
       </p:sp>
       <p:sp>
         <p:nvSpPr>
@@ -7474,7 +7806,7 @@
           <a:bodyPr wrap="square" lIns="0" tIns="0" rIns="0" bIns="0" rtlCol="0" anchor="ctr"/>
           <a:lstStyle/>
           <a:p>
-            <a:pPr indent="0" marL="0">
+            <a:pPr marL="0" indent="0">
               <a:buNone/>
             </a:pPr>
             <a:r>
@@ -7510,7 +7842,7 @@
           <a:bodyPr wrap="square" lIns="0" tIns="0" rIns="0" bIns="0" rtlCol="0" anchor="ctr"/>
           <a:lstStyle/>
           <a:p>
-            <a:pPr indent="0" marL="0">
+            <a:pPr marL="0" indent="0">
               <a:buNone/>
             </a:pPr>
             <a:r>
@@ -7546,7 +7878,7 @@
           <a:bodyPr wrap="square" lIns="0" tIns="0" rIns="0" bIns="0" rtlCol="0" anchor="ctr"/>
           <a:lstStyle/>
           <a:p>
-            <a:pPr indent="0" marL="0">
+            <a:pPr marL="0" indent="0">
               <a:buNone/>
             </a:pPr>
             <a:r>
@@ -7582,7 +7914,7 @@
           <a:bodyPr wrap="square" lIns="0" tIns="0" rIns="0" bIns="0" rtlCol="0" anchor="ctr"/>
           <a:lstStyle/>
           <a:p>
-            <a:pPr indent="0" marL="0">
+            <a:pPr marL="0" indent="0">
               <a:buNone/>
             </a:pPr>
             <a:r>
@@ -7618,7 +7950,7 @@
           <a:bodyPr wrap="square" lIns="0" tIns="0" rIns="0" bIns="0" rtlCol="0" anchor="ctr"/>
           <a:lstStyle/>
           <a:p>
-            <a:pPr indent="0" marL="0">
+            <a:pPr marL="0" indent="0">
               <a:buNone/>
             </a:pPr>
             <a:r>
@@ -7655,6 +7987,13 @@
             <a:prstDash val="solid"/>
           </a:ln>
         </p:spPr>
+        <p:txBody>
+          <a:bodyPr/>
+          <a:lstStyle/>
+          <a:p>
+            <a:endParaRPr lang="es-CO"/>
+          </a:p>
+        </p:txBody>
       </p:sp>
       <p:sp>
         <p:nvSpPr>
@@ -7677,7 +8016,7 @@
           <a:bodyPr wrap="square" lIns="0" tIns="0" rIns="0" bIns="0" rtlCol="0" anchor="ctr"/>
           <a:lstStyle/>
           <a:p>
-            <a:pPr indent="0" marL="0">
+            <a:pPr marL="0" indent="0">
               <a:buNone/>
             </a:pPr>
             <a:r>
@@ -7713,7 +8052,7 @@
           <a:bodyPr wrap="square" lIns="0" tIns="0" rIns="0" bIns="0" rtlCol="0" anchor="ctr"/>
           <a:lstStyle/>
           <a:p>
-            <a:pPr indent="0" marL="0">
+            <a:pPr marL="0" indent="0">
               <a:buNone/>
             </a:pPr>
             <a:r>
@@ -7749,7 +8088,7 @@
           <a:bodyPr wrap="square" lIns="0" tIns="0" rIns="0" bIns="0" rtlCol="0" anchor="ctr"/>
           <a:lstStyle/>
           <a:p>
-            <a:pPr indent="0" marL="0">
+            <a:pPr marL="0" indent="0">
               <a:buNone/>
             </a:pPr>
             <a:r>
@@ -7785,7 +8124,7 @@
           <a:bodyPr wrap="square" lIns="0" tIns="0" rIns="0" bIns="0" rtlCol="0" anchor="ctr"/>
           <a:lstStyle/>
           <a:p>
-            <a:pPr indent="0" marL="0">
+            <a:pPr marL="0" indent="0">
               <a:buNone/>
             </a:pPr>
             <a:r>
@@ -7821,7 +8160,7 @@
           <a:bodyPr wrap="square" lIns="0" tIns="0" rIns="0" bIns="0" rtlCol="0" anchor="ctr"/>
           <a:lstStyle/>
           <a:p>
-            <a:pPr indent="0" marL="0">
+            <a:pPr marL="0" indent="0">
               <a:buNone/>
             </a:pPr>
             <a:r>
@@ -7858,6 +8197,13 @@
             <a:prstDash val="solid"/>
           </a:ln>
         </p:spPr>
+        <p:txBody>
+          <a:bodyPr/>
+          <a:lstStyle/>
+          <a:p>
+            <a:endParaRPr lang="es-CO"/>
+          </a:p>
+        </p:txBody>
       </p:sp>
       <p:sp>
         <p:nvSpPr>
@@ -7880,11 +8226,8 @@
           <a:bodyPr wrap="square" lIns="0" tIns="0" rIns="0" bIns="0" rtlCol="0" anchor="ctr"/>
           <a:lstStyle/>
           <a:p>
-            <a:pPr indent="0" marL="0">
-              <a:buNone/>
-            </a:pPr>
-            <a:r>
-              <a:rPr lang="en-US" sz="1320" dirty="0">
+            <a:r>
+              <a:rPr lang="en-US" sz="1320" dirty="0" err="1">
                 <a:solidFill>
                   <a:srgbClr val="EAF0FF"/>
                 </a:solidFill>
@@ -7916,7 +8259,7 @@
           <a:bodyPr wrap="square" lIns="0" tIns="0" rIns="0" bIns="0" rtlCol="0" anchor="ctr"/>
           <a:lstStyle/>
           <a:p>
-            <a:pPr indent="0" marL="0">
+            <a:pPr marL="0" indent="0">
               <a:buNone/>
             </a:pPr>
             <a:r>
@@ -7952,7 +8295,7 @@
           <a:bodyPr wrap="square" lIns="0" tIns="0" rIns="0" bIns="0" rtlCol="0" anchor="ctr"/>
           <a:lstStyle/>
           <a:p>
-            <a:pPr indent="0" marL="0">
+            <a:pPr marL="0" indent="0">
               <a:buNone/>
             </a:pPr>
             <a:r>
@@ -7988,7 +8331,7 @@
           <a:bodyPr wrap="square" lIns="0" tIns="0" rIns="0" bIns="0" rtlCol="0" anchor="ctr"/>
           <a:lstStyle/>
           <a:p>
-            <a:pPr indent="0" marL="0">
+            <a:pPr marL="0" indent="0">
               <a:buNone/>
             </a:pPr>
             <a:r>
@@ -8024,7 +8367,7 @@
           <a:bodyPr wrap="square" lIns="0" tIns="0" rIns="0" bIns="0" rtlCol="0" anchor="ctr"/>
           <a:lstStyle/>
           <a:p>
-            <a:pPr indent="0" marL="0">
+            <a:pPr marL="0" indent="0">
               <a:buNone/>
             </a:pPr>
             <a:r>
@@ -8065,13 +8408,20 @@
             <a:prstDash val="solid"/>
           </a:ln>
           <a:effectLst>
-            <a:outerShdw sx="100000" sy="100000" kx="0" ky="0" algn="bl" rotWithShape="0" blurRad="19050" dist="6350" dir="2700000">
+            <a:outerShdw blurRad="19050" dist="6350" dir="2700000" algn="bl" rotWithShape="0">
               <a:srgbClr val="000000">
                 <a:alpha val="14000"/>
               </a:srgbClr>
             </a:outerShdw>
           </a:effectLst>
         </p:spPr>
+        <p:txBody>
+          <a:bodyPr/>
+          <a:lstStyle/>
+          <a:p>
+            <a:endParaRPr lang="es-CO"/>
+          </a:p>
+        </p:txBody>
       </p:sp>
       <p:sp>
         <p:nvSpPr>
@@ -8097,6 +8447,13 @@
             <a:prstDash val="solid"/>
           </a:ln>
         </p:spPr>
+        <p:txBody>
+          <a:bodyPr/>
+          <a:lstStyle/>
+          <a:p>
+            <a:endParaRPr lang="es-CO"/>
+          </a:p>
+        </p:txBody>
       </p:sp>
       <p:sp>
         <p:nvSpPr>
@@ -8119,7 +8476,7 @@
           <a:bodyPr wrap="square" lIns="0" tIns="0" rIns="0" bIns="0" rtlCol="0" anchor="ctr"/>
           <a:lstStyle/>
           <a:p>
-            <a:pPr indent="0" marL="0">
+            <a:pPr marL="0" indent="0">
               <a:buNone/>
             </a:pPr>
             <a:r>
@@ -8158,7 +8515,7 @@
           <a:bodyPr wrap="square" lIns="0" tIns="0" rIns="0" bIns="0" rtlCol="0" anchor="ctr"/>
           <a:lstStyle/>
           <a:p>
-            <a:pPr indent="0" marL="0">
+            <a:pPr marL="0" indent="0">
               <a:buNone/>
             </a:pPr>
             <a:r>
@@ -8197,7 +8554,7 @@
           <a:bodyPr wrap="square" lIns="0" tIns="0" rIns="0" bIns="0" rtlCol="0" anchor="t"/>
           <a:lstStyle/>
           <a:p>
-            <a:pPr indent="0" marL="0">
+            <a:pPr marL="0" indent="0">
               <a:buNone/>
             </a:pPr>
             <a:r>
@@ -8241,13 +8598,20 @@
             <a:prstDash val="solid"/>
           </a:ln>
           <a:effectLst>
-            <a:outerShdw sx="100000" sy="100000" kx="0" ky="0" algn="bl" rotWithShape="0" blurRad="19050" dist="6350" dir="2700000">
+            <a:outerShdw blurRad="19050" dist="6350" dir="2700000" algn="bl" rotWithShape="0">
               <a:srgbClr val="000000">
                 <a:alpha val="14000"/>
               </a:srgbClr>
             </a:outerShdw>
           </a:effectLst>
         </p:spPr>
+        <p:txBody>
+          <a:bodyPr/>
+          <a:lstStyle/>
+          <a:p>
+            <a:endParaRPr lang="es-CO"/>
+          </a:p>
+        </p:txBody>
       </p:sp>
       <p:sp>
         <p:nvSpPr>
@@ -8273,6 +8637,13 @@
             <a:prstDash val="solid"/>
           </a:ln>
         </p:spPr>
+        <p:txBody>
+          <a:bodyPr/>
+          <a:lstStyle/>
+          <a:p>
+            <a:endParaRPr lang="es-CO"/>
+          </a:p>
+        </p:txBody>
       </p:sp>
       <p:sp>
         <p:nvSpPr>
@@ -8295,7 +8666,7 @@
           <a:bodyPr wrap="square" lIns="0" tIns="0" rIns="0" bIns="0" rtlCol="0" anchor="ctr"/>
           <a:lstStyle/>
           <a:p>
-            <a:pPr indent="0" marL="0">
+            <a:pPr marL="0" indent="0">
               <a:buNone/>
             </a:pPr>
             <a:r>
@@ -8334,7 +8705,7 @@
           <a:bodyPr wrap="square" lIns="0" tIns="0" rIns="0" bIns="0" rtlCol="0" anchor="ctr"/>
           <a:lstStyle/>
           <a:p>
-            <a:pPr indent="0" marL="0">
+            <a:pPr marL="0" indent="0">
               <a:buNone/>
             </a:pPr>
             <a:r>
@@ -8373,7 +8744,7 @@
           <a:bodyPr wrap="square" lIns="0" tIns="0" rIns="0" bIns="0" rtlCol="0" anchor="t"/>
           <a:lstStyle/>
           <a:p>
-            <a:pPr indent="0" marL="0">
+            <a:pPr marL="0" indent="0">
               <a:buNone/>
             </a:pPr>
             <a:r>
@@ -8412,7 +8783,7 @@
           <a:bodyPr wrap="square" lIns="0" tIns="0" rIns="0" bIns="0" rtlCol="0" anchor="ctr"/>
           <a:lstStyle/>
           <a:p>
-            <a:pPr indent="0" marL="0">
+            <a:pPr marL="0" indent="0">
               <a:buNone/>
             </a:pPr>
             <a:r>
@@ -8448,7 +8819,7 @@
           <a:bodyPr wrap="square" rtlCol="0" anchor="ctr"/>
           <a:lstStyle/>
           <a:p>
-            <a:pPr algn="r" indent="0" marL="0">
+            <a:pPr marL="0" indent="0" algn="r">
               <a:buNone/>
             </a:pPr>
             <a:r>
@@ -8463,6 +8834,243 @@
               <a:t>5</a:t>
             </a:r>
             <a:endParaRPr lang="en-US" sz="1000" dirty="0"/>
+          </a:p>
+        </p:txBody>
+      </p:sp>
+      <p:sp>
+        <p:nvSpPr>
+          <p:cNvPr id="53" name="Shape 33">
+            <a:extLst>
+              <a:ext uri="{FF2B5EF4-FFF2-40B4-BE49-F238E27FC236}">
+                <a16:creationId xmlns:a16="http://schemas.microsoft.com/office/drawing/2014/main" id="{4DB11A83-45F9-B8FD-F275-59FE5790630F}"/>
+              </a:ext>
+            </a:extLst>
+          </p:cNvPr>
+          <p:cNvSpPr/>
+          <p:nvPr/>
+        </p:nvSpPr>
+        <p:spPr>
+          <a:xfrm>
+            <a:off x="880872" y="5004816"/>
+            <a:ext cx="6858000" cy="0"/>
+          </a:xfrm>
+          <a:prstGeom prst="line">
+            <a:avLst/>
+          </a:prstGeom>
+          <a:noFill/>
+          <a:ln w="12700">
+            <a:solidFill>
+              <a:srgbClr val="243046"/>
+            </a:solidFill>
+            <a:prstDash val="solid"/>
+          </a:ln>
+        </p:spPr>
+        <p:txBody>
+          <a:bodyPr/>
+          <a:lstStyle/>
+          <a:p>
+            <a:endParaRPr lang="es-CO"/>
+          </a:p>
+        </p:txBody>
+      </p:sp>
+      <p:sp>
+        <p:nvSpPr>
+          <p:cNvPr id="55" name="Shape 33">
+            <a:extLst>
+              <a:ext uri="{FF2B5EF4-FFF2-40B4-BE49-F238E27FC236}">
+                <a16:creationId xmlns:a16="http://schemas.microsoft.com/office/drawing/2014/main" id="{82B386E2-532B-E15A-5A43-A9ACB7870582}"/>
+              </a:ext>
+            </a:extLst>
+          </p:cNvPr>
+          <p:cNvSpPr/>
+          <p:nvPr/>
+        </p:nvSpPr>
+        <p:spPr>
+          <a:xfrm>
+            <a:off x="886968" y="5004816"/>
+            <a:ext cx="6858000" cy="0"/>
+          </a:xfrm>
+          <a:prstGeom prst="line">
+            <a:avLst/>
+          </a:prstGeom>
+          <a:noFill/>
+          <a:ln w="12700">
+            <a:solidFill>
+              <a:srgbClr val="243046"/>
+            </a:solidFill>
+            <a:prstDash val="solid"/>
+          </a:ln>
+        </p:spPr>
+        <p:txBody>
+          <a:bodyPr/>
+          <a:lstStyle/>
+          <a:p>
+            <a:endParaRPr lang="es-CO"/>
+          </a:p>
+        </p:txBody>
+      </p:sp>
+      <p:sp>
+        <p:nvSpPr>
+          <p:cNvPr id="56" name="Text 34">
+            <a:extLst>
+              <a:ext uri="{FF2B5EF4-FFF2-40B4-BE49-F238E27FC236}">
+                <a16:creationId xmlns:a16="http://schemas.microsoft.com/office/drawing/2014/main" id="{CED9165F-C237-7682-00E8-E08FA8BF88A7}"/>
+              </a:ext>
+            </a:extLst>
+          </p:cNvPr>
+          <p:cNvSpPr/>
+          <p:nvPr/>
+        </p:nvSpPr>
+        <p:spPr>
+          <a:xfrm>
+            <a:off x="932688" y="5077968"/>
+            <a:ext cx="2743200" cy="201168"/>
+          </a:xfrm>
+          <a:prstGeom prst="rect">
+            <a:avLst/>
+          </a:prstGeom>
+          <a:noFill/>
+          <a:ln/>
+        </p:spPr>
+        <p:txBody>
+          <a:bodyPr wrap="square" lIns="0" tIns="0" rIns="0" bIns="0" rtlCol="0" anchor="ctr"/>
+          <a:lstStyle/>
+          <a:p>
+            <a:r>
+              <a:rPr lang="en-US" sz="1320" dirty="0" err="1">
+                <a:solidFill>
+                  <a:srgbClr val="EAF0FF"/>
+                </a:solidFill>
+              </a:rPr>
+              <a:t>ms-reportes</a:t>
+            </a:r>
+            <a:endParaRPr lang="en-US" sz="1320" dirty="0"/>
+          </a:p>
+        </p:txBody>
+      </p:sp>
+      <p:sp>
+        <p:nvSpPr>
+          <p:cNvPr id="57" name="Text 35">
+            <a:extLst>
+              <a:ext uri="{FF2B5EF4-FFF2-40B4-BE49-F238E27FC236}">
+                <a16:creationId xmlns:a16="http://schemas.microsoft.com/office/drawing/2014/main" id="{FCF0F952-F454-F34D-7B10-3203ACCC19F3}"/>
+              </a:ext>
+            </a:extLst>
+          </p:cNvPr>
+          <p:cNvSpPr/>
+          <p:nvPr/>
+        </p:nvSpPr>
+        <p:spPr>
+          <a:xfrm>
+            <a:off x="3767328" y="5077968"/>
+            <a:ext cx="822960" cy="201168"/>
+          </a:xfrm>
+          <a:prstGeom prst="rect">
+            <a:avLst/>
+          </a:prstGeom>
+          <a:noFill/>
+          <a:ln/>
+        </p:spPr>
+        <p:txBody>
+          <a:bodyPr wrap="square" lIns="0" tIns="0" rIns="0" bIns="0" rtlCol="0" anchor="ctr"/>
+          <a:lstStyle/>
+          <a:p>
+            <a:pPr marL="0" indent="0">
+              <a:buNone/>
+            </a:pPr>
+            <a:r>
+              <a:rPr lang="en-US" sz="1320" b="1" dirty="0">
+                <a:solidFill>
+                  <a:srgbClr val="D8E2F0"/>
+                </a:solidFill>
+              </a:rPr>
+              <a:t>8006</a:t>
+            </a:r>
+            <a:endParaRPr lang="en-US" sz="1320" dirty="0"/>
+          </a:p>
+        </p:txBody>
+      </p:sp>
+      <p:sp>
+        <p:nvSpPr>
+          <p:cNvPr id="58" name="Text 36">
+            <a:extLst>
+              <a:ext uri="{FF2B5EF4-FFF2-40B4-BE49-F238E27FC236}">
+                <a16:creationId xmlns:a16="http://schemas.microsoft.com/office/drawing/2014/main" id="{8D1E7D7E-B5E5-0299-EDB0-A7965633F7F2}"/>
+              </a:ext>
+            </a:extLst>
+          </p:cNvPr>
+          <p:cNvSpPr/>
+          <p:nvPr/>
+        </p:nvSpPr>
+        <p:spPr>
+          <a:xfrm>
+            <a:off x="4773168" y="5077968"/>
+            <a:ext cx="1097280" cy="201168"/>
+          </a:xfrm>
+          <a:prstGeom prst="rect">
+            <a:avLst/>
+          </a:prstGeom>
+          <a:noFill/>
+          <a:ln/>
+        </p:spPr>
+        <p:txBody>
+          <a:bodyPr wrap="square" lIns="0" tIns="0" rIns="0" bIns="0" rtlCol="0" anchor="ctr"/>
+          <a:lstStyle/>
+          <a:p>
+            <a:pPr marL="0" indent="0">
+              <a:buNone/>
+            </a:pPr>
+            <a:r>
+              <a:rPr lang="en-US" sz="1320" dirty="0" err="1">
+                <a:solidFill>
+                  <a:srgbClr val="D8E2F0"/>
+                </a:solidFill>
+              </a:rPr>
+              <a:t>reportes_db</a:t>
+            </a:r>
+            <a:endParaRPr lang="en-US" sz="1320" dirty="0"/>
+          </a:p>
+        </p:txBody>
+      </p:sp>
+      <p:sp>
+        <p:nvSpPr>
+          <p:cNvPr id="60" name="Text 38">
+            <a:extLst>
+              <a:ext uri="{FF2B5EF4-FFF2-40B4-BE49-F238E27FC236}">
+                <a16:creationId xmlns:a16="http://schemas.microsoft.com/office/drawing/2014/main" id="{B0506EC8-2F52-92B0-30D7-FDDE8DA3E291}"/>
+              </a:ext>
+            </a:extLst>
+          </p:cNvPr>
+          <p:cNvSpPr/>
+          <p:nvPr/>
+        </p:nvSpPr>
+        <p:spPr>
+          <a:xfrm>
+            <a:off x="6922008" y="5077968"/>
+            <a:ext cx="822960" cy="201168"/>
+          </a:xfrm>
+          <a:prstGeom prst="rect">
+            <a:avLst/>
+          </a:prstGeom>
+          <a:noFill/>
+          <a:ln/>
+        </p:spPr>
+        <p:txBody>
+          <a:bodyPr wrap="square" lIns="0" tIns="0" rIns="0" bIns="0" rtlCol="0" anchor="ctr"/>
+          <a:lstStyle/>
+          <a:p>
+            <a:pPr marL="0" indent="0">
+              <a:buNone/>
+            </a:pPr>
+            <a:r>
+              <a:rPr lang="en-US" sz="1320" dirty="0" err="1">
+                <a:solidFill>
+                  <a:srgbClr val="D8E2F0"/>
+                </a:solidFill>
+              </a:rPr>
+              <a:t>reportes</a:t>
+            </a:r>
+            <a:endParaRPr lang="en-US" sz="1320" dirty="0"/>
           </a:p>
         </p:txBody>
       </p:sp>
@@ -8493,255 +9101,19 @@
       </p:grpSpPr>
       <p:sp>
         <p:nvSpPr>
-          <p:cNvPr id="2" name="Text 0"/>
-          <p:cNvSpPr/>
-          <p:nvPr/>
-        </p:nvSpPr>
-        <p:spPr>
-          <a:xfrm>
-            <a:off x="640080" y="411480"/>
-            <a:ext cx="3840480" cy="228600"/>
-          </a:xfrm>
-          <a:prstGeom prst="rect">
-            <a:avLst/>
-          </a:prstGeom>
-          <a:noFill/>
-          <a:ln/>
-        </p:spPr>
-        <p:txBody>
-          <a:bodyPr wrap="square" rtlCol="0" anchor="ctr"/>
-          <a:lstStyle/>
-          <a:p>
-            <a:pPr indent="0" marL="0">
-              <a:buNone/>
-            </a:pPr>
-            <a:r>
-              <a:rPr lang="en-US" sz="1100" b="1" dirty="0">
-                <a:solidFill>
-                  <a:srgbClr val="F5A623"/>
-                </a:solidFill>
-                <a:latin typeface="Aptos" pitchFamily="34" charset="0"/>
-                <a:ea typeface="Aptos" pitchFamily="34" charset="-122"/>
-                <a:cs typeface="Aptos" pitchFamily="34" charset="-120"/>
-              </a:rPr>
-              <a:t>05 · FLUJO</a:t>
-            </a:r>
-            <a:endParaRPr lang="en-US" sz="1100" dirty="0"/>
-          </a:p>
-        </p:txBody>
-      </p:sp>
-      <p:sp>
-        <p:nvSpPr>
-          <p:cNvPr id="3" name="Text 1"/>
-          <p:cNvSpPr/>
-          <p:nvPr/>
-        </p:nvSpPr>
-        <p:spPr>
-          <a:xfrm>
-            <a:off x="640080" y="713232"/>
-            <a:ext cx="8046720" cy="713232"/>
-          </a:xfrm>
-          <a:prstGeom prst="rect">
-            <a:avLst/>
-          </a:prstGeom>
-          <a:noFill/>
-          <a:ln/>
-        </p:spPr>
-        <p:txBody>
-          <a:bodyPr wrap="square" lIns="0" tIns="0" rIns="0" bIns="0" rtlCol="0" anchor="ctr"/>
-          <a:lstStyle/>
-          <a:p>
-            <a:pPr indent="0" marL="0">
-              <a:buNone/>
-            </a:pPr>
-            <a:r>
-              <a:rPr lang="en-US" sz="2800" b="1" dirty="0">
-                <a:solidFill>
-                  <a:srgbClr val="EAF0FF"/>
-                </a:solidFill>
-                <a:latin typeface="Aptos Display" pitchFamily="34" charset="0"/>
-                <a:ea typeface="Aptos Display" pitchFamily="34" charset="-122"/>
-                <a:cs typeface="Aptos Display" pitchFamily="34" charset="-120"/>
-              </a:rPr>
-              <a:t>Creación y ciclo de vida del comparendo</a:t>
-            </a:r>
-            <a:endParaRPr lang="en-US" sz="2800" dirty="0"/>
-          </a:p>
-        </p:txBody>
-      </p:sp>
-      <p:sp>
-        <p:nvSpPr>
-          <p:cNvPr id="4" name="Text 2"/>
-          <p:cNvSpPr/>
-          <p:nvPr/>
-        </p:nvSpPr>
-        <p:spPr>
-          <a:xfrm>
-            <a:off x="640080" y="1481328"/>
-            <a:ext cx="9875520" cy="384048"/>
-          </a:xfrm>
-          <a:prstGeom prst="rect">
-            <a:avLst/>
-          </a:prstGeom>
-          <a:noFill/>
-          <a:ln/>
-        </p:spPr>
-        <p:txBody>
-          <a:bodyPr wrap="square" lIns="0" tIns="0" rIns="0" bIns="0" rtlCol="0" anchor="ctr"/>
-          <a:lstStyle/>
-          <a:p>
-            <a:pPr indent="0" marL="0">
-              <a:buNone/>
-            </a:pPr>
-            <a:r>
-              <a:rPr lang="en-US" sz="1450" dirty="0">
-                <a:solidFill>
-                  <a:srgbClr val="A7B0C2"/>
-                </a:solidFill>
-                <a:latin typeface="Aptos" pitchFamily="34" charset="0"/>
-                <a:ea typeface="Aptos" pitchFamily="34" charset="-122"/>
-                <a:cs typeface="Aptos" pitchFamily="34" charset="-120"/>
-              </a:rPr>
-              <a:t>El valor del sistema está en orquestar validaciones externas y mantener una máquina de estados controlada.</a:t>
-            </a:r>
-            <a:endParaRPr lang="en-US" sz="1450" dirty="0"/>
-          </a:p>
-        </p:txBody>
-      </p:sp>
-      <p:sp>
-        <p:nvSpPr>
-          <p:cNvPr id="5" name="Shape 3"/>
-          <p:cNvSpPr/>
-          <p:nvPr/>
-        </p:nvSpPr>
-        <p:spPr>
-          <a:xfrm>
-            <a:off x="1901952" y="2697480"/>
-            <a:ext cx="256032" cy="201168"/>
-          </a:xfrm>
-          <a:prstGeom prst="chevron">
-            <a:avLst/>
-          </a:prstGeom>
-          <a:solidFill>
-            <a:srgbClr val="2A3346"/>
-          </a:solidFill>
-          <a:ln w="12700">
-            <a:solidFill>
-              <a:srgbClr val="2A3346"/>
-            </a:solidFill>
-            <a:prstDash val="solid"/>
-          </a:ln>
-        </p:spPr>
-      </p:sp>
-      <p:sp>
-        <p:nvSpPr>
-          <p:cNvPr id="6" name="Shape 4"/>
-          <p:cNvSpPr/>
-          <p:nvPr/>
-        </p:nvSpPr>
-        <p:spPr>
-          <a:xfrm>
-            <a:off x="3410712" y="2697480"/>
-            <a:ext cx="256032" cy="201168"/>
-          </a:xfrm>
-          <a:prstGeom prst="chevron">
-            <a:avLst/>
-          </a:prstGeom>
-          <a:solidFill>
-            <a:srgbClr val="2A3346"/>
-          </a:solidFill>
-          <a:ln w="12700">
-            <a:solidFill>
-              <a:srgbClr val="2A3346"/>
-            </a:solidFill>
-            <a:prstDash val="solid"/>
-          </a:ln>
-        </p:spPr>
-      </p:sp>
-      <p:sp>
-        <p:nvSpPr>
-          <p:cNvPr id="7" name="Shape 5"/>
-          <p:cNvSpPr/>
-          <p:nvPr/>
-        </p:nvSpPr>
-        <p:spPr>
-          <a:xfrm>
-            <a:off x="4919472" y="2697480"/>
-            <a:ext cx="256032" cy="201168"/>
-          </a:xfrm>
-          <a:prstGeom prst="chevron">
-            <a:avLst/>
-          </a:prstGeom>
-          <a:solidFill>
-            <a:srgbClr val="2A3346"/>
-          </a:solidFill>
-          <a:ln w="12700">
-            <a:solidFill>
-              <a:srgbClr val="2A3346"/>
-            </a:solidFill>
-            <a:prstDash val="solid"/>
-          </a:ln>
-        </p:spPr>
-      </p:sp>
-      <p:sp>
-        <p:nvSpPr>
-          <p:cNvPr id="8" name="Shape 6"/>
-          <p:cNvSpPr/>
-          <p:nvPr/>
-        </p:nvSpPr>
-        <p:spPr>
-          <a:xfrm>
-            <a:off x="6428232" y="2697480"/>
-            <a:ext cx="256032" cy="201168"/>
-          </a:xfrm>
-          <a:prstGeom prst="chevron">
-            <a:avLst/>
-          </a:prstGeom>
-          <a:solidFill>
-            <a:srgbClr val="2A3346"/>
-          </a:solidFill>
-          <a:ln w="12700">
-            <a:solidFill>
-              <a:srgbClr val="2A3346"/>
-            </a:solidFill>
-            <a:prstDash val="solid"/>
-          </a:ln>
-        </p:spPr>
-      </p:sp>
-      <p:sp>
-        <p:nvSpPr>
-          <p:cNvPr id="9" name="Shape 7"/>
-          <p:cNvSpPr/>
-          <p:nvPr/>
-        </p:nvSpPr>
-        <p:spPr>
-          <a:xfrm>
-            <a:off x="7936992" y="2697480"/>
-            <a:ext cx="256032" cy="201168"/>
-          </a:xfrm>
-          <a:prstGeom prst="chevron">
-            <a:avLst/>
-          </a:prstGeom>
-          <a:solidFill>
-            <a:srgbClr val="2A3346"/>
-          </a:solidFill>
-          <a:ln w="12700">
-            <a:solidFill>
-              <a:srgbClr val="2A3346"/>
-            </a:solidFill>
-            <a:prstDash val="solid"/>
-          </a:ln>
-        </p:spPr>
-      </p:sp>
-      <p:sp>
-        <p:nvSpPr>
-          <p:cNvPr id="10" name="Shape 8"/>
-          <p:cNvSpPr/>
-          <p:nvPr/>
-        </p:nvSpPr>
-        <p:spPr>
-          <a:xfrm>
-            <a:off x="731520" y="2240280"/>
+          <p:cNvPr id="59" name="Shape 33">
+            <a:extLst>
+              <a:ext uri="{FF2B5EF4-FFF2-40B4-BE49-F238E27FC236}">
+                <a16:creationId xmlns:a16="http://schemas.microsoft.com/office/drawing/2014/main" id="{2A3A42CA-12EC-CF8F-3A67-7A3F042D927A}"/>
+              </a:ext>
+            </a:extLst>
+          </p:cNvPr>
+          <p:cNvSpPr/>
+          <p:nvPr/>
+        </p:nvSpPr>
+        <p:spPr>
+          <a:xfrm>
+            <a:off x="9739376" y="2274824"/>
             <a:ext cx="1143000" cy="1097280"/>
           </a:xfrm>
           <a:prstGeom prst="roundRect">
@@ -8759,13 +9131,338 @@
             <a:prstDash val="solid"/>
           </a:ln>
           <a:effectLst>
-            <a:outerShdw sx="100000" sy="100000" kx="0" ky="0" algn="bl" rotWithShape="0" blurRad="19050" dist="6350" dir="2700000">
+            <a:outerShdw blurRad="19050" dist="6350" dir="2700000" algn="bl" rotWithShape="0">
               <a:srgbClr val="000000">
                 <a:alpha val="14000"/>
               </a:srgbClr>
             </a:outerShdw>
           </a:effectLst>
         </p:spPr>
+        <p:txBody>
+          <a:bodyPr/>
+          <a:lstStyle/>
+          <a:p>
+            <a:endParaRPr lang="es-MX" noProof="0" dirty="0"/>
+          </a:p>
+        </p:txBody>
+      </p:sp>
+      <p:sp>
+        <p:nvSpPr>
+          <p:cNvPr id="2" name="Text 0"/>
+          <p:cNvSpPr/>
+          <p:nvPr/>
+        </p:nvSpPr>
+        <p:spPr>
+          <a:xfrm>
+            <a:off x="640080" y="411480"/>
+            <a:ext cx="3840480" cy="228600"/>
+          </a:xfrm>
+          <a:prstGeom prst="rect">
+            <a:avLst/>
+          </a:prstGeom>
+          <a:noFill/>
+          <a:ln/>
+        </p:spPr>
+        <p:txBody>
+          <a:bodyPr wrap="square" rtlCol="0" anchor="ctr"/>
+          <a:lstStyle/>
+          <a:p>
+            <a:pPr marL="0" indent="0">
+              <a:buNone/>
+            </a:pPr>
+            <a:r>
+              <a:rPr lang="es-MX" sz="1100" b="1" dirty="0">
+                <a:solidFill>
+                  <a:srgbClr val="F5A623"/>
+                </a:solidFill>
+                <a:latin typeface="Aptos" pitchFamily="34" charset="0"/>
+                <a:ea typeface="Aptos" pitchFamily="34" charset="-122"/>
+                <a:cs typeface="Aptos" pitchFamily="34" charset="-120"/>
+              </a:rPr>
+              <a:t>CRUDS</a:t>
+            </a:r>
+            <a:endParaRPr lang="es-MX" sz="1100" noProof="0" dirty="0"/>
+          </a:p>
+        </p:txBody>
+      </p:sp>
+      <p:sp>
+        <p:nvSpPr>
+          <p:cNvPr id="3" name="Text 1"/>
+          <p:cNvSpPr/>
+          <p:nvPr/>
+        </p:nvSpPr>
+        <p:spPr>
+          <a:xfrm>
+            <a:off x="640080" y="713232"/>
+            <a:ext cx="8046720" cy="713232"/>
+          </a:xfrm>
+          <a:prstGeom prst="rect">
+            <a:avLst/>
+          </a:prstGeom>
+          <a:noFill/>
+          <a:ln/>
+        </p:spPr>
+        <p:txBody>
+          <a:bodyPr wrap="square" lIns="0" tIns="0" rIns="0" bIns="0" rtlCol="0" anchor="ctr"/>
+          <a:lstStyle/>
+          <a:p>
+            <a:pPr marL="0" indent="0">
+              <a:buNone/>
+            </a:pPr>
+            <a:r>
+              <a:rPr lang="es-MX" sz="2800" b="1" noProof="0" dirty="0">
+                <a:solidFill>
+                  <a:srgbClr val="EAF0FF"/>
+                </a:solidFill>
+                <a:latin typeface="Aptos Display" pitchFamily="34" charset="0"/>
+                <a:ea typeface="Aptos Display" pitchFamily="34" charset="-122"/>
+                <a:cs typeface="Aptos Display" pitchFamily="34" charset="-120"/>
+              </a:rPr>
+              <a:t>Creación y ciclo de vida del comparendo</a:t>
+            </a:r>
+            <a:endParaRPr lang="es-MX" sz="2800" noProof="0" dirty="0"/>
+          </a:p>
+        </p:txBody>
+      </p:sp>
+      <p:sp>
+        <p:nvSpPr>
+          <p:cNvPr id="4" name="Text 2"/>
+          <p:cNvSpPr/>
+          <p:nvPr/>
+        </p:nvSpPr>
+        <p:spPr>
+          <a:xfrm>
+            <a:off x="640080" y="1481328"/>
+            <a:ext cx="9875520" cy="384048"/>
+          </a:xfrm>
+          <a:prstGeom prst="rect">
+            <a:avLst/>
+          </a:prstGeom>
+          <a:noFill/>
+          <a:ln/>
+        </p:spPr>
+        <p:txBody>
+          <a:bodyPr wrap="square" lIns="0" tIns="0" rIns="0" bIns="0" rtlCol="0" anchor="ctr"/>
+          <a:lstStyle/>
+          <a:p>
+            <a:pPr marL="0" indent="0">
+              <a:buNone/>
+            </a:pPr>
+            <a:r>
+              <a:rPr lang="es-MX" sz="1450" noProof="0" dirty="0">
+                <a:solidFill>
+                  <a:srgbClr val="A7B0C2"/>
+                </a:solidFill>
+                <a:latin typeface="Aptos" pitchFamily="34" charset="0"/>
+                <a:ea typeface="Aptos" pitchFamily="34" charset="-122"/>
+                <a:cs typeface="Aptos" pitchFamily="34" charset="-120"/>
+              </a:rPr>
+              <a:t>El valor del sistema está en orquestar validaciones externas y mantener una máquina de estados controlada.</a:t>
+            </a:r>
+            <a:endParaRPr lang="es-MX" sz="1450" noProof="0" dirty="0"/>
+          </a:p>
+        </p:txBody>
+      </p:sp>
+      <p:sp>
+        <p:nvSpPr>
+          <p:cNvPr id="5" name="Shape 3"/>
+          <p:cNvSpPr/>
+          <p:nvPr/>
+        </p:nvSpPr>
+        <p:spPr>
+          <a:xfrm>
+            <a:off x="1901952" y="2697480"/>
+            <a:ext cx="256032" cy="201168"/>
+          </a:xfrm>
+          <a:prstGeom prst="chevron">
+            <a:avLst/>
+          </a:prstGeom>
+          <a:solidFill>
+            <a:srgbClr val="2A3346"/>
+          </a:solidFill>
+          <a:ln w="12700">
+            <a:solidFill>
+              <a:srgbClr val="2A3346"/>
+            </a:solidFill>
+            <a:prstDash val="solid"/>
+          </a:ln>
+        </p:spPr>
+        <p:txBody>
+          <a:bodyPr/>
+          <a:lstStyle/>
+          <a:p>
+            <a:endParaRPr lang="es-MX" noProof="0" dirty="0"/>
+          </a:p>
+        </p:txBody>
+      </p:sp>
+      <p:sp>
+        <p:nvSpPr>
+          <p:cNvPr id="6" name="Shape 4"/>
+          <p:cNvSpPr/>
+          <p:nvPr/>
+        </p:nvSpPr>
+        <p:spPr>
+          <a:xfrm>
+            <a:off x="3410712" y="2697480"/>
+            <a:ext cx="256032" cy="201168"/>
+          </a:xfrm>
+          <a:prstGeom prst="chevron">
+            <a:avLst/>
+          </a:prstGeom>
+          <a:solidFill>
+            <a:srgbClr val="2A3346"/>
+          </a:solidFill>
+          <a:ln w="12700">
+            <a:solidFill>
+              <a:srgbClr val="2A3346"/>
+            </a:solidFill>
+            <a:prstDash val="solid"/>
+          </a:ln>
+        </p:spPr>
+        <p:txBody>
+          <a:bodyPr/>
+          <a:lstStyle/>
+          <a:p>
+            <a:endParaRPr lang="es-MX" noProof="0" dirty="0"/>
+          </a:p>
+        </p:txBody>
+      </p:sp>
+      <p:sp>
+        <p:nvSpPr>
+          <p:cNvPr id="7" name="Shape 5"/>
+          <p:cNvSpPr/>
+          <p:nvPr/>
+        </p:nvSpPr>
+        <p:spPr>
+          <a:xfrm>
+            <a:off x="4919472" y="2697480"/>
+            <a:ext cx="256032" cy="201168"/>
+          </a:xfrm>
+          <a:prstGeom prst="chevron">
+            <a:avLst/>
+          </a:prstGeom>
+          <a:solidFill>
+            <a:srgbClr val="2A3346"/>
+          </a:solidFill>
+          <a:ln w="12700">
+            <a:solidFill>
+              <a:srgbClr val="2A3346"/>
+            </a:solidFill>
+            <a:prstDash val="solid"/>
+          </a:ln>
+        </p:spPr>
+        <p:txBody>
+          <a:bodyPr/>
+          <a:lstStyle/>
+          <a:p>
+            <a:endParaRPr lang="es-MX" noProof="0" dirty="0"/>
+          </a:p>
+        </p:txBody>
+      </p:sp>
+      <p:sp>
+        <p:nvSpPr>
+          <p:cNvPr id="8" name="Shape 6"/>
+          <p:cNvSpPr/>
+          <p:nvPr/>
+        </p:nvSpPr>
+        <p:spPr>
+          <a:xfrm>
+            <a:off x="6428232" y="2697480"/>
+            <a:ext cx="256032" cy="201168"/>
+          </a:xfrm>
+          <a:prstGeom prst="chevron">
+            <a:avLst/>
+          </a:prstGeom>
+          <a:solidFill>
+            <a:srgbClr val="2A3346"/>
+          </a:solidFill>
+          <a:ln w="12700">
+            <a:solidFill>
+              <a:srgbClr val="2A3346"/>
+            </a:solidFill>
+            <a:prstDash val="solid"/>
+          </a:ln>
+        </p:spPr>
+        <p:txBody>
+          <a:bodyPr/>
+          <a:lstStyle/>
+          <a:p>
+            <a:endParaRPr lang="es-MX" noProof="0" dirty="0"/>
+          </a:p>
+        </p:txBody>
+      </p:sp>
+      <p:sp>
+        <p:nvSpPr>
+          <p:cNvPr id="9" name="Shape 7"/>
+          <p:cNvSpPr/>
+          <p:nvPr/>
+        </p:nvSpPr>
+        <p:spPr>
+          <a:xfrm>
+            <a:off x="7936992" y="2697480"/>
+            <a:ext cx="256032" cy="201168"/>
+          </a:xfrm>
+          <a:prstGeom prst="chevron">
+            <a:avLst/>
+          </a:prstGeom>
+          <a:solidFill>
+            <a:srgbClr val="2A3346"/>
+          </a:solidFill>
+          <a:ln w="12700">
+            <a:solidFill>
+              <a:srgbClr val="2A3346"/>
+            </a:solidFill>
+            <a:prstDash val="solid"/>
+          </a:ln>
+        </p:spPr>
+        <p:txBody>
+          <a:bodyPr/>
+          <a:lstStyle/>
+          <a:p>
+            <a:endParaRPr lang="es-MX" noProof="0" dirty="0"/>
+          </a:p>
+        </p:txBody>
+      </p:sp>
+      <p:sp>
+        <p:nvSpPr>
+          <p:cNvPr id="10" name="Shape 8"/>
+          <p:cNvSpPr/>
+          <p:nvPr/>
+        </p:nvSpPr>
+        <p:spPr>
+          <a:xfrm>
+            <a:off x="731520" y="2240280"/>
+            <a:ext cx="1143000" cy="1097280"/>
+          </a:xfrm>
+          <a:prstGeom prst="roundRect">
+            <a:avLst>
+              <a:gd name="adj" fmla="val 6667"/>
+            </a:avLst>
+          </a:prstGeom>
+          <a:solidFill>
+            <a:srgbClr val="111827"/>
+          </a:solidFill>
+          <a:ln w="12700">
+            <a:solidFill>
+              <a:srgbClr val="2A3346"/>
+            </a:solidFill>
+            <a:prstDash val="solid"/>
+          </a:ln>
+          <a:effectLst>
+            <a:outerShdw blurRad="19050" dist="6350" dir="2700000" algn="bl" rotWithShape="0">
+              <a:srgbClr val="000000">
+                <a:alpha val="14000"/>
+              </a:srgbClr>
+            </a:outerShdw>
+          </a:effectLst>
+        </p:spPr>
+        <p:txBody>
+          <a:bodyPr/>
+          <a:lstStyle/>
+          <a:p>
+            <a:endParaRPr lang="es-MX" noProof="0" dirty="0"/>
+          </a:p>
+        </p:txBody>
       </p:sp>
       <p:sp>
         <p:nvSpPr>
@@ -8797,6 +9494,13 @@
             <a:prstDash val="solid"/>
           </a:ln>
         </p:spPr>
+        <p:txBody>
+          <a:bodyPr/>
+          <a:lstStyle/>
+          <a:p>
+            <a:endParaRPr lang="es-MX" noProof="0" dirty="0"/>
+          </a:p>
+        </p:txBody>
       </p:sp>
       <p:sp>
         <p:nvSpPr>
@@ -8819,11 +9523,11 @@
           <a:bodyPr wrap="square" lIns="0" tIns="0" rIns="0" bIns="0" rtlCol="0" anchor="ctr"/>
           <a:lstStyle/>
           <a:p>
-            <a:pPr algn="ctr" indent="0" marL="0">
-              <a:buNone/>
-            </a:pPr>
-            <a:r>
-              <a:rPr lang="en-US" sz="1000" b="1" dirty="0">
+            <a:pPr marL="0" indent="0" algn="ctr">
+              <a:buNone/>
+            </a:pPr>
+            <a:r>
+              <a:rPr lang="es-MX" sz="1000" b="1" noProof="0" dirty="0">
                 <a:solidFill>
                   <a:srgbClr val="F5A623"/>
                 </a:solidFill>
@@ -8833,7 +9537,7 @@
               </a:rPr>
               <a:t>1</a:t>
             </a:r>
-            <a:endParaRPr lang="en-US" sz="1000" dirty="0"/>
+            <a:endParaRPr lang="es-MX" sz="1000" noProof="0" dirty="0"/>
           </a:p>
         </p:txBody>
       </p:sp>
@@ -8858,18 +9562,18 @@
           <a:bodyPr wrap="square" lIns="0" tIns="0" rIns="0" bIns="0" rtlCol="0" anchor="ctr"/>
           <a:lstStyle/>
           <a:p>
-            <a:pPr algn="ctr" indent="0" marL="0">
-              <a:buNone/>
-            </a:pPr>
-            <a:r>
-              <a:rPr lang="en-US" sz="1240" b="1" dirty="0">
+            <a:pPr marL="0" indent="0" algn="ctr">
+              <a:buNone/>
+            </a:pPr>
+            <a:r>
+              <a:rPr lang="es-MX" sz="1240" b="1" noProof="0" dirty="0" err="1">
                 <a:solidFill>
                   <a:srgbClr val="EAF0FF"/>
                 </a:solidFill>
               </a:rPr>
               <a:t>Login</a:t>
             </a:r>
-            <a:endParaRPr lang="en-US" sz="1240" dirty="0"/>
+            <a:endParaRPr lang="es-MX" sz="1240" noProof="0" dirty="0"/>
           </a:p>
         </p:txBody>
       </p:sp>
@@ -8894,18 +9598,18 @@
           <a:bodyPr wrap="square" lIns="0" tIns="0" rIns="0" bIns="0" rtlCol="0" anchor="ctr"/>
           <a:lstStyle/>
           <a:p>
-            <a:pPr algn="ctr" indent="0" marL="0">
-              <a:buNone/>
-            </a:pPr>
-            <a:r>
-              <a:rPr lang="en-US" sz="950" dirty="0">
+            <a:pPr marL="0" indent="0" algn="ctr">
+              <a:buNone/>
+            </a:pPr>
+            <a:r>
+              <a:rPr lang="es-MX" sz="950" noProof="0" dirty="0">
                 <a:solidFill>
                   <a:srgbClr val="A7B0C2"/>
                 </a:solidFill>
               </a:rPr>
               <a:t>Usuario autenticado</a:t>
             </a:r>
-            <a:endParaRPr lang="en-US" sz="950" dirty="0"/>
+            <a:endParaRPr lang="es-MX" sz="950" noProof="0" dirty="0"/>
           </a:p>
         </p:txBody>
       </p:sp>
@@ -8935,13 +9639,20 @@
             <a:prstDash val="solid"/>
           </a:ln>
           <a:effectLst>
-            <a:outerShdw sx="100000" sy="100000" kx="0" ky="0" algn="bl" rotWithShape="0" blurRad="19050" dist="6350" dir="2700000">
+            <a:outerShdw blurRad="19050" dist="6350" dir="2700000" algn="bl" rotWithShape="0">
               <a:srgbClr val="000000">
                 <a:alpha val="14000"/>
               </a:srgbClr>
             </a:outerShdw>
           </a:effectLst>
         </p:spPr>
+        <p:txBody>
+          <a:bodyPr/>
+          <a:lstStyle/>
+          <a:p>
+            <a:endParaRPr lang="es-MX" noProof="0" dirty="0"/>
+          </a:p>
+        </p:txBody>
       </p:sp>
       <p:sp>
         <p:nvSpPr>
@@ -8973,6 +9684,13 @@
             <a:prstDash val="solid"/>
           </a:ln>
         </p:spPr>
+        <p:txBody>
+          <a:bodyPr/>
+          <a:lstStyle/>
+          <a:p>
+            <a:endParaRPr lang="es-MX" noProof="0" dirty="0"/>
+          </a:p>
+        </p:txBody>
       </p:sp>
       <p:sp>
         <p:nvSpPr>
@@ -8995,11 +9713,11 @@
           <a:bodyPr wrap="square" lIns="0" tIns="0" rIns="0" bIns="0" rtlCol="0" anchor="ctr"/>
           <a:lstStyle/>
           <a:p>
-            <a:pPr algn="ctr" indent="0" marL="0">
-              <a:buNone/>
-            </a:pPr>
-            <a:r>
-              <a:rPr lang="en-US" sz="1000" b="1" dirty="0">
+            <a:pPr marL="0" indent="0" algn="ctr">
+              <a:buNone/>
+            </a:pPr>
+            <a:r>
+              <a:rPr lang="es-MX" sz="1000" b="1" noProof="0" dirty="0">
                 <a:solidFill>
                   <a:srgbClr val="F5A623"/>
                 </a:solidFill>
@@ -9009,7 +9727,7 @@
               </a:rPr>
               <a:t>2</a:t>
             </a:r>
-            <a:endParaRPr lang="en-US" sz="1000" dirty="0"/>
+            <a:endParaRPr lang="es-MX" sz="1000" noProof="0" dirty="0"/>
           </a:p>
         </p:txBody>
       </p:sp>
@@ -9034,18 +9752,18 @@
           <a:bodyPr wrap="square" lIns="0" tIns="0" rIns="0" bIns="0" rtlCol="0" anchor="ctr"/>
           <a:lstStyle/>
           <a:p>
-            <a:pPr algn="ctr" indent="0" marL="0">
-              <a:buNone/>
-            </a:pPr>
-            <a:r>
-              <a:rPr lang="en-US" sz="1240" b="1" dirty="0">
+            <a:pPr marL="0" indent="0" algn="ctr">
+              <a:buNone/>
+            </a:pPr>
+            <a:r>
+              <a:rPr lang="es-MX" sz="1240" b="1" noProof="0" dirty="0">
                 <a:solidFill>
                   <a:srgbClr val="EAF0FF"/>
                 </a:solidFill>
               </a:rPr>
               <a:t>Persona</a:t>
             </a:r>
-            <a:endParaRPr lang="en-US" sz="1240" dirty="0"/>
+            <a:endParaRPr lang="es-MX" sz="1240" noProof="0" dirty="0"/>
           </a:p>
         </p:txBody>
       </p:sp>
@@ -9070,18 +9788,18 @@
           <a:bodyPr wrap="square" lIns="0" tIns="0" rIns="0" bIns="0" rtlCol="0" anchor="ctr"/>
           <a:lstStyle/>
           <a:p>
-            <a:pPr algn="ctr" indent="0" marL="0">
-              <a:buNone/>
-            </a:pPr>
-            <a:r>
-              <a:rPr lang="en-US" sz="950" dirty="0">
+            <a:pPr marL="0" indent="0" algn="ctr">
+              <a:buNone/>
+            </a:pPr>
+            <a:r>
+              <a:rPr lang="es-MX" sz="950" noProof="0" dirty="0">
                 <a:solidFill>
                   <a:srgbClr val="A7B0C2"/>
                 </a:solidFill>
               </a:rPr>
               <a:t>Consulta / registro</a:t>
             </a:r>
-            <a:endParaRPr lang="en-US" sz="950" dirty="0"/>
+            <a:endParaRPr lang="es-MX" sz="950" noProof="0" dirty="0"/>
           </a:p>
         </p:txBody>
       </p:sp>
@@ -9111,13 +9829,20 @@
             <a:prstDash val="solid"/>
           </a:ln>
           <a:effectLst>
-            <a:outerShdw sx="100000" sy="100000" kx="0" ky="0" algn="bl" rotWithShape="0" blurRad="19050" dist="6350" dir="2700000">
+            <a:outerShdw blurRad="19050" dist="6350" dir="2700000" algn="bl" rotWithShape="0">
               <a:srgbClr val="000000">
                 <a:alpha val="14000"/>
               </a:srgbClr>
             </a:outerShdw>
           </a:effectLst>
         </p:spPr>
+        <p:txBody>
+          <a:bodyPr/>
+          <a:lstStyle/>
+          <a:p>
+            <a:endParaRPr lang="es-MX" noProof="0" dirty="0"/>
+          </a:p>
+        </p:txBody>
       </p:sp>
       <p:sp>
         <p:nvSpPr>
@@ -9149,6 +9874,13 @@
             <a:prstDash val="solid"/>
           </a:ln>
         </p:spPr>
+        <p:txBody>
+          <a:bodyPr/>
+          <a:lstStyle/>
+          <a:p>
+            <a:endParaRPr lang="es-MX" noProof="0" dirty="0"/>
+          </a:p>
+        </p:txBody>
       </p:sp>
       <p:sp>
         <p:nvSpPr>
@@ -9171,11 +9903,11 @@
           <a:bodyPr wrap="square" lIns="0" tIns="0" rIns="0" bIns="0" rtlCol="0" anchor="ctr"/>
           <a:lstStyle/>
           <a:p>
-            <a:pPr algn="ctr" indent="0" marL="0">
-              <a:buNone/>
-            </a:pPr>
-            <a:r>
-              <a:rPr lang="en-US" sz="1000" b="1" dirty="0">
+            <a:pPr marL="0" indent="0" algn="ctr">
+              <a:buNone/>
+            </a:pPr>
+            <a:r>
+              <a:rPr lang="es-MX" sz="1000" b="1" noProof="0" dirty="0">
                 <a:solidFill>
                   <a:srgbClr val="F5A623"/>
                 </a:solidFill>
@@ -9185,7 +9917,7 @@
               </a:rPr>
               <a:t>3</a:t>
             </a:r>
-            <a:endParaRPr lang="en-US" sz="1000" dirty="0"/>
+            <a:endParaRPr lang="es-MX" sz="1000" noProof="0" dirty="0"/>
           </a:p>
         </p:txBody>
       </p:sp>
@@ -9210,18 +9942,18 @@
           <a:bodyPr wrap="square" lIns="0" tIns="0" rIns="0" bIns="0" rtlCol="0" anchor="ctr"/>
           <a:lstStyle/>
           <a:p>
-            <a:pPr algn="ctr" indent="0" marL="0">
-              <a:buNone/>
-            </a:pPr>
-            <a:r>
-              <a:rPr lang="en-US" sz="1240" b="1" dirty="0">
+            <a:pPr marL="0" indent="0" algn="ctr">
+              <a:buNone/>
+            </a:pPr>
+            <a:r>
+              <a:rPr lang="es-MX" sz="1240" b="1" noProof="0" dirty="0">
                 <a:solidFill>
                   <a:srgbClr val="EAF0FF"/>
                 </a:solidFill>
               </a:rPr>
               <a:t>Automotor</a:t>
             </a:r>
-            <a:endParaRPr lang="en-US" sz="1240" dirty="0"/>
+            <a:endParaRPr lang="es-MX" sz="1240" noProof="0" dirty="0"/>
           </a:p>
         </p:txBody>
       </p:sp>
@@ -9246,18 +9978,18 @@
           <a:bodyPr wrap="square" lIns="0" tIns="0" rIns="0" bIns="0" rtlCol="0" anchor="ctr"/>
           <a:lstStyle/>
           <a:p>
-            <a:pPr algn="ctr" indent="0" marL="0">
-              <a:buNone/>
-            </a:pPr>
-            <a:r>
-              <a:rPr lang="en-US" sz="950" dirty="0">
+            <a:pPr marL="0" indent="0" algn="ctr">
+              <a:buNone/>
+            </a:pPr>
+            <a:r>
+              <a:rPr lang="es-MX" sz="950" noProof="0" dirty="0">
                 <a:solidFill>
                   <a:srgbClr val="A7B0C2"/>
                 </a:solidFill>
               </a:rPr>
               <a:t>Selección por placa</a:t>
             </a:r>
-            <a:endParaRPr lang="en-US" sz="950" dirty="0"/>
+            <a:endParaRPr lang="es-MX" sz="950" noProof="0" dirty="0"/>
           </a:p>
         </p:txBody>
       </p:sp>
@@ -9287,13 +10019,20 @@
             <a:prstDash val="solid"/>
           </a:ln>
           <a:effectLst>
-            <a:outerShdw sx="100000" sy="100000" kx="0" ky="0" algn="bl" rotWithShape="0" blurRad="19050" dist="6350" dir="2700000">
+            <a:outerShdw blurRad="19050" dist="6350" dir="2700000" algn="bl" rotWithShape="0">
               <a:srgbClr val="000000">
                 <a:alpha val="14000"/>
               </a:srgbClr>
             </a:outerShdw>
           </a:effectLst>
         </p:spPr>
+        <p:txBody>
+          <a:bodyPr/>
+          <a:lstStyle/>
+          <a:p>
+            <a:endParaRPr lang="es-MX" noProof="0" dirty="0"/>
+          </a:p>
+        </p:txBody>
       </p:sp>
       <p:sp>
         <p:nvSpPr>
@@ -9325,6 +10064,13 @@
             <a:prstDash val="solid"/>
           </a:ln>
         </p:spPr>
+        <p:txBody>
+          <a:bodyPr/>
+          <a:lstStyle/>
+          <a:p>
+            <a:endParaRPr lang="es-MX" noProof="0" dirty="0"/>
+          </a:p>
+        </p:txBody>
       </p:sp>
       <p:sp>
         <p:nvSpPr>
@@ -9347,11 +10093,11 @@
           <a:bodyPr wrap="square" lIns="0" tIns="0" rIns="0" bIns="0" rtlCol="0" anchor="ctr"/>
           <a:lstStyle/>
           <a:p>
-            <a:pPr algn="ctr" indent="0" marL="0">
-              <a:buNone/>
-            </a:pPr>
-            <a:r>
-              <a:rPr lang="en-US" sz="1000" b="1" dirty="0">
+            <a:pPr marL="0" indent="0" algn="ctr">
+              <a:buNone/>
+            </a:pPr>
+            <a:r>
+              <a:rPr lang="es-MX" sz="1000" b="1" noProof="0" dirty="0">
                 <a:solidFill>
                   <a:srgbClr val="F5A623"/>
                 </a:solidFill>
@@ -9361,7 +10107,7 @@
               </a:rPr>
               <a:t>4</a:t>
             </a:r>
-            <a:endParaRPr lang="en-US" sz="1000" dirty="0"/>
+            <a:endParaRPr lang="es-MX" sz="1000" noProof="0" dirty="0"/>
           </a:p>
         </p:txBody>
       </p:sp>
@@ -9386,18 +10132,18 @@
           <a:bodyPr wrap="square" lIns="0" tIns="0" rIns="0" bIns="0" rtlCol="0" anchor="ctr"/>
           <a:lstStyle/>
           <a:p>
-            <a:pPr algn="ctr" indent="0" marL="0">
-              <a:buNone/>
-            </a:pPr>
-            <a:r>
-              <a:rPr lang="en-US" sz="1240" b="1" dirty="0">
+            <a:pPr marL="0" indent="0" algn="ctr">
+              <a:buNone/>
+            </a:pPr>
+            <a:r>
+              <a:rPr lang="es-MX" sz="1240" b="1" noProof="0" dirty="0">
                 <a:solidFill>
                   <a:srgbClr val="EAF0FF"/>
                 </a:solidFill>
               </a:rPr>
               <a:t>Infracción</a:t>
             </a:r>
-            <a:endParaRPr lang="en-US" sz="1240" dirty="0"/>
+            <a:endParaRPr lang="es-MX" sz="1240" noProof="0" dirty="0"/>
           </a:p>
         </p:txBody>
       </p:sp>
@@ -9422,18 +10168,18 @@
           <a:bodyPr wrap="square" lIns="0" tIns="0" rIns="0" bIns="0" rtlCol="0" anchor="ctr"/>
           <a:lstStyle/>
           <a:p>
-            <a:pPr algn="ctr" indent="0" marL="0">
-              <a:buNone/>
-            </a:pPr>
-            <a:r>
-              <a:rPr lang="en-US" sz="950" dirty="0">
+            <a:pPr marL="0" indent="0" algn="ctr">
+              <a:buNone/>
+            </a:pPr>
+            <a:r>
+              <a:rPr lang="es-MX" sz="950" noProof="0" dirty="0">
                 <a:solidFill>
                   <a:srgbClr val="A7B0C2"/>
                 </a:solidFill>
               </a:rPr>
               <a:t>Código + valor</a:t>
             </a:r>
-            <a:endParaRPr lang="en-US" sz="950" dirty="0"/>
+            <a:endParaRPr lang="es-MX" sz="950" noProof="0" dirty="0"/>
           </a:p>
         </p:txBody>
       </p:sp>
@@ -9463,13 +10209,20 @@
             <a:prstDash val="solid"/>
           </a:ln>
           <a:effectLst>
-            <a:outerShdw sx="100000" sy="100000" kx="0" ky="0" algn="bl" rotWithShape="0" blurRad="19050" dist="6350" dir="2700000">
+            <a:outerShdw blurRad="19050" dist="6350" dir="2700000" algn="bl" rotWithShape="0">
               <a:srgbClr val="000000">
                 <a:alpha val="14000"/>
               </a:srgbClr>
             </a:outerShdw>
           </a:effectLst>
         </p:spPr>
+        <p:txBody>
+          <a:bodyPr/>
+          <a:lstStyle/>
+          <a:p>
+            <a:endParaRPr lang="es-MX" noProof="0" dirty="0"/>
+          </a:p>
+        </p:txBody>
       </p:sp>
       <p:sp>
         <p:nvSpPr>
@@ -9501,6 +10254,13 @@
             <a:prstDash val="solid"/>
           </a:ln>
         </p:spPr>
+        <p:txBody>
+          <a:bodyPr/>
+          <a:lstStyle/>
+          <a:p>
+            <a:endParaRPr lang="es-MX" noProof="0" dirty="0"/>
+          </a:p>
+        </p:txBody>
       </p:sp>
       <p:sp>
         <p:nvSpPr>
@@ -9523,11 +10283,11 @@
           <a:bodyPr wrap="square" lIns="0" tIns="0" rIns="0" bIns="0" rtlCol="0" anchor="ctr"/>
           <a:lstStyle/>
           <a:p>
-            <a:pPr algn="ctr" indent="0" marL="0">
-              <a:buNone/>
-            </a:pPr>
-            <a:r>
-              <a:rPr lang="en-US" sz="1000" b="1" dirty="0">
+            <a:pPr marL="0" indent="0" algn="ctr">
+              <a:buNone/>
+            </a:pPr>
+            <a:r>
+              <a:rPr lang="es-MX" sz="1000" b="1" noProof="0" dirty="0">
                 <a:solidFill>
                   <a:srgbClr val="E8504A"/>
                 </a:solidFill>
@@ -9537,7 +10297,7 @@
               </a:rPr>
               <a:t>5</a:t>
             </a:r>
-            <a:endParaRPr lang="en-US" sz="1000" dirty="0"/>
+            <a:endParaRPr lang="es-MX" sz="1000" noProof="0" dirty="0"/>
           </a:p>
         </p:txBody>
       </p:sp>
@@ -9562,18 +10322,18 @@
           <a:bodyPr wrap="square" lIns="0" tIns="0" rIns="0" bIns="0" rtlCol="0" anchor="ctr"/>
           <a:lstStyle/>
           <a:p>
-            <a:pPr algn="ctr" indent="0" marL="0">
-              <a:buNone/>
-            </a:pPr>
-            <a:r>
-              <a:rPr lang="en-US" sz="1240" b="1" dirty="0">
+            <a:pPr marL="0" indent="0" algn="ctr">
+              <a:buNone/>
+            </a:pPr>
+            <a:r>
+              <a:rPr lang="es-MX" sz="1240" b="1" noProof="0" dirty="0">
                 <a:solidFill>
                   <a:srgbClr val="EAF0FF"/>
                 </a:solidFill>
               </a:rPr>
               <a:t>Comparendo</a:t>
             </a:r>
-            <a:endParaRPr lang="en-US" sz="1240" dirty="0"/>
+            <a:endParaRPr lang="es-MX" sz="1240" noProof="0" dirty="0"/>
           </a:p>
         </p:txBody>
       </p:sp>
@@ -9598,18 +10358,18 @@
           <a:bodyPr wrap="square" lIns="0" tIns="0" rIns="0" bIns="0" rtlCol="0" anchor="ctr"/>
           <a:lstStyle/>
           <a:p>
-            <a:pPr algn="ctr" indent="0" marL="0">
-              <a:buNone/>
-            </a:pPr>
-            <a:r>
-              <a:rPr lang="en-US" sz="950" dirty="0">
+            <a:pPr marL="0" indent="0" algn="ctr">
+              <a:buNone/>
+            </a:pPr>
+            <a:r>
+              <a:rPr lang="es-MX" sz="950" noProof="0" dirty="0">
                 <a:solidFill>
                   <a:srgbClr val="A7B0C2"/>
                 </a:solidFill>
               </a:rPr>
               <a:t>POST /api/comparendos</a:t>
             </a:r>
-            <a:endParaRPr lang="en-US" sz="950" dirty="0"/>
+            <a:endParaRPr lang="es-MX" sz="950" noProof="0" dirty="0"/>
           </a:p>
         </p:txBody>
       </p:sp>
@@ -9639,13 +10399,20 @@
             <a:prstDash val="solid"/>
           </a:ln>
           <a:effectLst>
-            <a:outerShdw sx="100000" sy="100000" kx="0" ky="0" algn="bl" rotWithShape="0" blurRad="19050" dist="6350" dir="2700000">
+            <a:outerShdw blurRad="19050" dist="6350" dir="2700000" algn="bl" rotWithShape="0">
               <a:srgbClr val="000000">
                 <a:alpha val="14000"/>
               </a:srgbClr>
             </a:outerShdw>
           </a:effectLst>
         </p:spPr>
+        <p:txBody>
+          <a:bodyPr/>
+          <a:lstStyle/>
+          <a:p>
+            <a:endParaRPr lang="es-MX" noProof="0" dirty="0"/>
+          </a:p>
+        </p:txBody>
       </p:sp>
       <p:sp>
         <p:nvSpPr>
@@ -9655,7 +10422,7 @@
         </p:nvSpPr>
         <p:spPr>
           <a:xfrm>
-            <a:off x="8595360" y="2386584"/>
+            <a:off x="8656320" y="2335784"/>
             <a:ext cx="310896" cy="256032"/>
           </a:xfrm>
           <a:prstGeom prst="roundRect">
@@ -9677,6 +10444,13 @@
             <a:prstDash val="solid"/>
           </a:ln>
         </p:spPr>
+        <p:txBody>
+          <a:bodyPr/>
+          <a:lstStyle/>
+          <a:p>
+            <a:endParaRPr lang="es-MX" noProof="0" dirty="0"/>
+          </a:p>
+        </p:txBody>
       </p:sp>
       <p:sp>
         <p:nvSpPr>
@@ -9686,7 +10460,7 @@
         </p:nvSpPr>
         <p:spPr>
           <a:xfrm>
-            <a:off x="8595360" y="2400300"/>
+            <a:off x="8656320" y="2390140"/>
             <a:ext cx="310896" cy="201168"/>
           </a:xfrm>
           <a:prstGeom prst="rect">
@@ -9699,11 +10473,11 @@
           <a:bodyPr wrap="square" lIns="0" tIns="0" rIns="0" bIns="0" rtlCol="0" anchor="ctr"/>
           <a:lstStyle/>
           <a:p>
-            <a:pPr algn="ctr" indent="0" marL="0">
-              <a:buNone/>
-            </a:pPr>
-            <a:r>
-              <a:rPr lang="en-US" sz="1000" b="1" dirty="0">
+            <a:pPr marL="0" indent="0" algn="ctr">
+              <a:buNone/>
+            </a:pPr>
+            <a:r>
+              <a:rPr lang="es-MX" sz="1000" b="1" noProof="0" dirty="0">
                 <a:solidFill>
                   <a:srgbClr val="5ECB7C"/>
                 </a:solidFill>
@@ -9713,7 +10487,7 @@
               </a:rPr>
               <a:t>6</a:t>
             </a:r>
-            <a:endParaRPr lang="en-US" sz="1000" dirty="0"/>
+            <a:endParaRPr lang="es-MX" sz="1000" noProof="0" dirty="0"/>
           </a:p>
         </p:txBody>
       </p:sp>
@@ -9738,18 +10512,18 @@
           <a:bodyPr wrap="square" lIns="0" tIns="0" rIns="0" bIns="0" rtlCol="0" anchor="ctr"/>
           <a:lstStyle/>
           <a:p>
-            <a:pPr algn="ctr" indent="0" marL="0">
-              <a:buNone/>
-            </a:pPr>
-            <a:r>
-              <a:rPr lang="en-US" sz="1240" b="1" dirty="0">
+            <a:pPr marL="0" indent="0" algn="ctr">
+              <a:buNone/>
+            </a:pPr>
+            <a:r>
+              <a:rPr lang="es-MX" sz="1240" b="1" noProof="0" dirty="0">
                 <a:solidFill>
                   <a:srgbClr val="EAF0FF"/>
                 </a:solidFill>
               </a:rPr>
               <a:t>Pago / anulación</a:t>
             </a:r>
-            <a:endParaRPr lang="en-US" sz="1240" dirty="0"/>
+            <a:endParaRPr lang="es-MX" sz="1240" noProof="0" dirty="0"/>
           </a:p>
         </p:txBody>
       </p:sp>
@@ -9774,18 +10548,18 @@
           <a:bodyPr wrap="square" lIns="0" tIns="0" rIns="0" bIns="0" rtlCol="0" anchor="ctr"/>
           <a:lstStyle/>
           <a:p>
-            <a:pPr algn="ctr" indent="0" marL="0">
-              <a:buNone/>
-            </a:pPr>
-            <a:r>
-              <a:rPr lang="en-US" sz="950" dirty="0">
+            <a:pPr marL="0" indent="0" algn="ctr">
+              <a:buNone/>
+            </a:pPr>
+            <a:r>
+              <a:rPr lang="es-MX" sz="950" noProof="0" dirty="0">
                 <a:solidFill>
                   <a:srgbClr val="A7B0C2"/>
                 </a:solidFill>
               </a:rPr>
               <a:t>PATCH según caso</a:t>
             </a:r>
-            <a:endParaRPr lang="en-US" sz="950" dirty="0"/>
+            <a:endParaRPr lang="es-MX" sz="950" noProof="0" dirty="0"/>
           </a:p>
         </p:txBody>
       </p:sp>
@@ -9815,6 +10589,13 @@
             <a:prstDash val="solid"/>
           </a:ln>
         </p:spPr>
+        <p:txBody>
+          <a:bodyPr/>
+          <a:lstStyle/>
+          <a:p>
+            <a:endParaRPr lang="es-MX" noProof="0" dirty="0"/>
+          </a:p>
+        </p:txBody>
       </p:sp>
       <p:sp>
         <p:nvSpPr>
@@ -9837,18 +10618,18 @@
           <a:bodyPr wrap="square" lIns="0" tIns="0" rIns="0" bIns="0" rtlCol="0" anchor="ctr"/>
           <a:lstStyle/>
           <a:p>
-            <a:pPr indent="0" marL="0">
-              <a:buNone/>
-            </a:pPr>
-            <a:r>
-              <a:rPr lang="en-US" sz="1200" b="1" dirty="0">
+            <a:pPr marL="0" indent="0">
+              <a:buNone/>
+            </a:pPr>
+            <a:r>
+              <a:rPr lang="es-MX" sz="1200" b="1" noProof="0" dirty="0">
                 <a:solidFill>
                   <a:srgbClr val="F5A623"/>
                 </a:solidFill>
               </a:rPr>
               <a:t>Máquina de estados base</a:t>
             </a:r>
-            <a:endParaRPr lang="en-US" sz="1200" dirty="0"/>
+            <a:endParaRPr lang="es-MX" sz="1200" noProof="0" dirty="0"/>
           </a:p>
         </p:txBody>
       </p:sp>
@@ -9878,6 +10659,13 @@
             <a:prstDash val="solid"/>
           </a:ln>
         </p:spPr>
+        <p:txBody>
+          <a:bodyPr/>
+          <a:lstStyle/>
+          <a:p>
+            <a:endParaRPr lang="es-MX" noProof="0" dirty="0"/>
+          </a:p>
+        </p:txBody>
       </p:sp>
       <p:sp>
         <p:nvSpPr>
@@ -9900,18 +10688,18 @@
           <a:bodyPr wrap="square" lIns="0" tIns="0" rIns="0" bIns="0" rtlCol="0" anchor="ctr"/>
           <a:lstStyle/>
           <a:p>
-            <a:pPr algn="ctr" indent="0" marL="0">
-              <a:buNone/>
-            </a:pPr>
-            <a:r>
-              <a:rPr lang="en-US" sz="1300" b="1" dirty="0">
+            <a:pPr marL="0" indent="0" algn="ctr">
+              <a:buNone/>
+            </a:pPr>
+            <a:r>
+              <a:rPr lang="es-MX" sz="1300" b="1" noProof="0" dirty="0">
                 <a:solidFill>
                   <a:srgbClr val="F5A623"/>
                 </a:solidFill>
               </a:rPr>
               <a:t>PENDIENTE</a:t>
             </a:r>
-            <a:endParaRPr lang="en-US" sz="1300" dirty="0"/>
+            <a:endParaRPr lang="es-MX" sz="1300" noProof="0" dirty="0"/>
           </a:p>
         </p:txBody>
       </p:sp>
@@ -9941,6 +10729,13 @@
             <a:prstDash val="solid"/>
           </a:ln>
         </p:spPr>
+        <p:txBody>
+          <a:bodyPr/>
+          <a:lstStyle/>
+          <a:p>
+            <a:endParaRPr lang="es-MX" noProof="0" dirty="0"/>
+          </a:p>
+        </p:txBody>
       </p:sp>
       <p:sp>
         <p:nvSpPr>
@@ -9963,18 +10758,18 @@
           <a:bodyPr wrap="square" lIns="0" tIns="0" rIns="0" bIns="0" rtlCol="0" anchor="ctr"/>
           <a:lstStyle/>
           <a:p>
-            <a:pPr algn="ctr" indent="0" marL="0">
-              <a:buNone/>
-            </a:pPr>
-            <a:r>
-              <a:rPr lang="en-US" sz="1300" b="1" dirty="0">
+            <a:pPr marL="0" indent="0" algn="ctr">
+              <a:buNone/>
+            </a:pPr>
+            <a:r>
+              <a:rPr lang="es-MX" sz="1300" b="1" noProof="0" dirty="0">
                 <a:solidFill>
                   <a:srgbClr val="5ECB7C"/>
                 </a:solidFill>
               </a:rPr>
               <a:t>PAGADO</a:t>
             </a:r>
-            <a:endParaRPr lang="en-US" sz="1300" dirty="0"/>
+            <a:endParaRPr lang="es-MX" sz="1300" noProof="0" dirty="0"/>
           </a:p>
         </p:txBody>
       </p:sp>
@@ -10004,6 +10799,13 @@
             <a:prstDash val="solid"/>
           </a:ln>
         </p:spPr>
+        <p:txBody>
+          <a:bodyPr/>
+          <a:lstStyle/>
+          <a:p>
+            <a:endParaRPr lang="es-MX" noProof="0" dirty="0"/>
+          </a:p>
+        </p:txBody>
       </p:sp>
       <p:sp>
         <p:nvSpPr>
@@ -10026,18 +10828,18 @@
           <a:bodyPr wrap="square" lIns="0" tIns="0" rIns="0" bIns="0" rtlCol="0" anchor="ctr"/>
           <a:lstStyle/>
           <a:p>
-            <a:pPr algn="ctr" indent="0" marL="0">
-              <a:buNone/>
-            </a:pPr>
-            <a:r>
-              <a:rPr lang="en-US" sz="1300" b="1" dirty="0">
+            <a:pPr marL="0" indent="0" algn="ctr">
+              <a:buNone/>
+            </a:pPr>
+            <a:r>
+              <a:rPr lang="es-MX" sz="1300" b="1" noProof="0" dirty="0">
                 <a:solidFill>
                   <a:srgbClr val="E8504A"/>
                 </a:solidFill>
               </a:rPr>
               <a:t>ANULADO</a:t>
             </a:r>
-            <a:endParaRPr lang="en-US" sz="1300" dirty="0"/>
+            <a:endParaRPr lang="es-MX" sz="1300" noProof="0" dirty="0"/>
           </a:p>
         </p:txBody>
       </p:sp>
@@ -10064,6 +10866,13 @@
             <a:tailEnd type="triangle"/>
           </a:ln>
         </p:spPr>
+        <p:txBody>
+          <a:bodyPr/>
+          <a:lstStyle/>
+          <a:p>
+            <a:endParaRPr lang="es-MX" noProof="0" dirty="0"/>
+          </a:p>
+        </p:txBody>
       </p:sp>
       <p:sp>
         <p:nvSpPr>
@@ -10088,6 +10897,13 @@
             <a:tailEnd type="triangle"/>
           </a:ln>
         </p:spPr>
+        <p:txBody>
+          <a:bodyPr/>
+          <a:lstStyle/>
+          <a:p>
+            <a:endParaRPr lang="es-MX" noProof="0" dirty="0"/>
+          </a:p>
+        </p:txBody>
       </p:sp>
       <p:sp>
         <p:nvSpPr>
@@ -10110,18 +10926,18 @@
           <a:bodyPr wrap="square" lIns="0" tIns="0" rIns="0" bIns="0" rtlCol="0" anchor="ctr"/>
           <a:lstStyle/>
           <a:p>
-            <a:pPr algn="ctr" indent="0" marL="0">
-              <a:buNone/>
-            </a:pPr>
-            <a:r>
-              <a:rPr lang="en-US" sz="900" dirty="0">
+            <a:pPr marL="0" indent="0" algn="ctr">
+              <a:buNone/>
+            </a:pPr>
+            <a:r>
+              <a:rPr lang="es-MX" sz="900" noProof="0" dirty="0">
                 <a:solidFill>
                   <a:srgbClr val="A7B0C2"/>
                 </a:solidFill>
               </a:rPr>
               <a:t>Pago válido</a:t>
             </a:r>
-            <a:endParaRPr lang="en-US" sz="900" dirty="0"/>
+            <a:endParaRPr lang="es-MX" sz="900" noProof="0" dirty="0"/>
           </a:p>
         </p:txBody>
       </p:sp>
@@ -10146,18 +10962,18 @@
           <a:bodyPr wrap="square" lIns="0" tIns="0" rIns="0" bIns="0" rtlCol="0" anchor="ctr"/>
           <a:lstStyle/>
           <a:p>
-            <a:pPr algn="ctr" indent="0" marL="0">
-              <a:buNone/>
-            </a:pPr>
-            <a:r>
-              <a:rPr lang="en-US" sz="880" dirty="0">
+            <a:pPr marL="0" indent="0" algn="ctr">
+              <a:buNone/>
+            </a:pPr>
+            <a:r>
+              <a:rPr lang="es-MX" sz="880" noProof="0" dirty="0">
                 <a:solidFill>
                   <a:srgbClr val="A7B0C2"/>
                 </a:solidFill>
               </a:rPr>
               <a:t>Decisión administrativa</a:t>
             </a:r>
-            <a:endParaRPr lang="en-US" sz="880" dirty="0"/>
+            <a:endParaRPr lang="es-MX" sz="880" noProof="0" dirty="0"/>
           </a:p>
         </p:txBody>
       </p:sp>
@@ -10182,18 +10998,18 @@
           <a:bodyPr wrap="square" lIns="0" tIns="0" rIns="0" bIns="0" rtlCol="0" anchor="ctr"/>
           <a:lstStyle/>
           <a:p>
-            <a:pPr algn="ctr" indent="0" marL="0">
-              <a:buNone/>
-            </a:pPr>
-            <a:r>
-              <a:rPr lang="en-US" sz="1060" dirty="0">
+            <a:pPr marL="0" indent="0" algn="ctr">
+              <a:buNone/>
+            </a:pPr>
+            <a:r>
+              <a:rPr lang="es-MX" sz="1060" noProof="0" dirty="0">
                 <a:solidFill>
                   <a:srgbClr val="D8E2F0"/>
                 </a:solidFill>
               </a:rPr>
               <a:t>Reglas: número único y valor consistente con infracciones.</a:t>
             </a:r>
-            <a:endParaRPr lang="en-US" sz="1060" dirty="0"/>
+            <a:endParaRPr lang="es-MX" sz="1060" noProof="0" dirty="0"/>
           </a:p>
         </p:txBody>
       </p:sp>
@@ -10218,11 +11034,11 @@
           <a:bodyPr wrap="square" rtlCol="0" anchor="ctr"/>
           <a:lstStyle/>
           <a:p>
-            <a:pPr algn="r" indent="0" marL="0">
-              <a:buNone/>
-            </a:pPr>
-            <a:r>
-              <a:rPr lang="en-US" sz="1000" dirty="0">
+            <a:pPr marL="0" indent="0" algn="r">
+              <a:buNone/>
+            </a:pPr>
+            <a:r>
+              <a:rPr lang="es-MX" sz="1000" noProof="0" dirty="0">
                 <a:solidFill>
                   <a:srgbClr val="A7B0C2"/>
                 </a:solidFill>
@@ -10232,7 +11048,234 @@
               </a:rPr>
               <a:t>6</a:t>
             </a:r>
-            <a:endParaRPr lang="en-US" sz="1000" dirty="0"/>
+            <a:endParaRPr lang="es-MX" sz="1000" noProof="0" dirty="0"/>
+          </a:p>
+        </p:txBody>
+      </p:sp>
+      <p:sp>
+        <p:nvSpPr>
+          <p:cNvPr id="54" name="Shape 7">
+            <a:extLst>
+              <a:ext uri="{FF2B5EF4-FFF2-40B4-BE49-F238E27FC236}">
+                <a16:creationId xmlns:a16="http://schemas.microsoft.com/office/drawing/2014/main" id="{9A9FBC1A-8882-FDA0-BB51-C8E53F7ABC5F}"/>
+              </a:ext>
+            </a:extLst>
+          </p:cNvPr>
+          <p:cNvSpPr/>
+          <p:nvPr/>
+        </p:nvSpPr>
+        <p:spPr>
+          <a:xfrm>
+            <a:off x="9450832" y="2722880"/>
+            <a:ext cx="256032" cy="201168"/>
+          </a:xfrm>
+          <a:prstGeom prst="chevron">
+            <a:avLst/>
+          </a:prstGeom>
+          <a:solidFill>
+            <a:srgbClr val="2A3346"/>
+          </a:solidFill>
+          <a:ln w="12700">
+            <a:solidFill>
+              <a:srgbClr val="2A3346"/>
+            </a:solidFill>
+            <a:prstDash val="solid"/>
+          </a:ln>
+        </p:spPr>
+        <p:txBody>
+          <a:bodyPr/>
+          <a:lstStyle/>
+          <a:p>
+            <a:endParaRPr lang="es-MX" noProof="0" dirty="0"/>
+          </a:p>
+        </p:txBody>
+      </p:sp>
+      <p:sp>
+        <p:nvSpPr>
+          <p:cNvPr id="55" name="Shape 34">
+            <a:extLst>
+              <a:ext uri="{FF2B5EF4-FFF2-40B4-BE49-F238E27FC236}">
+                <a16:creationId xmlns:a16="http://schemas.microsoft.com/office/drawing/2014/main" id="{F422A5E1-1D51-5235-D68E-1A114F409E7C}"/>
+              </a:ext>
+            </a:extLst>
+          </p:cNvPr>
+          <p:cNvSpPr/>
+          <p:nvPr/>
+        </p:nvSpPr>
+        <p:spPr>
+          <a:xfrm>
+            <a:off x="10139680" y="2340864"/>
+            <a:ext cx="310896" cy="256032"/>
+          </a:xfrm>
+          <a:prstGeom prst="roundRect">
+            <a:avLst>
+              <a:gd name="adj" fmla="val 28571"/>
+            </a:avLst>
+          </a:prstGeom>
+          <a:solidFill>
+            <a:schemeClr val="bg1">
+              <a:lumMod val="75000"/>
+              <a:alpha val="16000"/>
+            </a:schemeClr>
+          </a:solidFill>
+          <a:ln w="12700">
+            <a:solidFill>
+              <a:schemeClr val="bg1">
+                <a:lumMod val="50000"/>
+                <a:alpha val="80000"/>
+              </a:schemeClr>
+            </a:solidFill>
+            <a:prstDash val="solid"/>
+          </a:ln>
+        </p:spPr>
+        <p:txBody>
+          <a:bodyPr/>
+          <a:lstStyle/>
+          <a:p>
+            <a:endParaRPr lang="es-MX" noProof="0" dirty="0">
+              <a:solidFill>
+                <a:schemeClr val="bg1">
+                  <a:lumMod val="50000"/>
+                </a:schemeClr>
+              </a:solidFill>
+            </a:endParaRPr>
+          </a:p>
+        </p:txBody>
+      </p:sp>
+      <p:sp>
+        <p:nvSpPr>
+          <p:cNvPr id="56" name="Text 35">
+            <a:extLst>
+              <a:ext uri="{FF2B5EF4-FFF2-40B4-BE49-F238E27FC236}">
+                <a16:creationId xmlns:a16="http://schemas.microsoft.com/office/drawing/2014/main" id="{0035010C-5D0D-90FC-CFD6-2C01951F4BEA}"/>
+              </a:ext>
+            </a:extLst>
+          </p:cNvPr>
+          <p:cNvSpPr/>
+          <p:nvPr/>
+        </p:nvSpPr>
+        <p:spPr>
+          <a:xfrm>
+            <a:off x="10132568" y="2371344"/>
+            <a:ext cx="310896" cy="201168"/>
+          </a:xfrm>
+          <a:prstGeom prst="rect">
+            <a:avLst/>
+          </a:prstGeom>
+          <a:noFill/>
+          <a:ln/>
+        </p:spPr>
+        <p:txBody>
+          <a:bodyPr wrap="square" lIns="0" tIns="0" rIns="0" bIns="0" rtlCol="0" anchor="ctr"/>
+          <a:lstStyle/>
+          <a:p>
+            <a:pPr marL="0" indent="0" algn="ctr">
+              <a:buNone/>
+            </a:pPr>
+            <a:r>
+              <a:rPr lang="es-MX" sz="1000" b="1" noProof="0" dirty="0">
+                <a:solidFill>
+                  <a:schemeClr val="bg1">
+                    <a:lumMod val="50000"/>
+                  </a:schemeClr>
+                </a:solidFill>
+                <a:latin typeface="Aptos" pitchFamily="34" charset="0"/>
+                <a:ea typeface="Aptos" pitchFamily="34" charset="-122"/>
+                <a:cs typeface="Aptos" pitchFamily="34" charset="-120"/>
+              </a:rPr>
+              <a:t>6</a:t>
+            </a:r>
+            <a:endParaRPr lang="es-MX" sz="1000" noProof="0" dirty="0">
+              <a:solidFill>
+                <a:schemeClr val="bg1">
+                  <a:lumMod val="50000"/>
+                </a:schemeClr>
+              </a:solidFill>
+            </a:endParaRPr>
+          </a:p>
+        </p:txBody>
+      </p:sp>
+      <p:sp>
+        <p:nvSpPr>
+          <p:cNvPr id="57" name="Text 36">
+            <a:extLst>
+              <a:ext uri="{FF2B5EF4-FFF2-40B4-BE49-F238E27FC236}">
+                <a16:creationId xmlns:a16="http://schemas.microsoft.com/office/drawing/2014/main" id="{1C75C443-DB6D-E48A-B2DA-CD6A8368F6F7}"/>
+              </a:ext>
+            </a:extLst>
+          </p:cNvPr>
+          <p:cNvSpPr/>
+          <p:nvPr/>
+        </p:nvSpPr>
+        <p:spPr>
+          <a:xfrm>
+            <a:off x="9862312" y="2695448"/>
+            <a:ext cx="996696" cy="201168"/>
+          </a:xfrm>
+          <a:prstGeom prst="rect">
+            <a:avLst/>
+          </a:prstGeom>
+          <a:noFill/>
+          <a:ln/>
+        </p:spPr>
+        <p:txBody>
+          <a:bodyPr wrap="square" lIns="0" tIns="0" rIns="0" bIns="0" rtlCol="0" anchor="ctr"/>
+          <a:lstStyle/>
+          <a:p>
+            <a:pPr marL="0" indent="0" algn="ctr">
+              <a:buNone/>
+            </a:pPr>
+            <a:r>
+              <a:rPr lang="es-MX" sz="1240" b="1" noProof="0" dirty="0">
+                <a:solidFill>
+                  <a:srgbClr val="EAF0FF"/>
+                </a:solidFill>
+              </a:rPr>
+              <a:t>Reportes</a:t>
+            </a:r>
+            <a:endParaRPr lang="es-MX" sz="1240" noProof="0" dirty="0"/>
+          </a:p>
+        </p:txBody>
+      </p:sp>
+      <p:sp>
+        <p:nvSpPr>
+          <p:cNvPr id="58" name="Text 37">
+            <a:extLst>
+              <a:ext uri="{FF2B5EF4-FFF2-40B4-BE49-F238E27FC236}">
+                <a16:creationId xmlns:a16="http://schemas.microsoft.com/office/drawing/2014/main" id="{820185AA-1D8A-B49C-88DD-48C3DF0AE732}"/>
+              </a:ext>
+            </a:extLst>
+          </p:cNvPr>
+          <p:cNvSpPr/>
+          <p:nvPr/>
+        </p:nvSpPr>
+        <p:spPr>
+          <a:xfrm>
+            <a:off x="9862312" y="2924048"/>
+            <a:ext cx="996696" cy="219456"/>
+          </a:xfrm>
+          <a:prstGeom prst="rect">
+            <a:avLst/>
+          </a:prstGeom>
+          <a:noFill/>
+          <a:ln/>
+        </p:spPr>
+        <p:txBody>
+          <a:bodyPr wrap="square" lIns="0" tIns="0" rIns="0" bIns="0" rtlCol="0" anchor="ctr"/>
+          <a:lstStyle/>
+          <a:p>
+            <a:pPr marL="0" indent="0" algn="ctr">
+              <a:buNone/>
+            </a:pPr>
+            <a:r>
+              <a:rPr lang="es-MX" sz="950" noProof="0" dirty="0">
+                <a:solidFill>
+                  <a:srgbClr val="A7B0C2"/>
+                </a:solidFill>
+              </a:rPr>
+              <a:t>Exportación de reportes</a:t>
+            </a:r>
+            <a:endParaRPr lang="es-MX" sz="950" noProof="0" dirty="0"/>
           </a:p>
         </p:txBody>
       </p:sp>
@@ -10282,7 +11325,7 @@
           <a:bodyPr wrap="square" rtlCol="0" anchor="ctr"/>
           <a:lstStyle/>
           <a:p>
-            <a:pPr indent="0" marL="0">
+            <a:pPr marL="0" indent="0">
               <a:buNone/>
             </a:pPr>
             <a:r>
@@ -10294,7 +11337,7 @@
                 <a:ea typeface="Aptos" pitchFamily="34" charset="-122"/>
                 <a:cs typeface="Aptos" pitchFamily="34" charset="-120"/>
               </a:rPr>
-              <a:t>06 · FRONTEND + SEGURIDAD</a:t>
+              <a:t>FRONTEND + SEGURIDAD</a:t>
             </a:r>
             <a:endParaRPr lang="en-US" sz="1100" dirty="0"/>
           </a:p>
@@ -10321,7 +11364,7 @@
           <a:bodyPr wrap="square" lIns="0" tIns="0" rIns="0" bIns="0" rtlCol="0" anchor="ctr"/>
           <a:lstStyle/>
           <a:p>
-            <a:pPr indent="0" marL="0">
+            <a:pPr marL="0" indent="0">
               <a:buNone/>
             </a:pPr>
             <a:r>
@@ -10360,7 +11403,7 @@
           <a:bodyPr wrap="square" lIns="0" tIns="0" rIns="0" bIns="0" rtlCol="0" anchor="ctr"/>
           <a:lstStyle/>
           <a:p>
-            <a:pPr indent="0" marL="0">
+            <a:pPr marL="0" indent="0">
               <a:buNone/>
             </a:pPr>
             <a:r>
@@ -10404,13 +11447,20 @@
             <a:prstDash val="solid"/>
           </a:ln>
           <a:effectLst>
-            <a:outerShdw sx="100000" sy="100000" kx="0" ky="0" algn="bl" rotWithShape="0" blurRad="19050" dist="6350" dir="2700000">
+            <a:outerShdw blurRad="19050" dist="6350" dir="2700000" algn="bl" rotWithShape="0">
               <a:srgbClr val="000000">
                 <a:alpha val="14000"/>
               </a:srgbClr>
             </a:outerShdw>
           </a:effectLst>
         </p:spPr>
+        <p:txBody>
+          <a:bodyPr/>
+          <a:lstStyle/>
+          <a:p>
+            <a:endParaRPr lang="es-CO"/>
+          </a:p>
+        </p:txBody>
       </p:sp>
       <p:sp>
         <p:nvSpPr>
@@ -10436,6 +11486,13 @@
             <a:prstDash val="solid"/>
           </a:ln>
         </p:spPr>
+        <p:txBody>
+          <a:bodyPr/>
+          <a:lstStyle/>
+          <a:p>
+            <a:endParaRPr lang="es-CO"/>
+          </a:p>
+        </p:txBody>
       </p:sp>
       <p:sp>
         <p:nvSpPr>
@@ -10458,7 +11515,7 @@
           <a:bodyPr wrap="square" lIns="0" tIns="0" rIns="0" bIns="0" rtlCol="0" anchor="ctr"/>
           <a:lstStyle/>
           <a:p>
-            <a:pPr indent="0" marL="0">
+            <a:pPr marL="0" indent="0">
               <a:buNone/>
             </a:pPr>
             <a:r>
@@ -10497,7 +11554,7 @@
           <a:bodyPr wrap="square" lIns="0" tIns="0" rIns="0" bIns="0" rtlCol="0" anchor="ctr"/>
           <a:lstStyle/>
           <a:p>
-            <a:pPr indent="0" marL="0">
+            <a:pPr marL="0" indent="0">
               <a:buNone/>
             </a:pPr>
             <a:r>
@@ -10536,7 +11593,7 @@
           <a:bodyPr wrap="square" lIns="0" tIns="0" rIns="0" bIns="0" rtlCol="0" anchor="t"/>
           <a:lstStyle/>
           <a:p>
-            <a:pPr indent="0" marL="0">
+            <a:pPr marL="0" indent="0">
               <a:buNone/>
             </a:pPr>
             <a:r>
@@ -10553,13 +11610,13 @@
             <a:endParaRPr lang="en-US" sz="1260" dirty="0"/>
           </a:p>
           <a:p>
-            <a:pPr indent="0" marL="0">
+            <a:pPr marL="0" indent="0">
               <a:buNone/>
             </a:pPr>
             <a:endParaRPr lang="en-US" sz="1260" dirty="0"/>
           </a:p>
           <a:p>
-            <a:pPr indent="0" marL="0">
+            <a:pPr marL="0" indent="0">
               <a:buNone/>
             </a:pPr>
             <a:r>
@@ -10603,6 +11660,13 @@
             <a:prstDash val="solid"/>
           </a:ln>
         </p:spPr>
+        <p:txBody>
+          <a:bodyPr/>
+          <a:lstStyle/>
+          <a:p>
+            <a:endParaRPr lang="es-CO"/>
+          </a:p>
+        </p:txBody>
       </p:sp>
       <p:sp>
         <p:nvSpPr>
@@ -10625,7 +11689,7 @@
           <a:bodyPr wrap="square" lIns="0" tIns="0" rIns="0" bIns="0" rtlCol="0" anchor="ctr"/>
           <a:lstStyle/>
           <a:p>
-            <a:pPr indent="0" marL="0">
+            <a:pPr marL="0" indent="0">
               <a:buNone/>
             </a:pPr>
             <a:r>
@@ -10664,6 +11728,13 @@
             <a:prstDash val="solid"/>
           </a:ln>
         </p:spPr>
+        <p:txBody>
+          <a:bodyPr/>
+          <a:lstStyle/>
+          <a:p>
+            <a:endParaRPr lang="es-CO"/>
+          </a:p>
+        </p:txBody>
       </p:sp>
       <p:sp>
         <p:nvSpPr>
@@ -10686,7 +11757,7 @@
           <a:bodyPr wrap="square" lIns="0" tIns="0" rIns="0" bIns="0" rtlCol="0" anchor="ctr"/>
           <a:lstStyle/>
           <a:p>
-            <a:pPr indent="0" marL="0">
+            <a:pPr marL="0" indent="0">
               <a:buNone/>
             </a:pPr>
             <a:r>
@@ -10725,6 +11796,13 @@
             <a:prstDash val="solid"/>
           </a:ln>
         </p:spPr>
+        <p:txBody>
+          <a:bodyPr/>
+          <a:lstStyle/>
+          <a:p>
+            <a:endParaRPr lang="es-CO"/>
+          </a:p>
+        </p:txBody>
       </p:sp>
       <p:sp>
         <p:nvSpPr>
@@ -10747,7 +11825,7 @@
           <a:bodyPr wrap="square" lIns="0" tIns="0" rIns="0" bIns="0" rtlCol="0" anchor="ctr"/>
           <a:lstStyle/>
           <a:p>
-            <a:pPr indent="0" marL="0">
+            <a:pPr marL="0" indent="0">
               <a:buNone/>
             </a:pPr>
             <a:r>
@@ -10786,6 +11864,13 @@
             <a:prstDash val="solid"/>
           </a:ln>
         </p:spPr>
+        <p:txBody>
+          <a:bodyPr/>
+          <a:lstStyle/>
+          <a:p>
+            <a:endParaRPr lang="es-CO"/>
+          </a:p>
+        </p:txBody>
       </p:sp>
       <p:sp>
         <p:nvSpPr>
@@ -10808,7 +11893,7 @@
           <a:bodyPr wrap="square" lIns="0" tIns="0" rIns="0" bIns="0" rtlCol="0" anchor="ctr"/>
           <a:lstStyle/>
           <a:p>
-            <a:pPr indent="0" marL="0">
+            <a:pPr marL="0" indent="0">
               <a:buNone/>
             </a:pPr>
             <a:r>
@@ -10847,6 +11932,13 @@
             <a:prstDash val="solid"/>
           </a:ln>
         </p:spPr>
+        <p:txBody>
+          <a:bodyPr/>
+          <a:lstStyle/>
+          <a:p>
+            <a:endParaRPr lang="es-CO"/>
+          </a:p>
+        </p:txBody>
       </p:sp>
       <p:sp>
         <p:nvSpPr>
@@ -10869,7 +11961,7 @@
           <a:bodyPr wrap="square" lIns="0" tIns="0" rIns="0" bIns="0" rtlCol="0" anchor="ctr"/>
           <a:lstStyle/>
           <a:p>
-            <a:pPr indent="0" marL="0">
+            <a:pPr marL="0" indent="0">
               <a:buNone/>
             </a:pPr>
             <a:r>
@@ -10908,6 +12000,13 @@
             <a:prstDash val="solid"/>
           </a:ln>
         </p:spPr>
+        <p:txBody>
+          <a:bodyPr/>
+          <a:lstStyle/>
+          <a:p>
+            <a:endParaRPr lang="es-CO"/>
+          </a:p>
+        </p:txBody>
       </p:sp>
       <p:sp>
         <p:nvSpPr>
@@ -10930,7 +12029,7 @@
           <a:bodyPr wrap="square" lIns="0" tIns="0" rIns="0" bIns="0" rtlCol="0" anchor="ctr"/>
           <a:lstStyle/>
           <a:p>
-            <a:pPr indent="0" marL="0">
+            <a:pPr marL="0" indent="0">
               <a:buNone/>
             </a:pPr>
             <a:r>
@@ -10971,6 +12070,13 @@
             <a:prstDash val="solid"/>
           </a:ln>
         </p:spPr>
+        <p:txBody>
+          <a:bodyPr/>
+          <a:lstStyle/>
+          <a:p>
+            <a:endParaRPr lang="es-CO"/>
+          </a:p>
+        </p:txBody>
       </p:sp>
       <p:sp>
         <p:nvSpPr>
@@ -10993,7 +12099,7 @@
           <a:bodyPr wrap="square" lIns="0" tIns="0" rIns="0" bIns="0" rtlCol="0" anchor="ctr"/>
           <a:lstStyle/>
           <a:p>
-            <a:pPr algn="ctr" indent="0" marL="0">
+            <a:pPr marL="0" indent="0" algn="ctr">
               <a:buNone/>
             </a:pPr>
             <a:r>
@@ -11007,13 +12113,13 @@
             <a:endParaRPr lang="en-US" sz="1200" dirty="0"/>
           </a:p>
           <a:p>
-            <a:pPr algn="ctr" indent="0" marL="0">
+            <a:pPr marL="0" indent="0" algn="ctr">
               <a:buNone/>
             </a:pPr>
             <a:endParaRPr lang="en-US" sz="1200" dirty="0"/>
           </a:p>
           <a:p>
-            <a:pPr algn="ctr" indent="0" marL="0">
+            <a:pPr marL="0" indent="0" algn="ctr">
               <a:buNone/>
             </a:pPr>
             <a:r>
@@ -11027,7 +12133,7 @@
             <a:endParaRPr lang="en-US" sz="1200" dirty="0"/>
           </a:p>
           <a:p>
-            <a:pPr algn="ctr" indent="0" marL="0">
+            <a:pPr marL="0" indent="0" algn="ctr">
               <a:buNone/>
             </a:pPr>
             <a:r>
@@ -11041,7 +12147,7 @@
             <a:endParaRPr lang="en-US" sz="1200" dirty="0"/>
           </a:p>
           <a:p>
-            <a:pPr algn="ctr" indent="0" marL="0">
+            <a:pPr marL="0" indent="0" algn="ctr">
               <a:buNone/>
             </a:pPr>
             <a:r>
@@ -11055,7 +12161,7 @@
             <a:endParaRPr lang="en-US" sz="1200" dirty="0"/>
           </a:p>
           <a:p>
-            <a:pPr algn="ctr" indent="0" marL="0">
+            <a:pPr marL="0" indent="0" algn="ctr">
               <a:buNone/>
             </a:pPr>
             <a:r>
@@ -11091,7 +12197,7 @@
           <a:bodyPr wrap="square" rtlCol="0" anchor="ctr"/>
           <a:lstStyle/>
           <a:p>
-            <a:pPr algn="r" indent="0" marL="0">
+            <a:pPr marL="0" indent="0" algn="r">
               <a:buNone/>
             </a:pPr>
             <a:r>
@@ -11155,7 +12261,7 @@
           <a:bodyPr wrap="square" rtlCol="0" anchor="ctr"/>
           <a:lstStyle/>
           <a:p>
-            <a:pPr indent="0" marL="0">
+            <a:pPr marL="0" indent="0">
               <a:buNone/>
             </a:pPr>
             <a:r>
@@ -11167,7 +12273,7 @@
                 <a:ea typeface="Aptos" pitchFamily="34" charset="-122"/>
                 <a:cs typeface="Aptos" pitchFamily="34" charset="-120"/>
               </a:rPr>
-              <a:t>07 · DESPLIEGUE</a:t>
+              <a:t>DESPLIEGUE</a:t>
             </a:r>
             <a:endParaRPr lang="en-US" sz="1100" dirty="0"/>
           </a:p>
@@ -11194,7 +12300,7 @@
           <a:bodyPr wrap="square" lIns="0" tIns="0" rIns="0" bIns="0" rtlCol="0" anchor="ctr"/>
           <a:lstStyle/>
           <a:p>
-            <a:pPr indent="0" marL="0">
+            <a:pPr marL="0" indent="0">
               <a:buNone/>
             </a:pPr>
             <a:r>
@@ -11233,7 +12339,7 @@
           <a:bodyPr wrap="square" lIns="0" tIns="0" rIns="0" bIns="0" rtlCol="0" anchor="ctr"/>
           <a:lstStyle/>
           <a:p>
-            <a:pPr indent="0" marL="0">
+            <a:pPr marL="0" indent="0">
               <a:buNone/>
             </a:pPr>
             <a:r>
@@ -11277,13 +12383,20 @@
             <a:prstDash val="solid"/>
           </a:ln>
           <a:effectLst>
-            <a:outerShdw sx="100000" sy="100000" kx="0" ky="0" algn="bl" rotWithShape="0" blurRad="19050" dist="6350" dir="2700000">
+            <a:outerShdw blurRad="19050" dist="6350" dir="2700000" algn="bl" rotWithShape="0">
               <a:srgbClr val="000000">
                 <a:alpha val="14000"/>
               </a:srgbClr>
             </a:outerShdw>
           </a:effectLst>
         </p:spPr>
+        <p:txBody>
+          <a:bodyPr/>
+          <a:lstStyle/>
+          <a:p>
+            <a:endParaRPr lang="es-CO"/>
+          </a:p>
+        </p:txBody>
       </p:sp>
       <p:sp>
         <p:nvSpPr>
@@ -11309,6 +12422,13 @@
             <a:prstDash val="solid"/>
           </a:ln>
         </p:spPr>
+        <p:txBody>
+          <a:bodyPr/>
+          <a:lstStyle/>
+          <a:p>
+            <a:endParaRPr lang="es-CO"/>
+          </a:p>
+        </p:txBody>
       </p:sp>
       <p:sp>
         <p:nvSpPr>
@@ -11331,7 +12451,7 @@
           <a:bodyPr wrap="square" lIns="0" tIns="0" rIns="0" bIns="0" rtlCol="0" anchor="ctr"/>
           <a:lstStyle/>
           <a:p>
-            <a:pPr indent="0" marL="0">
+            <a:pPr marL="0" indent="0">
               <a:buNone/>
             </a:pPr>
             <a:r>
@@ -11370,7 +12490,7 @@
           <a:bodyPr wrap="square" lIns="0" tIns="0" rIns="0" bIns="0" rtlCol="0" anchor="ctr"/>
           <a:lstStyle/>
           <a:p>
-            <a:pPr indent="0" marL="0">
+            <a:pPr marL="0" indent="0">
               <a:buNone/>
             </a:pPr>
             <a:r>
@@ -11409,7 +12529,7 @@
           <a:bodyPr wrap="square" lIns="0" tIns="0" rIns="0" bIns="0" rtlCol="0" anchor="t"/>
           <a:lstStyle/>
           <a:p>
-            <a:pPr indent="0" marL="0">
+            <a:pPr marL="0" indent="0">
               <a:buNone/>
             </a:pPr>
             <a:r>
@@ -11426,13 +12546,13 @@
             <a:endParaRPr lang="en-US" sz="1260" dirty="0"/>
           </a:p>
           <a:p>
-            <a:pPr indent="0" marL="0">
+            <a:pPr marL="0" indent="0">
               <a:buNone/>
             </a:pPr>
             <a:endParaRPr lang="en-US" sz="1260" dirty="0"/>
           </a:p>
           <a:p>
-            <a:pPr indent="0" marL="0">
+            <a:pPr marL="0" indent="0">
               <a:buNone/>
             </a:pPr>
             <a:r>
@@ -11449,7 +12569,7 @@
             <a:endParaRPr lang="en-US" sz="1260" dirty="0"/>
           </a:p>
           <a:p>
-            <a:pPr indent="0" marL="0">
+            <a:pPr marL="0" indent="0">
               <a:buNone/>
             </a:pPr>
             <a:r>
@@ -11466,7 +12586,7 @@
             <a:endParaRPr lang="en-US" sz="1260" dirty="0"/>
           </a:p>
           <a:p>
-            <a:pPr indent="0" marL="0">
+            <a:pPr marL="0" indent="0">
               <a:buNone/>
             </a:pPr>
             <a:r>
@@ -11483,7 +12603,7 @@
             <a:endParaRPr lang="en-US" sz="1260" dirty="0"/>
           </a:p>
           <a:p>
-            <a:pPr indent="0" marL="0">
+            <a:pPr marL="0" indent="0">
               <a:buNone/>
             </a:pPr>
             <a:r>
@@ -11527,13 +12647,20 @@
             <a:prstDash val="solid"/>
           </a:ln>
           <a:effectLst>
-            <a:outerShdw sx="100000" sy="100000" kx="0" ky="0" algn="bl" rotWithShape="0" blurRad="19050" dist="6350" dir="2700000">
+            <a:outerShdw blurRad="19050" dist="6350" dir="2700000" algn="bl" rotWithShape="0">
               <a:srgbClr val="000000">
                 <a:alpha val="14000"/>
               </a:srgbClr>
             </a:outerShdw>
           </a:effectLst>
         </p:spPr>
+        <p:txBody>
+          <a:bodyPr/>
+          <a:lstStyle/>
+          <a:p>
+            <a:endParaRPr lang="es-CO"/>
+          </a:p>
+        </p:txBody>
       </p:sp>
       <p:sp>
         <p:nvSpPr>
@@ -11559,6 +12686,13 @@
             <a:prstDash val="solid"/>
           </a:ln>
         </p:spPr>
+        <p:txBody>
+          <a:bodyPr/>
+          <a:lstStyle/>
+          <a:p>
+            <a:endParaRPr lang="es-CO"/>
+          </a:p>
+        </p:txBody>
       </p:sp>
       <p:sp>
         <p:nvSpPr>
@@ -11581,7 +12715,7 @@
           <a:bodyPr wrap="square" lIns="0" tIns="0" rIns="0" bIns="0" rtlCol="0" anchor="ctr"/>
           <a:lstStyle/>
           <a:p>
-            <a:pPr indent="0" marL="0">
+            <a:pPr marL="0" indent="0">
               <a:buNone/>
             </a:pPr>
             <a:r>
@@ -11620,7 +12754,7 @@
           <a:bodyPr wrap="square" lIns="0" tIns="0" rIns="0" bIns="0" rtlCol="0" anchor="ctr"/>
           <a:lstStyle/>
           <a:p>
-            <a:pPr indent="0" marL="0">
+            <a:pPr marL="0" indent="0">
               <a:buNone/>
             </a:pPr>
             <a:r>
@@ -11659,7 +12793,7 @@
           <a:bodyPr wrap="square" lIns="0" tIns="0" rIns="0" bIns="0" rtlCol="0" anchor="t"/>
           <a:lstStyle/>
           <a:p>
-            <a:pPr indent="0" marL="0">
+            <a:pPr marL="0" indent="0">
               <a:buNone/>
             </a:pPr>
             <a:r>
@@ -11676,13 +12810,13 @@
             <a:endParaRPr lang="en-US" sz="1260" dirty="0"/>
           </a:p>
           <a:p>
-            <a:pPr indent="0" marL="0">
+            <a:pPr marL="0" indent="0">
               <a:buNone/>
             </a:pPr>
             <a:endParaRPr lang="en-US" sz="1260" dirty="0"/>
           </a:p>
           <a:p>
-            <a:pPr indent="0" marL="0">
+            <a:pPr marL="0" indent="0">
               <a:buNone/>
             </a:pPr>
             <a:r>
@@ -11699,7 +12833,7 @@
             <a:endParaRPr lang="en-US" sz="1260" dirty="0"/>
           </a:p>
           <a:p>
-            <a:pPr indent="0" marL="0">
+            <a:pPr marL="0" indent="0">
               <a:buNone/>
             </a:pPr>
             <a:r>
@@ -11716,7 +12850,7 @@
             <a:endParaRPr lang="en-US" sz="1260" dirty="0"/>
           </a:p>
           <a:p>
-            <a:pPr indent="0" marL="0">
+            <a:pPr marL="0" indent="0">
               <a:buNone/>
             </a:pPr>
             <a:r>
@@ -11733,7 +12867,7 @@
             <a:endParaRPr lang="en-US" sz="1260" dirty="0"/>
           </a:p>
           <a:p>
-            <a:pPr indent="0" marL="0">
+            <a:pPr marL="0" indent="0">
               <a:buNone/>
             </a:pPr>
             <a:r>
@@ -11777,6 +12911,13 @@
             <a:prstDash val="solid"/>
           </a:ln>
         </p:spPr>
+        <p:txBody>
+          <a:bodyPr/>
+          <a:lstStyle/>
+          <a:p>
+            <a:endParaRPr lang="es-CO"/>
+          </a:p>
+        </p:txBody>
       </p:sp>
       <p:sp>
         <p:nvSpPr>
@@ -11799,7 +12940,7 @@
           <a:bodyPr wrap="square" lIns="0" tIns="0" rIns="0" bIns="0" rtlCol="0" anchor="ctr"/>
           <a:lstStyle/>
           <a:p>
-            <a:pPr algn="ctr" indent="0" marL="0">
+            <a:pPr marL="0" indent="0" algn="ctr">
               <a:buNone/>
             </a:pPr>
             <a:r>
@@ -11808,7 +12949,7 @@
                   <a:srgbClr val="D8E2F0"/>
                 </a:solidFill>
               </a:rPr>
-              <a:t>URLs demo: simcomp.co · api.simcomp.co:8001/api/docs · api.simcomp.co:8002/api/health · … · api.simcomp.co:8005/api/health</a:t>
+              <a:t>URLs demo: simcomp.co · api.simcomp.co:8001/api/docs · api.simcomp.co:8002/api/health · … · api.simcomp.co:8006/api/health</a:t>
             </a:r>
             <a:endParaRPr lang="en-US" sz="1170" dirty="0"/>
           </a:p>
@@ -11835,7 +12976,7 @@
           <a:bodyPr wrap="square" rtlCol="0" anchor="ctr"/>
           <a:lstStyle/>
           <a:p>
-            <a:pPr algn="r" indent="0" marL="0">
+            <a:pPr marL="0" indent="0" algn="r">
               <a:buNone/>
             </a:pPr>
             <a:r>
@@ -11899,7 +13040,7 @@
           <a:bodyPr wrap="square" rtlCol="0" anchor="ctr"/>
           <a:lstStyle/>
           <a:p>
-            <a:pPr indent="0" marL="0">
+            <a:pPr marL="0" indent="0">
               <a:buNone/>
             </a:pPr>
             <a:r>
@@ -11911,7 +13052,7 @@
                 <a:ea typeface="Aptos" pitchFamily="34" charset="-122"/>
                 <a:cs typeface="Aptos" pitchFamily="34" charset="-120"/>
               </a:rPr>
-              <a:t>08 · DEMO</a:t>
+              <a:t>FLUJO</a:t>
             </a:r>
             <a:endParaRPr lang="en-US" sz="1100" dirty="0"/>
           </a:p>
@@ -11938,7 +13079,7 @@
           <a:bodyPr wrap="square" lIns="0" tIns="0" rIns="0" bIns="0" rtlCol="0" anchor="ctr"/>
           <a:lstStyle/>
           <a:p>
-            <a:pPr indent="0" marL="0">
+            <a:pPr marL="0" indent="0">
               <a:buNone/>
             </a:pPr>
             <a:r>
@@ -11977,7 +13118,7 @@
           <a:bodyPr wrap="square" lIns="0" tIns="0" rIns="0" bIns="0" rtlCol="0" anchor="ctr"/>
           <a:lstStyle/>
           <a:p>
-            <a:pPr indent="0" marL="0">
+            <a:pPr marL="0" indent="0">
               <a:buNone/>
             </a:pPr>
             <a:r>
@@ -12021,13 +13162,20 @@
             <a:prstDash val="solid"/>
           </a:ln>
           <a:effectLst>
-            <a:outerShdw sx="100000" sy="100000" kx="0" ky="0" algn="bl" rotWithShape="0" blurRad="19050" dist="6350" dir="2700000">
+            <a:outerShdw blurRad="19050" dist="6350" dir="2700000" algn="bl" rotWithShape="0">
               <a:srgbClr val="000000">
                 <a:alpha val="14000"/>
               </a:srgbClr>
             </a:outerShdw>
           </a:effectLst>
         </p:spPr>
+        <p:txBody>
+          <a:bodyPr/>
+          <a:lstStyle/>
+          <a:p>
+            <a:endParaRPr lang="es-CO"/>
+          </a:p>
+        </p:txBody>
       </p:sp>
       <p:sp>
         <p:nvSpPr>
@@ -12059,6 +13207,13 @@
             <a:prstDash val="solid"/>
           </a:ln>
         </p:spPr>
+        <p:txBody>
+          <a:bodyPr/>
+          <a:lstStyle/>
+          <a:p>
+            <a:endParaRPr lang="es-CO"/>
+          </a:p>
+        </p:txBody>
       </p:sp>
       <p:sp>
         <p:nvSpPr>
@@ -12081,7 +13236,7 @@
           <a:bodyPr wrap="square" lIns="0" tIns="0" rIns="0" bIns="0" rtlCol="0" anchor="ctr"/>
           <a:lstStyle/>
           <a:p>
-            <a:pPr algn="ctr" indent="0" marL="0">
+            <a:pPr marL="0" indent="0" algn="ctr">
               <a:buNone/>
             </a:pPr>
             <a:r>
@@ -12120,7 +13275,7 @@
           <a:bodyPr wrap="square" lIns="0" tIns="0" rIns="0" bIns="0" rtlCol="0" anchor="ctr"/>
           <a:lstStyle/>
           <a:p>
-            <a:pPr indent="0" marL="0">
+            <a:pPr marL="0" indent="0">
               <a:buNone/>
             </a:pPr>
             <a:r>
@@ -12161,13 +13316,20 @@
             <a:prstDash val="solid"/>
           </a:ln>
           <a:effectLst>
-            <a:outerShdw sx="100000" sy="100000" kx="0" ky="0" algn="bl" rotWithShape="0" blurRad="19050" dist="6350" dir="2700000">
+            <a:outerShdw blurRad="19050" dist="6350" dir="2700000" algn="bl" rotWithShape="0">
               <a:srgbClr val="000000">
                 <a:alpha val="14000"/>
               </a:srgbClr>
             </a:outerShdw>
           </a:effectLst>
         </p:spPr>
+        <p:txBody>
+          <a:bodyPr/>
+          <a:lstStyle/>
+          <a:p>
+            <a:endParaRPr lang="es-CO"/>
+          </a:p>
+        </p:txBody>
       </p:sp>
       <p:sp>
         <p:nvSpPr>
@@ -12199,6 +13361,13 @@
             <a:prstDash val="solid"/>
           </a:ln>
         </p:spPr>
+        <p:txBody>
+          <a:bodyPr/>
+          <a:lstStyle/>
+          <a:p>
+            <a:endParaRPr lang="es-CO"/>
+          </a:p>
+        </p:txBody>
       </p:sp>
       <p:sp>
         <p:nvSpPr>
@@ -12221,7 +13390,7 @@
           <a:bodyPr wrap="square" lIns="0" tIns="0" rIns="0" bIns="0" rtlCol="0" anchor="ctr"/>
           <a:lstStyle/>
           <a:p>
-            <a:pPr algn="ctr" indent="0" marL="0">
+            <a:pPr marL="0" indent="0" algn="ctr">
               <a:buNone/>
             </a:pPr>
             <a:r>
@@ -12260,7 +13429,7 @@
           <a:bodyPr wrap="square" lIns="0" tIns="0" rIns="0" bIns="0" rtlCol="0" anchor="ctr"/>
           <a:lstStyle/>
           <a:p>
-            <a:pPr indent="0" marL="0">
+            <a:pPr marL="0" indent="0">
               <a:buNone/>
             </a:pPr>
             <a:r>
@@ -12301,13 +13470,20 @@
             <a:prstDash val="solid"/>
           </a:ln>
           <a:effectLst>
-            <a:outerShdw sx="100000" sy="100000" kx="0" ky="0" algn="bl" rotWithShape="0" blurRad="19050" dist="6350" dir="2700000">
+            <a:outerShdw blurRad="19050" dist="6350" dir="2700000" algn="bl" rotWithShape="0">
               <a:srgbClr val="000000">
                 <a:alpha val="14000"/>
               </a:srgbClr>
             </a:outerShdw>
           </a:effectLst>
         </p:spPr>
+        <p:txBody>
+          <a:bodyPr/>
+          <a:lstStyle/>
+          <a:p>
+            <a:endParaRPr lang="es-CO"/>
+          </a:p>
+        </p:txBody>
       </p:sp>
       <p:sp>
         <p:nvSpPr>
@@ -12339,6 +13515,13 @@
             <a:prstDash val="solid"/>
           </a:ln>
         </p:spPr>
+        <p:txBody>
+          <a:bodyPr/>
+          <a:lstStyle/>
+          <a:p>
+            <a:endParaRPr lang="es-CO"/>
+          </a:p>
+        </p:txBody>
       </p:sp>
       <p:sp>
         <p:nvSpPr>
@@ -12361,7 +13544,7 @@
           <a:bodyPr wrap="square" lIns="0" tIns="0" rIns="0" bIns="0" rtlCol="0" anchor="ctr"/>
           <a:lstStyle/>
           <a:p>
-            <a:pPr algn="ctr" indent="0" marL="0">
+            <a:pPr marL="0" indent="0" algn="ctr">
               <a:buNone/>
             </a:pPr>
             <a:r>
@@ -12400,7 +13583,7 @@
           <a:bodyPr wrap="square" lIns="0" tIns="0" rIns="0" bIns="0" rtlCol="0" anchor="ctr"/>
           <a:lstStyle/>
           <a:p>
-            <a:pPr indent="0" marL="0">
+            <a:pPr marL="0" indent="0">
               <a:buNone/>
             </a:pPr>
             <a:r>
@@ -12441,13 +13624,20 @@
             <a:prstDash val="solid"/>
           </a:ln>
           <a:effectLst>
-            <a:outerShdw sx="100000" sy="100000" kx="0" ky="0" algn="bl" rotWithShape="0" blurRad="19050" dist="6350" dir="2700000">
+            <a:outerShdw blurRad="19050" dist="6350" dir="2700000" algn="bl" rotWithShape="0">
               <a:srgbClr val="000000">
                 <a:alpha val="14000"/>
               </a:srgbClr>
             </a:outerShdw>
           </a:effectLst>
         </p:spPr>
+        <p:txBody>
+          <a:bodyPr/>
+          <a:lstStyle/>
+          <a:p>
+            <a:endParaRPr lang="es-CO"/>
+          </a:p>
+        </p:txBody>
       </p:sp>
       <p:sp>
         <p:nvSpPr>
@@ -12479,6 +13669,13 @@
             <a:prstDash val="solid"/>
           </a:ln>
         </p:spPr>
+        <p:txBody>
+          <a:bodyPr/>
+          <a:lstStyle/>
+          <a:p>
+            <a:endParaRPr lang="es-CO"/>
+          </a:p>
+        </p:txBody>
       </p:sp>
       <p:sp>
         <p:nvSpPr>
@@ -12501,7 +13698,7 @@
           <a:bodyPr wrap="square" lIns="0" tIns="0" rIns="0" bIns="0" rtlCol="0" anchor="ctr"/>
           <a:lstStyle/>
           <a:p>
-            <a:pPr algn="ctr" indent="0" marL="0">
+            <a:pPr marL="0" indent="0" algn="ctr">
               <a:buNone/>
             </a:pPr>
             <a:r>
@@ -12540,7 +13737,7 @@
           <a:bodyPr wrap="square" lIns="0" tIns="0" rIns="0" bIns="0" rtlCol="0" anchor="ctr"/>
           <a:lstStyle/>
           <a:p>
-            <a:pPr indent="0" marL="0">
+            <a:pPr marL="0" indent="0">
               <a:buNone/>
             </a:pPr>
             <a:r>
@@ -12581,13 +13778,20 @@
             <a:prstDash val="solid"/>
           </a:ln>
           <a:effectLst>
-            <a:outerShdw sx="100000" sy="100000" kx="0" ky="0" algn="bl" rotWithShape="0" blurRad="19050" dist="6350" dir="2700000">
+            <a:outerShdw blurRad="19050" dist="6350" dir="2700000" algn="bl" rotWithShape="0">
               <a:srgbClr val="000000">
                 <a:alpha val="14000"/>
               </a:srgbClr>
             </a:outerShdw>
           </a:effectLst>
         </p:spPr>
+        <p:txBody>
+          <a:bodyPr/>
+          <a:lstStyle/>
+          <a:p>
+            <a:endParaRPr lang="es-CO"/>
+          </a:p>
+        </p:txBody>
       </p:sp>
       <p:sp>
         <p:nvSpPr>
@@ -12619,6 +13823,13 @@
             <a:prstDash val="solid"/>
           </a:ln>
         </p:spPr>
+        <p:txBody>
+          <a:bodyPr/>
+          <a:lstStyle/>
+          <a:p>
+            <a:endParaRPr lang="es-CO"/>
+          </a:p>
+        </p:txBody>
       </p:sp>
       <p:sp>
         <p:nvSpPr>
@@ -12641,7 +13852,7 @@
           <a:bodyPr wrap="square" lIns="0" tIns="0" rIns="0" bIns="0" rtlCol="0" anchor="ctr"/>
           <a:lstStyle/>
           <a:p>
-            <a:pPr algn="ctr" indent="0" marL="0">
+            <a:pPr marL="0" indent="0" algn="ctr">
               <a:buNone/>
             </a:pPr>
             <a:r>
@@ -12680,7 +13891,7 @@
           <a:bodyPr wrap="square" lIns="0" tIns="0" rIns="0" bIns="0" rtlCol="0" anchor="ctr"/>
           <a:lstStyle/>
           <a:p>
-            <a:pPr indent="0" marL="0">
+            <a:pPr marL="0" indent="0">
               <a:buNone/>
             </a:pPr>
             <a:r>
@@ -12721,13 +13932,20 @@
             <a:prstDash val="solid"/>
           </a:ln>
           <a:effectLst>
-            <a:outerShdw sx="100000" sy="100000" kx="0" ky="0" algn="bl" rotWithShape="0" blurRad="19050" dist="6350" dir="2700000">
+            <a:outerShdw blurRad="19050" dist="6350" dir="2700000" algn="bl" rotWithShape="0">
               <a:srgbClr val="000000">
                 <a:alpha val="14000"/>
               </a:srgbClr>
             </a:outerShdw>
           </a:effectLst>
         </p:spPr>
+        <p:txBody>
+          <a:bodyPr/>
+          <a:lstStyle/>
+          <a:p>
+            <a:endParaRPr lang="es-CO"/>
+          </a:p>
+        </p:txBody>
       </p:sp>
       <p:sp>
         <p:nvSpPr>
@@ -12759,6 +13977,13 @@
             <a:prstDash val="solid"/>
           </a:ln>
         </p:spPr>
+        <p:txBody>
+          <a:bodyPr/>
+          <a:lstStyle/>
+          <a:p>
+            <a:endParaRPr lang="es-CO"/>
+          </a:p>
+        </p:txBody>
       </p:sp>
       <p:sp>
         <p:nvSpPr>
@@ -12781,7 +14006,7 @@
           <a:bodyPr wrap="square" lIns="0" tIns="0" rIns="0" bIns="0" rtlCol="0" anchor="ctr"/>
           <a:lstStyle/>
           <a:p>
-            <a:pPr algn="ctr" indent="0" marL="0">
+            <a:pPr marL="0" indent="0" algn="ctr">
               <a:buNone/>
             </a:pPr>
             <a:r>
@@ -12820,7 +14045,7 @@
           <a:bodyPr wrap="square" lIns="0" tIns="0" rIns="0" bIns="0" rtlCol="0" anchor="ctr"/>
           <a:lstStyle/>
           <a:p>
-            <a:pPr indent="0" marL="0">
+            <a:pPr marL="0" indent="0">
               <a:buNone/>
             </a:pPr>
             <a:r>
@@ -12843,8 +14068,8 @@
         </p:nvSpPr>
         <p:spPr>
           <a:xfrm>
-            <a:off x="868680" y="5532120"/>
-            <a:ext cx="10927080" cy="393192"/>
+            <a:off x="6192522" y="5217160"/>
+            <a:ext cx="5100318" cy="817880"/>
           </a:xfrm>
           <a:prstGeom prst="roundRect">
             <a:avLst>
@@ -12861,6 +14086,13 @@
             <a:prstDash val="solid"/>
           </a:ln>
         </p:spPr>
+        <p:txBody>
+          <a:bodyPr/>
+          <a:lstStyle/>
+          <a:p>
+            <a:endParaRPr lang="es-CO"/>
+          </a:p>
+        </p:txBody>
       </p:sp>
       <p:sp>
         <p:nvSpPr>
@@ -12870,29 +14102,26 @@
         </p:nvSpPr>
         <p:spPr>
           <a:xfrm>
-            <a:off x="1051560" y="5641848"/>
-            <a:ext cx="10515600" cy="164592"/>
-          </a:xfrm>
-          <a:prstGeom prst="rect">
-            <a:avLst/>
-          </a:prstGeom>
-          <a:noFill/>
-          <a:ln/>
-        </p:spPr>
-        <p:txBody>
-          <a:bodyPr wrap="square" lIns="0" tIns="0" rIns="0" bIns="0" rtlCol="0" anchor="ctr"/>
-          <a:lstStyle/>
-          <a:p>
-            <a:pPr algn="ctr" indent="0" marL="0">
-              <a:buNone/>
-            </a:pPr>
+            <a:off x="6437376" y="5344160"/>
+            <a:ext cx="4721352" cy="738632"/>
+          </a:xfrm>
+          <a:prstGeom prst="rect">
+            <a:avLst/>
+          </a:prstGeom>
+          <a:noFill/>
+          <a:ln/>
+        </p:spPr>
+        <p:txBody>
+          <a:bodyPr wrap="square" lIns="0" tIns="0" rIns="0" bIns="0" rtlCol="0" anchor="ctr"/>
+          <a:lstStyle/>
+          <a:p>
             <a:r>
               <a:rPr lang="en-US" sz="1220" b="1" dirty="0">
                 <a:solidFill>
                   <a:srgbClr val="F5A623"/>
                 </a:solidFill>
               </a:rPr>
-              <a:t>Tip: si preguntas por puertos del backend, la respuesta correcta es 8001, 8002, 8003, 8004 y 8005.</a:t>
+              <a:t>Tip: si preguntas por puertos del backend, la respuesta correcta es 8001, 8002, 8003, 8004, 8005 y 8006.</a:t>
             </a:r>
             <a:endParaRPr lang="en-US" sz="1220" dirty="0"/>
           </a:p>
@@ -12919,7 +14148,7 @@
           <a:bodyPr wrap="square" rtlCol="0" anchor="ctr"/>
           <a:lstStyle/>
           <a:p>
-            <a:pPr algn="r" indent="0" marL="0">
+            <a:pPr marL="0" indent="0" algn="r">
               <a:buNone/>
             </a:pPr>
             <a:r>
@@ -12934,6 +14163,194 @@
               <a:t>9</a:t>
             </a:r>
             <a:endParaRPr lang="en-US" sz="1000" dirty="0"/>
+          </a:p>
+        </p:txBody>
+      </p:sp>
+      <p:sp>
+        <p:nvSpPr>
+          <p:cNvPr id="32" name="Shape 23">
+            <a:extLst>
+              <a:ext uri="{FF2B5EF4-FFF2-40B4-BE49-F238E27FC236}">
+                <a16:creationId xmlns:a16="http://schemas.microsoft.com/office/drawing/2014/main" id="{6CE3FC1C-34FC-5F08-405D-3F5812FA0299}"/>
+              </a:ext>
+            </a:extLst>
+          </p:cNvPr>
+          <p:cNvSpPr/>
+          <p:nvPr/>
+        </p:nvSpPr>
+        <p:spPr>
+          <a:xfrm>
+            <a:off x="822960" y="5248656"/>
+            <a:ext cx="5120640" cy="841248"/>
+          </a:xfrm>
+          <a:prstGeom prst="roundRect">
+            <a:avLst>
+              <a:gd name="adj" fmla="val 8696"/>
+            </a:avLst>
+          </a:prstGeom>
+          <a:solidFill>
+            <a:srgbClr val="111827"/>
+          </a:solidFill>
+          <a:ln w="12700">
+            <a:solidFill>
+              <a:srgbClr val="2A3346"/>
+            </a:solidFill>
+            <a:prstDash val="solid"/>
+          </a:ln>
+          <a:effectLst>
+            <a:outerShdw blurRad="19050" dist="6350" dir="2700000" algn="bl" rotWithShape="0">
+              <a:srgbClr val="000000">
+                <a:alpha val="14000"/>
+              </a:srgbClr>
+            </a:outerShdw>
+          </a:effectLst>
+        </p:spPr>
+        <p:txBody>
+          <a:bodyPr/>
+          <a:lstStyle/>
+          <a:p>
+            <a:endParaRPr lang="es-CO"/>
+          </a:p>
+        </p:txBody>
+      </p:sp>
+      <p:sp>
+        <p:nvSpPr>
+          <p:cNvPr id="33" name="Text 25">
+            <a:extLst>
+              <a:ext uri="{FF2B5EF4-FFF2-40B4-BE49-F238E27FC236}">
+                <a16:creationId xmlns:a16="http://schemas.microsoft.com/office/drawing/2014/main" id="{53450B4D-A15E-DDB8-BDC0-22252C307C44}"/>
+              </a:ext>
+            </a:extLst>
+          </p:cNvPr>
+          <p:cNvSpPr/>
+          <p:nvPr/>
+        </p:nvSpPr>
+        <p:spPr>
+          <a:xfrm>
+            <a:off x="1102362" y="5407660"/>
+            <a:ext cx="420624" cy="201168"/>
+          </a:xfrm>
+          <a:prstGeom prst="rect">
+            <a:avLst/>
+          </a:prstGeom>
+          <a:noFill/>
+          <a:ln/>
+        </p:spPr>
+        <p:txBody>
+          <a:bodyPr wrap="square" lIns="0" tIns="0" rIns="0" bIns="0" rtlCol="0" anchor="ctr"/>
+          <a:lstStyle/>
+          <a:p>
+            <a:pPr marL="0" indent="0" algn="ctr">
+              <a:buNone/>
+            </a:pPr>
+            <a:r>
+              <a:rPr lang="en-US" sz="1000" b="1" dirty="0">
+                <a:solidFill>
+                  <a:schemeClr val="bg1">
+                    <a:lumMod val="50000"/>
+                  </a:schemeClr>
+                </a:solidFill>
+                <a:latin typeface="Aptos" pitchFamily="34" charset="0"/>
+                <a:ea typeface="Aptos" pitchFamily="34" charset="-122"/>
+                <a:cs typeface="Aptos" pitchFamily="34" charset="-120"/>
+              </a:rPr>
+              <a:t>07</a:t>
+            </a:r>
+            <a:endParaRPr lang="en-US" sz="1000" dirty="0">
+              <a:solidFill>
+                <a:schemeClr val="bg1">
+                  <a:lumMod val="50000"/>
+                </a:schemeClr>
+              </a:solidFill>
+            </a:endParaRPr>
+          </a:p>
+        </p:txBody>
+      </p:sp>
+      <p:sp>
+        <p:nvSpPr>
+          <p:cNvPr id="34" name="Text 26">
+            <a:extLst>
+              <a:ext uri="{FF2B5EF4-FFF2-40B4-BE49-F238E27FC236}">
+                <a16:creationId xmlns:a16="http://schemas.microsoft.com/office/drawing/2014/main" id="{1791AE8B-8235-75E9-19C4-90689486B334}"/>
+              </a:ext>
+            </a:extLst>
+          </p:cNvPr>
+          <p:cNvSpPr/>
+          <p:nvPr/>
+        </p:nvSpPr>
+        <p:spPr>
+          <a:xfrm>
+            <a:off x="1657098" y="5472176"/>
+            <a:ext cx="4069080" cy="237744"/>
+          </a:xfrm>
+          <a:prstGeom prst="rect">
+            <a:avLst/>
+          </a:prstGeom>
+          <a:noFill/>
+          <a:ln/>
+        </p:spPr>
+        <p:txBody>
+          <a:bodyPr wrap="square" lIns="0" tIns="0" rIns="0" bIns="0" rtlCol="0" anchor="ctr"/>
+          <a:lstStyle/>
+          <a:p>
+            <a:pPr marL="0" indent="0">
+              <a:buNone/>
+            </a:pPr>
+            <a:r>
+              <a:rPr lang="en-US" sz="1550" dirty="0">
+                <a:solidFill>
+                  <a:srgbClr val="EAF0FF"/>
+                </a:solidFill>
+              </a:rPr>
+              <a:t>Consultar detalle, pagar o anular y revisar estado.</a:t>
+            </a:r>
+            <a:endParaRPr lang="en-US" sz="1550" dirty="0"/>
+          </a:p>
+        </p:txBody>
+      </p:sp>
+      <p:sp>
+        <p:nvSpPr>
+          <p:cNvPr id="35" name="Shape 24">
+            <a:extLst>
+              <a:ext uri="{FF2B5EF4-FFF2-40B4-BE49-F238E27FC236}">
+                <a16:creationId xmlns:a16="http://schemas.microsoft.com/office/drawing/2014/main" id="{81826D0A-D69B-C8B8-E20D-FB9551B3E9A3}"/>
+              </a:ext>
+            </a:extLst>
+          </p:cNvPr>
+          <p:cNvSpPr/>
+          <p:nvPr/>
+        </p:nvSpPr>
+        <p:spPr>
+          <a:xfrm>
+            <a:off x="1102362" y="5380228"/>
+            <a:ext cx="420624" cy="256032"/>
+          </a:xfrm>
+          <a:prstGeom prst="roundRect">
+            <a:avLst>
+              <a:gd name="adj" fmla="val 28571"/>
+            </a:avLst>
+          </a:prstGeom>
+          <a:solidFill>
+            <a:schemeClr val="bg1">
+              <a:lumMod val="75000"/>
+              <a:alpha val="16000"/>
+            </a:schemeClr>
+          </a:solidFill>
+          <a:ln w="12700">
+            <a:solidFill>
+              <a:schemeClr val="bg1">
+                <a:lumMod val="50000"/>
+                <a:alpha val="80000"/>
+              </a:schemeClr>
+            </a:solidFill>
+            <a:prstDash val="solid"/>
+          </a:ln>
+        </p:spPr>
+        <p:txBody>
+          <a:bodyPr/>
+          <a:lstStyle/>
+          <a:p>
+            <a:endParaRPr lang="es-CO" dirty="0"/>
           </a:p>
         </p:txBody>
       </p:sp>
@@ -13238,4 +14655,634 @@
     </a:ext>
   </a:extLst>
 </a:theme>
+</file>
+
+<file path=ppt/theme/theme2.xml><?xml version="1.0" encoding="utf-8"?>
+<a:theme xmlns:a="http://schemas.openxmlformats.org/drawingml/2006/main" name="Tema de Office">
+  <a:themeElements>
+    <a:clrScheme name="Office">
+      <a:dk1>
+        <a:sysClr val="windowText" lastClr="000000"/>
+      </a:dk1>
+      <a:lt1>
+        <a:sysClr val="window" lastClr="FFFFFF"/>
+      </a:lt1>
+      <a:dk2>
+        <a:srgbClr val="0E2841"/>
+      </a:dk2>
+      <a:lt2>
+        <a:srgbClr val="E8E8E8"/>
+      </a:lt2>
+      <a:accent1>
+        <a:srgbClr val="156082"/>
+      </a:accent1>
+      <a:accent2>
+        <a:srgbClr val="E97132"/>
+      </a:accent2>
+      <a:accent3>
+        <a:srgbClr val="196B24"/>
+      </a:accent3>
+      <a:accent4>
+        <a:srgbClr val="0F9ED5"/>
+      </a:accent4>
+      <a:accent5>
+        <a:srgbClr val="A02B93"/>
+      </a:accent5>
+      <a:accent6>
+        <a:srgbClr val="4EA72E"/>
+      </a:accent6>
+      <a:hlink>
+        <a:srgbClr val="467886"/>
+      </a:hlink>
+      <a:folHlink>
+        <a:srgbClr val="96607D"/>
+      </a:folHlink>
+    </a:clrScheme>
+    <a:fontScheme name="Office">
+      <a:majorFont>
+        <a:latin typeface="Aptos Display" panose="02110004020202020204"/>
+        <a:ea typeface=""/>
+        <a:cs typeface=""/>
+        <a:font script="Jpan" typeface="游ゴシック Light"/>
+        <a:font script="Hang" typeface="맑은 고딕"/>
+        <a:font script="Hans" typeface="等线 Light"/>
+        <a:font script="Hant" typeface="新細明體"/>
+        <a:font script="Arab" typeface="Times New Roman"/>
+        <a:font script="Hebr" typeface="Times New Roman"/>
+        <a:font script="Thai" typeface="Angsana New"/>
+        <a:font script="Ethi" typeface="Nyala"/>
+        <a:font script="Beng" typeface="Vrinda"/>
+        <a:font script="Gujr" typeface="Shruti"/>
+        <a:font script="Khmr" typeface="MoolBoran"/>
+        <a:font script="Knda" typeface="Tunga"/>
+        <a:font script="Guru" typeface="Raavi"/>
+        <a:font script="Cans" typeface="Euphemia"/>
+        <a:font script="Cher" typeface="Plantagenet Cherokee"/>
+        <a:font script="Yiii" typeface="Microsoft Yi Baiti"/>
+        <a:font script="Tibt" typeface="Microsoft Himalaya"/>
+        <a:font script="Thaa" typeface="MV Boli"/>
+        <a:font script="Deva" typeface="Mangal"/>
+        <a:font script="Telu" typeface="Gautami"/>
+        <a:font script="Taml" typeface="Latha"/>
+        <a:font script="Syrc" typeface="Estrangelo Edessa"/>
+        <a:font script="Orya" typeface="Kalinga"/>
+        <a:font script="Mlym" typeface="Kartika"/>
+        <a:font script="Laoo" typeface="DokChampa"/>
+        <a:font script="Sinh" typeface="Iskoola Pota"/>
+        <a:font script="Mong" typeface="Mongolian Baiti"/>
+        <a:font script="Viet" typeface="Times New Roman"/>
+        <a:font script="Uigh" typeface="Microsoft Uighur"/>
+        <a:font script="Geor" typeface="Sylfaen"/>
+        <a:font script="Armn" typeface="Arial"/>
+        <a:font script="Bugi" typeface="Leelawadee UI"/>
+        <a:font script="Bopo" typeface="Microsoft JhengHei"/>
+        <a:font script="Java" typeface="Javanese Text"/>
+        <a:font script="Lisu" typeface="Segoe UI"/>
+        <a:font script="Mymr" typeface="Myanmar Text"/>
+        <a:font script="Nkoo" typeface="Ebrima"/>
+        <a:font script="Olck" typeface="Nirmala UI"/>
+        <a:font script="Osma" typeface="Ebrima"/>
+        <a:font script="Phag" typeface="Phagspa"/>
+        <a:font script="Syrn" typeface="Estrangelo Edessa"/>
+        <a:font script="Syrj" typeface="Estrangelo Edessa"/>
+        <a:font script="Syre" typeface="Estrangelo Edessa"/>
+        <a:font script="Sora" typeface="Nirmala UI"/>
+        <a:font script="Tale" typeface="Microsoft Tai Le"/>
+        <a:font script="Talu" typeface="Microsoft New Tai Lue"/>
+        <a:font script="Tfng" typeface="Ebrima"/>
+      </a:majorFont>
+      <a:minorFont>
+        <a:latin typeface="Aptos" panose="02110004020202020204"/>
+        <a:ea typeface=""/>
+        <a:cs typeface=""/>
+        <a:font script="Jpan" typeface="游ゴシック"/>
+        <a:font script="Hang" typeface="맑은 고딕"/>
+        <a:font script="Hans" typeface="等线"/>
+        <a:font script="Hant" typeface="新細明體"/>
+        <a:font script="Arab" typeface="Arial"/>
+        <a:font script="Hebr" typeface="Arial"/>
+        <a:font script="Thai" typeface="Cordia New"/>
+        <a:font script="Ethi" typeface="Nyala"/>
+        <a:font script="Beng" typeface="Vrinda"/>
+        <a:font script="Gujr" typeface="Shruti"/>
+        <a:font script="Khmr" typeface="DaunPenh"/>
+        <a:font script="Knda" typeface="Tunga"/>
+        <a:font script="Guru" typeface="Raavi"/>
+        <a:font script="Cans" typeface="Euphemia"/>
+        <a:font script="Cher" typeface="Plantagenet Cherokee"/>
+        <a:font script="Yiii" typeface="Microsoft Yi Baiti"/>
+        <a:font script="Tibt" typeface="Microsoft Himalaya"/>
+        <a:font script="Thaa" typeface="MV Boli"/>
+        <a:font script="Deva" typeface="Mangal"/>
+        <a:font script="Telu" typeface="Gautami"/>
+        <a:font script="Taml" typeface="Latha"/>
+        <a:font script="Syrc" typeface="Estrangelo Edessa"/>
+        <a:font script="Orya" typeface="Kalinga"/>
+        <a:font script="Mlym" typeface="Kartika"/>
+        <a:font script="Laoo" typeface="DokChampa"/>
+        <a:font script="Sinh" typeface="Iskoola Pota"/>
+        <a:font script="Mong" typeface="Mongolian Baiti"/>
+        <a:font script="Viet" typeface="Arial"/>
+        <a:font script="Uigh" typeface="Microsoft Uighur"/>
+        <a:font script="Geor" typeface="Sylfaen"/>
+        <a:font script="Armn" typeface="Arial"/>
+        <a:font script="Bugi" typeface="Leelawadee UI"/>
+        <a:font script="Bopo" typeface="Microsoft JhengHei"/>
+        <a:font script="Java" typeface="Javanese Text"/>
+        <a:font script="Lisu" typeface="Segoe UI"/>
+        <a:font script="Mymr" typeface="Myanmar Text"/>
+        <a:font script="Nkoo" typeface="Ebrima"/>
+        <a:font script="Olck" typeface="Nirmala UI"/>
+        <a:font script="Osma" typeface="Ebrima"/>
+        <a:font script="Phag" typeface="Phagspa"/>
+        <a:font script="Syrn" typeface="Estrangelo Edessa"/>
+        <a:font script="Syrj" typeface="Estrangelo Edessa"/>
+        <a:font script="Syre" typeface="Estrangelo Edessa"/>
+        <a:font script="Sora" typeface="Nirmala UI"/>
+        <a:font script="Tale" typeface="Microsoft Tai Le"/>
+        <a:font script="Talu" typeface="Microsoft New Tai Lue"/>
+        <a:font script="Tfng" typeface="Ebrima"/>
+      </a:minorFont>
+    </a:fontScheme>
+    <a:fmtScheme name="Office">
+      <a:fillStyleLst>
+        <a:solidFill>
+          <a:schemeClr val="phClr"/>
+        </a:solidFill>
+        <a:gradFill rotWithShape="1">
+          <a:gsLst>
+            <a:gs pos="0">
+              <a:schemeClr val="phClr">
+                <a:lumMod val="110000"/>
+                <a:satMod val="105000"/>
+                <a:tint val="67000"/>
+              </a:schemeClr>
+            </a:gs>
+            <a:gs pos="50000">
+              <a:schemeClr val="phClr">
+                <a:lumMod val="105000"/>
+                <a:satMod val="103000"/>
+                <a:tint val="73000"/>
+              </a:schemeClr>
+            </a:gs>
+            <a:gs pos="100000">
+              <a:schemeClr val="phClr">
+                <a:lumMod val="105000"/>
+                <a:satMod val="109000"/>
+                <a:tint val="81000"/>
+              </a:schemeClr>
+            </a:gs>
+          </a:gsLst>
+          <a:lin ang="5400000" scaled="0"/>
+        </a:gradFill>
+        <a:gradFill rotWithShape="1">
+          <a:gsLst>
+            <a:gs pos="0">
+              <a:schemeClr val="phClr">
+                <a:satMod val="103000"/>
+                <a:lumMod val="102000"/>
+                <a:tint val="94000"/>
+              </a:schemeClr>
+            </a:gs>
+            <a:gs pos="50000">
+              <a:schemeClr val="phClr">
+                <a:satMod val="110000"/>
+                <a:lumMod val="100000"/>
+                <a:shade val="100000"/>
+              </a:schemeClr>
+            </a:gs>
+            <a:gs pos="100000">
+              <a:schemeClr val="phClr">
+                <a:lumMod val="99000"/>
+                <a:satMod val="120000"/>
+                <a:shade val="78000"/>
+              </a:schemeClr>
+            </a:gs>
+          </a:gsLst>
+          <a:lin ang="5400000" scaled="0"/>
+        </a:gradFill>
+      </a:fillStyleLst>
+      <a:lnStyleLst>
+        <a:ln w="12700" cap="flat" cmpd="sng" algn="ctr">
+          <a:solidFill>
+            <a:schemeClr val="phClr"/>
+          </a:solidFill>
+          <a:prstDash val="solid"/>
+          <a:miter lim="800000"/>
+        </a:ln>
+        <a:ln w="19050" cap="flat" cmpd="sng" algn="ctr">
+          <a:solidFill>
+            <a:schemeClr val="phClr"/>
+          </a:solidFill>
+          <a:prstDash val="solid"/>
+          <a:miter lim="800000"/>
+        </a:ln>
+        <a:ln w="25400" cap="flat" cmpd="sng" algn="ctr">
+          <a:solidFill>
+            <a:schemeClr val="phClr"/>
+          </a:solidFill>
+          <a:prstDash val="solid"/>
+          <a:miter lim="800000"/>
+        </a:ln>
+      </a:lnStyleLst>
+      <a:effectStyleLst>
+        <a:effectStyle>
+          <a:effectLst/>
+        </a:effectStyle>
+        <a:effectStyle>
+          <a:effectLst/>
+        </a:effectStyle>
+        <a:effectStyle>
+          <a:effectLst>
+            <a:outerShdw blurRad="57150" dist="19050" dir="5400000" algn="ctr" rotWithShape="0">
+              <a:srgbClr val="000000">
+                <a:alpha val="63000"/>
+              </a:srgbClr>
+            </a:outerShdw>
+          </a:effectLst>
+        </a:effectStyle>
+      </a:effectStyleLst>
+      <a:bgFillStyleLst>
+        <a:solidFill>
+          <a:schemeClr val="phClr"/>
+        </a:solidFill>
+        <a:solidFill>
+          <a:schemeClr val="phClr">
+            <a:tint val="95000"/>
+            <a:satMod val="170000"/>
+          </a:schemeClr>
+        </a:solidFill>
+        <a:gradFill rotWithShape="1">
+          <a:gsLst>
+            <a:gs pos="0">
+              <a:schemeClr val="phClr">
+                <a:tint val="93000"/>
+                <a:satMod val="150000"/>
+                <a:shade val="98000"/>
+                <a:lumMod val="102000"/>
+              </a:schemeClr>
+            </a:gs>
+            <a:gs pos="50000">
+              <a:schemeClr val="phClr">
+                <a:tint val="98000"/>
+                <a:satMod val="130000"/>
+                <a:shade val="90000"/>
+                <a:lumMod val="103000"/>
+              </a:schemeClr>
+            </a:gs>
+            <a:gs pos="100000">
+              <a:schemeClr val="phClr">
+                <a:shade val="63000"/>
+                <a:satMod val="120000"/>
+              </a:schemeClr>
+            </a:gs>
+          </a:gsLst>
+          <a:lin ang="5400000" scaled="0"/>
+        </a:gradFill>
+      </a:bgFillStyleLst>
+    </a:fmtScheme>
+  </a:themeElements>
+  <a:objectDefaults>
+    <a:lnDef>
+      <a:spPr/>
+      <a:bodyPr/>
+      <a:lstStyle/>
+      <a:style>
+        <a:lnRef idx="2">
+          <a:schemeClr val="accent1"/>
+        </a:lnRef>
+        <a:fillRef idx="0">
+          <a:schemeClr val="accent1"/>
+        </a:fillRef>
+        <a:effectRef idx="1">
+          <a:schemeClr val="accent1"/>
+        </a:effectRef>
+        <a:fontRef idx="minor">
+          <a:schemeClr val="tx1"/>
+        </a:fontRef>
+      </a:style>
+    </a:lnDef>
+  </a:objectDefaults>
+  <a:extraClrSchemeLst/>
+  <a:extLst>
+    <a:ext uri="{05A4C25C-085E-4340-85A3-A5531E510DB2}">
+      <thm15:themeFamily xmlns:thm15="http://schemas.microsoft.com/office/thememl/2012/main" name="Office Theme" id="{2E142A2C-CD16-42D6-873A-C26D2A0506FA}" vid="{1BDDFF52-6CD6-40A5-AB3C-68EB2F1E4D0A}"/>
+    </a:ext>
+  </a:extLst>
+</a:theme>
+</file>
+
+<file path=ppt/theme/theme3.xml><?xml version="1.0" encoding="utf-8"?>
+<a:theme xmlns:a="http://schemas.openxmlformats.org/drawingml/2006/main" name="Tema de Office">
+  <a:themeElements>
+    <a:clrScheme name="Office">
+      <a:dk1>
+        <a:sysClr val="windowText" lastClr="000000"/>
+      </a:dk1>
+      <a:lt1>
+        <a:sysClr val="window" lastClr="FFFFFF"/>
+      </a:lt1>
+      <a:dk2>
+        <a:srgbClr val="0E2841"/>
+      </a:dk2>
+      <a:lt2>
+        <a:srgbClr val="E8E8E8"/>
+      </a:lt2>
+      <a:accent1>
+        <a:srgbClr val="156082"/>
+      </a:accent1>
+      <a:accent2>
+        <a:srgbClr val="E97132"/>
+      </a:accent2>
+      <a:accent3>
+        <a:srgbClr val="196B24"/>
+      </a:accent3>
+      <a:accent4>
+        <a:srgbClr val="0F9ED5"/>
+      </a:accent4>
+      <a:accent5>
+        <a:srgbClr val="A02B93"/>
+      </a:accent5>
+      <a:accent6>
+        <a:srgbClr val="4EA72E"/>
+      </a:accent6>
+      <a:hlink>
+        <a:srgbClr val="467886"/>
+      </a:hlink>
+      <a:folHlink>
+        <a:srgbClr val="96607D"/>
+      </a:folHlink>
+    </a:clrScheme>
+    <a:fontScheme name="Office">
+      <a:majorFont>
+        <a:latin typeface="Aptos Display" panose="02110004020202020204"/>
+        <a:ea typeface=""/>
+        <a:cs typeface=""/>
+        <a:font script="Jpan" typeface="游ゴシック Light"/>
+        <a:font script="Hang" typeface="맑은 고딕"/>
+        <a:font script="Hans" typeface="等线 Light"/>
+        <a:font script="Hant" typeface="新細明體"/>
+        <a:font script="Arab" typeface="Times New Roman"/>
+        <a:font script="Hebr" typeface="Times New Roman"/>
+        <a:font script="Thai" typeface="Angsana New"/>
+        <a:font script="Ethi" typeface="Nyala"/>
+        <a:font script="Beng" typeface="Vrinda"/>
+        <a:font script="Gujr" typeface="Shruti"/>
+        <a:font script="Khmr" typeface="MoolBoran"/>
+        <a:font script="Knda" typeface="Tunga"/>
+        <a:font script="Guru" typeface="Raavi"/>
+        <a:font script="Cans" typeface="Euphemia"/>
+        <a:font script="Cher" typeface="Plantagenet Cherokee"/>
+        <a:font script="Yiii" typeface="Microsoft Yi Baiti"/>
+        <a:font script="Tibt" typeface="Microsoft Himalaya"/>
+        <a:font script="Thaa" typeface="MV Boli"/>
+        <a:font script="Deva" typeface="Mangal"/>
+        <a:font script="Telu" typeface="Gautami"/>
+        <a:font script="Taml" typeface="Latha"/>
+        <a:font script="Syrc" typeface="Estrangelo Edessa"/>
+        <a:font script="Orya" typeface="Kalinga"/>
+        <a:font script="Mlym" typeface="Kartika"/>
+        <a:font script="Laoo" typeface="DokChampa"/>
+        <a:font script="Sinh" typeface="Iskoola Pota"/>
+        <a:font script="Mong" typeface="Mongolian Baiti"/>
+        <a:font script="Viet" typeface="Times New Roman"/>
+        <a:font script="Uigh" typeface="Microsoft Uighur"/>
+        <a:font script="Geor" typeface="Sylfaen"/>
+        <a:font script="Armn" typeface="Arial"/>
+        <a:font script="Bugi" typeface="Leelawadee UI"/>
+        <a:font script="Bopo" typeface="Microsoft JhengHei"/>
+        <a:font script="Java" typeface="Javanese Text"/>
+        <a:font script="Lisu" typeface="Segoe UI"/>
+        <a:font script="Mymr" typeface="Myanmar Text"/>
+        <a:font script="Nkoo" typeface="Ebrima"/>
+        <a:font script="Olck" typeface="Nirmala UI"/>
+        <a:font script="Osma" typeface="Ebrima"/>
+        <a:font script="Phag" typeface="Phagspa"/>
+        <a:font script="Syrn" typeface="Estrangelo Edessa"/>
+        <a:font script="Syrj" typeface="Estrangelo Edessa"/>
+        <a:font script="Syre" typeface="Estrangelo Edessa"/>
+        <a:font script="Sora" typeface="Nirmala UI"/>
+        <a:font script="Tale" typeface="Microsoft Tai Le"/>
+        <a:font script="Talu" typeface="Microsoft New Tai Lue"/>
+        <a:font script="Tfng" typeface="Ebrima"/>
+      </a:majorFont>
+      <a:minorFont>
+        <a:latin typeface="Aptos" panose="02110004020202020204"/>
+        <a:ea typeface=""/>
+        <a:cs typeface=""/>
+        <a:font script="Jpan" typeface="游ゴシック"/>
+        <a:font script="Hang" typeface="맑은 고딕"/>
+        <a:font script="Hans" typeface="等线"/>
+        <a:font script="Hant" typeface="新細明體"/>
+        <a:font script="Arab" typeface="Arial"/>
+        <a:font script="Hebr" typeface="Arial"/>
+        <a:font script="Thai" typeface="Cordia New"/>
+        <a:font script="Ethi" typeface="Nyala"/>
+        <a:font script="Beng" typeface="Vrinda"/>
+        <a:font script="Gujr" typeface="Shruti"/>
+        <a:font script="Khmr" typeface="DaunPenh"/>
+        <a:font script="Knda" typeface="Tunga"/>
+        <a:font script="Guru" typeface="Raavi"/>
+        <a:font script="Cans" typeface="Euphemia"/>
+        <a:font script="Cher" typeface="Plantagenet Cherokee"/>
+        <a:font script="Yiii" typeface="Microsoft Yi Baiti"/>
+        <a:font script="Tibt" typeface="Microsoft Himalaya"/>
+        <a:font script="Thaa" typeface="MV Boli"/>
+        <a:font script="Deva" typeface="Mangal"/>
+        <a:font script="Telu" typeface="Gautami"/>
+        <a:font script="Taml" typeface="Latha"/>
+        <a:font script="Syrc" typeface="Estrangelo Edessa"/>
+        <a:font script="Orya" typeface="Kalinga"/>
+        <a:font script="Mlym" typeface="Kartika"/>
+        <a:font script="Laoo" typeface="DokChampa"/>
+        <a:font script="Sinh" typeface="Iskoola Pota"/>
+        <a:font script="Mong" typeface="Mongolian Baiti"/>
+        <a:font script="Viet" typeface="Arial"/>
+        <a:font script="Uigh" typeface="Microsoft Uighur"/>
+        <a:font script="Geor" typeface="Sylfaen"/>
+        <a:font script="Armn" typeface="Arial"/>
+        <a:font script="Bugi" typeface="Leelawadee UI"/>
+        <a:font script="Bopo" typeface="Microsoft JhengHei"/>
+        <a:font script="Java" typeface="Javanese Text"/>
+        <a:font script="Lisu" typeface="Segoe UI"/>
+        <a:font script="Mymr" typeface="Myanmar Text"/>
+        <a:font script="Nkoo" typeface="Ebrima"/>
+        <a:font script="Olck" typeface="Nirmala UI"/>
+        <a:font script="Osma" typeface="Ebrima"/>
+        <a:font script="Phag" typeface="Phagspa"/>
+        <a:font script="Syrn" typeface="Estrangelo Edessa"/>
+        <a:font script="Syrj" typeface="Estrangelo Edessa"/>
+        <a:font script="Syre" typeface="Estrangelo Edessa"/>
+        <a:font script="Sora" typeface="Nirmala UI"/>
+        <a:font script="Tale" typeface="Microsoft Tai Le"/>
+        <a:font script="Talu" typeface="Microsoft New Tai Lue"/>
+        <a:font script="Tfng" typeface="Ebrima"/>
+      </a:minorFont>
+    </a:fontScheme>
+    <a:fmtScheme name="Office">
+      <a:fillStyleLst>
+        <a:solidFill>
+          <a:schemeClr val="phClr"/>
+        </a:solidFill>
+        <a:gradFill rotWithShape="1">
+          <a:gsLst>
+            <a:gs pos="0">
+              <a:schemeClr val="phClr">
+                <a:lumMod val="110000"/>
+                <a:satMod val="105000"/>
+                <a:tint val="67000"/>
+              </a:schemeClr>
+            </a:gs>
+            <a:gs pos="50000">
+              <a:schemeClr val="phClr">
+                <a:lumMod val="105000"/>
+                <a:satMod val="103000"/>
+                <a:tint val="73000"/>
+              </a:schemeClr>
+            </a:gs>
+            <a:gs pos="100000">
+              <a:schemeClr val="phClr">
+                <a:lumMod val="105000"/>
+                <a:satMod val="109000"/>
+                <a:tint val="81000"/>
+              </a:schemeClr>
+            </a:gs>
+          </a:gsLst>
+          <a:lin ang="5400000" scaled="0"/>
+        </a:gradFill>
+        <a:gradFill rotWithShape="1">
+          <a:gsLst>
+            <a:gs pos="0">
+              <a:schemeClr val="phClr">
+                <a:satMod val="103000"/>
+                <a:lumMod val="102000"/>
+                <a:tint val="94000"/>
+              </a:schemeClr>
+            </a:gs>
+            <a:gs pos="50000">
+              <a:schemeClr val="phClr">
+                <a:satMod val="110000"/>
+                <a:lumMod val="100000"/>
+                <a:shade val="100000"/>
+              </a:schemeClr>
+            </a:gs>
+            <a:gs pos="100000">
+              <a:schemeClr val="phClr">
+                <a:lumMod val="99000"/>
+                <a:satMod val="120000"/>
+                <a:shade val="78000"/>
+              </a:schemeClr>
+            </a:gs>
+          </a:gsLst>
+          <a:lin ang="5400000" scaled="0"/>
+        </a:gradFill>
+      </a:fillStyleLst>
+      <a:lnStyleLst>
+        <a:ln w="12700" cap="flat" cmpd="sng" algn="ctr">
+          <a:solidFill>
+            <a:schemeClr val="phClr"/>
+          </a:solidFill>
+          <a:prstDash val="solid"/>
+          <a:miter lim="800000"/>
+        </a:ln>
+        <a:ln w="19050" cap="flat" cmpd="sng" algn="ctr">
+          <a:solidFill>
+            <a:schemeClr val="phClr"/>
+          </a:solidFill>
+          <a:prstDash val="solid"/>
+          <a:miter lim="800000"/>
+        </a:ln>
+        <a:ln w="25400" cap="flat" cmpd="sng" algn="ctr">
+          <a:solidFill>
+            <a:schemeClr val="phClr"/>
+          </a:solidFill>
+          <a:prstDash val="solid"/>
+          <a:miter lim="800000"/>
+        </a:ln>
+      </a:lnStyleLst>
+      <a:effectStyleLst>
+        <a:effectStyle>
+          <a:effectLst/>
+        </a:effectStyle>
+        <a:effectStyle>
+          <a:effectLst/>
+        </a:effectStyle>
+        <a:effectStyle>
+          <a:effectLst>
+            <a:outerShdw blurRad="57150" dist="19050" dir="5400000" algn="ctr" rotWithShape="0">
+              <a:srgbClr val="000000">
+                <a:alpha val="63000"/>
+              </a:srgbClr>
+            </a:outerShdw>
+          </a:effectLst>
+        </a:effectStyle>
+      </a:effectStyleLst>
+      <a:bgFillStyleLst>
+        <a:solidFill>
+          <a:schemeClr val="phClr"/>
+        </a:solidFill>
+        <a:solidFill>
+          <a:schemeClr val="phClr">
+            <a:tint val="95000"/>
+            <a:satMod val="170000"/>
+          </a:schemeClr>
+        </a:solidFill>
+        <a:gradFill rotWithShape="1">
+          <a:gsLst>
+            <a:gs pos="0">
+              <a:schemeClr val="phClr">
+                <a:tint val="93000"/>
+                <a:satMod val="150000"/>
+                <a:shade val="98000"/>
+                <a:lumMod val="102000"/>
+              </a:schemeClr>
+            </a:gs>
+            <a:gs pos="50000">
+              <a:schemeClr val="phClr">
+                <a:tint val="98000"/>
+                <a:satMod val="130000"/>
+                <a:shade val="90000"/>
+                <a:lumMod val="103000"/>
+              </a:schemeClr>
+            </a:gs>
+            <a:gs pos="100000">
+              <a:schemeClr val="phClr">
+                <a:shade val="63000"/>
+                <a:satMod val="120000"/>
+              </a:schemeClr>
+            </a:gs>
+          </a:gsLst>
+          <a:lin ang="5400000" scaled="0"/>
+        </a:gradFill>
+      </a:bgFillStyleLst>
+    </a:fmtScheme>
+  </a:themeElements>
+  <a:objectDefaults>
+    <a:lnDef>
+      <a:spPr/>
+      <a:bodyPr/>
+      <a:lstStyle/>
+      <a:style>
+        <a:lnRef idx="2">
+          <a:schemeClr val="accent1"/>
+        </a:lnRef>
+        <a:fillRef idx="0">
+          <a:schemeClr val="accent1"/>
+        </a:fillRef>
+        <a:effectRef idx="1">
+          <a:schemeClr val="accent1"/>
+        </a:effectRef>
+        <a:fontRef idx="minor">
+          <a:schemeClr val="tx1"/>
+        </a:fontRef>
+      </a:style>
+    </a:lnDef>
+  </a:objectDefaults>
+  <a:extraClrSchemeLst/>
+  <a:extLst>
+    <a:ext uri="{05A4C25C-085E-4340-85A3-A5531E510DB2}">
+      <thm15:themeFamily xmlns:thm15="http://schemas.microsoft.com/office/thememl/2012/main" name="Office Theme" id="{2E142A2C-CD16-42D6-873A-C26D2A0506FA}" vid="{1BDDFF52-6CD6-40A5-AB3C-68EB2F1E4D0A}"/>
+    </a:ext>
+  </a:extLst>
+</a:theme>
 </file>